--- a/Presentation1.pptx
+++ b/Presentation1.pptx
@@ -107,7 +107,7 @@
   <p:extLst>
     <p:ext uri="{EFAFB233-063F-42B5-8137-9DF3F51BA10A}">
       <p15:sldGuideLst xmlns:p15="http://schemas.microsoft.com/office/powerpoint/2012/main">
-        <p15:guide id="1" orient="horz" pos="9535" userDrawn="1">
+        <p15:guide id="1" orient="horz" pos="9558" userDrawn="1">
           <p15:clr>
             <a:srgbClr val="A4A3A4"/>
           </p15:clr>
@@ -272,7 +272,7 @@
           <a:p>
             <a:fld id="{9BA507A8-AB1E-4362-AD52-AB8FDE0591EF}" type="datetimeFigureOut">
               <a:rPr lang="en-GB" smtClean="0"/>
-              <a:t>24/03/2026</a:t>
+              <a:t>29/03/2026</a:t>
             </a:fld>
             <a:endParaRPr lang="en-GB"/>
           </a:p>
@@ -472,7 +472,7 @@
           <a:p>
             <a:fld id="{9BA507A8-AB1E-4362-AD52-AB8FDE0591EF}" type="datetimeFigureOut">
               <a:rPr lang="en-GB" smtClean="0"/>
-              <a:t>24/03/2026</a:t>
+              <a:t>29/03/2026</a:t>
             </a:fld>
             <a:endParaRPr lang="en-GB"/>
           </a:p>
@@ -682,7 +682,7 @@
           <a:p>
             <a:fld id="{9BA507A8-AB1E-4362-AD52-AB8FDE0591EF}" type="datetimeFigureOut">
               <a:rPr lang="en-GB" smtClean="0"/>
-              <a:t>24/03/2026</a:t>
+              <a:t>29/03/2026</a:t>
             </a:fld>
             <a:endParaRPr lang="en-GB"/>
           </a:p>
@@ -882,7 +882,7 @@
           <a:p>
             <a:fld id="{9BA507A8-AB1E-4362-AD52-AB8FDE0591EF}" type="datetimeFigureOut">
               <a:rPr lang="en-GB" smtClean="0"/>
-              <a:t>24/03/2026</a:t>
+              <a:t>29/03/2026</a:t>
             </a:fld>
             <a:endParaRPr lang="en-GB"/>
           </a:p>
@@ -1158,7 +1158,7 @@
           <a:p>
             <a:fld id="{9BA507A8-AB1E-4362-AD52-AB8FDE0591EF}" type="datetimeFigureOut">
               <a:rPr lang="en-GB" smtClean="0"/>
-              <a:t>24/03/2026</a:t>
+              <a:t>29/03/2026</a:t>
             </a:fld>
             <a:endParaRPr lang="en-GB"/>
           </a:p>
@@ -1426,7 +1426,7 @@
           <a:p>
             <a:fld id="{9BA507A8-AB1E-4362-AD52-AB8FDE0591EF}" type="datetimeFigureOut">
               <a:rPr lang="en-GB" smtClean="0"/>
-              <a:t>24/03/2026</a:t>
+              <a:t>29/03/2026</a:t>
             </a:fld>
             <a:endParaRPr lang="en-GB"/>
           </a:p>
@@ -1841,7 +1841,7 @@
           <a:p>
             <a:fld id="{9BA507A8-AB1E-4362-AD52-AB8FDE0591EF}" type="datetimeFigureOut">
               <a:rPr lang="en-GB" smtClean="0"/>
-              <a:t>24/03/2026</a:t>
+              <a:t>29/03/2026</a:t>
             </a:fld>
             <a:endParaRPr lang="en-GB"/>
           </a:p>
@@ -1983,7 +1983,7 @@
           <a:p>
             <a:fld id="{9BA507A8-AB1E-4362-AD52-AB8FDE0591EF}" type="datetimeFigureOut">
               <a:rPr lang="en-GB" smtClean="0"/>
-              <a:t>24/03/2026</a:t>
+              <a:t>29/03/2026</a:t>
             </a:fld>
             <a:endParaRPr lang="en-GB"/>
           </a:p>
@@ -2096,7 +2096,7 @@
           <a:p>
             <a:fld id="{9BA507A8-AB1E-4362-AD52-AB8FDE0591EF}" type="datetimeFigureOut">
               <a:rPr lang="en-GB" smtClean="0"/>
-              <a:t>24/03/2026</a:t>
+              <a:t>29/03/2026</a:t>
             </a:fld>
             <a:endParaRPr lang="en-GB"/>
           </a:p>
@@ -2409,7 +2409,7 @@
           <a:p>
             <a:fld id="{9BA507A8-AB1E-4362-AD52-AB8FDE0591EF}" type="datetimeFigureOut">
               <a:rPr lang="en-GB" smtClean="0"/>
-              <a:t>24/03/2026</a:t>
+              <a:t>29/03/2026</a:t>
             </a:fld>
             <a:endParaRPr lang="en-GB"/>
           </a:p>
@@ -2698,7 +2698,7 @@
           <a:p>
             <a:fld id="{9BA507A8-AB1E-4362-AD52-AB8FDE0591EF}" type="datetimeFigureOut">
               <a:rPr lang="en-GB" smtClean="0"/>
-              <a:t>24/03/2026</a:t>
+              <a:t>29/03/2026</a:t>
             </a:fld>
             <a:endParaRPr lang="en-GB"/>
           </a:p>
@@ -2941,7 +2941,7 @@
           <a:p>
             <a:fld id="{9BA507A8-AB1E-4362-AD52-AB8FDE0591EF}" type="datetimeFigureOut">
               <a:rPr lang="en-GB" smtClean="0"/>
-              <a:t>24/03/2026</a:t>
+              <a:t>29/03/2026</a:t>
             </a:fld>
             <a:endParaRPr lang="en-GB"/>
           </a:p>
@@ -3344,6 +3344,14 @@
 <file path=ppt/slides/slide1.xml><?xml version="1.0" encoding="utf-8"?>
 <p:sld xmlns:a="http://schemas.openxmlformats.org/drawingml/2006/main" xmlns:r="http://schemas.openxmlformats.org/officeDocument/2006/relationships" xmlns:p="http://schemas.openxmlformats.org/presentationml/2006/main">
   <p:cSld>
+    <p:bg>
+      <p:bgPr>
+        <a:solidFill>
+          <a:schemeClr val="accent1"/>
+        </a:solidFill>
+        <a:effectLst/>
+      </p:bgPr>
+    </p:bg>
     <p:spTree>
       <p:nvGrpSpPr>
         <p:cNvPr id="1" name=""/>
@@ -3360,6 +3368,226 @@
       </p:grpSpPr>
       <p:sp>
         <p:nvSpPr>
+          <p:cNvPr id="48" name="Rectangle: Rounded Corners 47">
+            <a:extLst>
+              <a:ext uri="{FF2B5EF4-FFF2-40B4-BE49-F238E27FC236}">
+                <a16:creationId xmlns:a16="http://schemas.microsoft.com/office/drawing/2014/main" id="{2A57AD61-35B5-3784-1311-F9D7D4A9B72D}"/>
+              </a:ext>
+            </a:extLst>
+          </p:cNvPr>
+          <p:cNvSpPr/>
+          <p:nvPr/>
+        </p:nvSpPr>
+        <p:spPr>
+          <a:xfrm>
+            <a:off x="461249" y="11466018"/>
+            <a:ext cx="9957091" cy="5824704"/>
+          </a:xfrm>
+          <a:prstGeom prst="roundRect">
+            <a:avLst/>
+          </a:prstGeom>
+          <a:solidFill>
+            <a:schemeClr val="bg1"/>
+          </a:solidFill>
+          <a:ln w="254000">
+            <a:solidFill>
+              <a:schemeClr val="tx2"/>
+            </a:solidFill>
+          </a:ln>
+        </p:spPr>
+        <p:style>
+          <a:lnRef idx="1">
+            <a:schemeClr val="accent4"/>
+          </a:lnRef>
+          <a:fillRef idx="2">
+            <a:schemeClr val="accent4"/>
+          </a:fillRef>
+          <a:effectRef idx="1">
+            <a:schemeClr val="accent4"/>
+          </a:effectRef>
+          <a:fontRef idx="minor">
+            <a:schemeClr val="dk1"/>
+          </a:fontRef>
+        </p:style>
+        <p:txBody>
+          <a:bodyPr rtlCol="0" anchor="ctr"/>
+          <a:lstStyle/>
+          <a:p>
+            <a:endParaRPr lang="en-GB" sz="1600" b="1" dirty="0">
+              <a:latin typeface="Calibri" panose="020F0502020204030204" pitchFamily="34" charset="0"/>
+              <a:ea typeface="Calibri" panose="020F0502020204030204" pitchFamily="34" charset="0"/>
+              <a:cs typeface="Calibri" panose="020F0502020204030204" pitchFamily="34" charset="0"/>
+            </a:endParaRPr>
+          </a:p>
+        </p:txBody>
+      </p:sp>
+      <p:sp>
+        <p:nvSpPr>
+          <p:cNvPr id="42" name="Rectangle: Rounded Corners 41">
+            <a:extLst>
+              <a:ext uri="{FF2B5EF4-FFF2-40B4-BE49-F238E27FC236}">
+                <a16:creationId xmlns:a16="http://schemas.microsoft.com/office/drawing/2014/main" id="{1B2A54CB-0C2C-3886-72E2-464C7E336086}"/>
+              </a:ext>
+            </a:extLst>
+          </p:cNvPr>
+          <p:cNvSpPr/>
+          <p:nvPr/>
+        </p:nvSpPr>
+        <p:spPr>
+          <a:xfrm>
+            <a:off x="445553" y="23936248"/>
+            <a:ext cx="9957091" cy="5824704"/>
+          </a:xfrm>
+          <a:prstGeom prst="roundRect">
+            <a:avLst/>
+          </a:prstGeom>
+          <a:solidFill>
+            <a:schemeClr val="bg1"/>
+          </a:solidFill>
+          <a:ln w="254000">
+            <a:solidFill>
+              <a:schemeClr val="tx2"/>
+            </a:solidFill>
+          </a:ln>
+        </p:spPr>
+        <p:style>
+          <a:lnRef idx="1">
+            <a:schemeClr val="accent4"/>
+          </a:lnRef>
+          <a:fillRef idx="2">
+            <a:schemeClr val="accent4"/>
+          </a:fillRef>
+          <a:effectRef idx="1">
+            <a:schemeClr val="accent4"/>
+          </a:effectRef>
+          <a:fontRef idx="minor">
+            <a:schemeClr val="dk1"/>
+          </a:fontRef>
+        </p:style>
+        <p:txBody>
+          <a:bodyPr rtlCol="0" anchor="ctr"/>
+          <a:lstStyle/>
+          <a:p>
+            <a:endParaRPr lang="en-GB" sz="1600" b="1" dirty="0">
+              <a:latin typeface="Calibri" panose="020F0502020204030204" pitchFamily="34" charset="0"/>
+              <a:ea typeface="Calibri" panose="020F0502020204030204" pitchFamily="34" charset="0"/>
+              <a:cs typeface="Calibri" panose="020F0502020204030204" pitchFamily="34" charset="0"/>
+            </a:endParaRPr>
+          </a:p>
+        </p:txBody>
+      </p:sp>
+      <p:sp>
+        <p:nvSpPr>
+          <p:cNvPr id="46" name="Rectangle: Rounded Corners 45">
+            <a:extLst>
+              <a:ext uri="{FF2B5EF4-FFF2-40B4-BE49-F238E27FC236}">
+                <a16:creationId xmlns:a16="http://schemas.microsoft.com/office/drawing/2014/main" id="{FCB0D5D0-BACD-3844-6C3C-63D2267AA785}"/>
+              </a:ext>
+            </a:extLst>
+          </p:cNvPr>
+          <p:cNvSpPr/>
+          <p:nvPr/>
+        </p:nvSpPr>
+        <p:spPr>
+          <a:xfrm>
+            <a:off x="10978646" y="17778247"/>
+            <a:ext cx="9957091" cy="5824704"/>
+          </a:xfrm>
+          <a:prstGeom prst="roundRect">
+            <a:avLst/>
+          </a:prstGeom>
+          <a:solidFill>
+            <a:schemeClr val="bg1"/>
+          </a:solidFill>
+          <a:ln w="254000">
+            <a:solidFill>
+              <a:schemeClr val="tx2"/>
+            </a:solidFill>
+          </a:ln>
+        </p:spPr>
+        <p:style>
+          <a:lnRef idx="1">
+            <a:schemeClr val="accent4"/>
+          </a:lnRef>
+          <a:fillRef idx="2">
+            <a:schemeClr val="accent4"/>
+          </a:fillRef>
+          <a:effectRef idx="1">
+            <a:schemeClr val="accent4"/>
+          </a:effectRef>
+          <a:fontRef idx="minor">
+            <a:schemeClr val="dk1"/>
+          </a:fontRef>
+        </p:style>
+        <p:txBody>
+          <a:bodyPr rtlCol="0" anchor="ctr"/>
+          <a:lstStyle/>
+          <a:p>
+            <a:endParaRPr lang="en-GB" sz="1600" b="1" dirty="0">
+              <a:latin typeface="Calibri" panose="020F0502020204030204" pitchFamily="34" charset="0"/>
+              <a:ea typeface="Calibri" panose="020F0502020204030204" pitchFamily="34" charset="0"/>
+              <a:cs typeface="Calibri" panose="020F0502020204030204" pitchFamily="34" charset="0"/>
+            </a:endParaRPr>
+          </a:p>
+        </p:txBody>
+      </p:sp>
+      <p:sp>
+        <p:nvSpPr>
+          <p:cNvPr id="36" name="Rectangle: Rounded Corners 35">
+            <a:extLst>
+              <a:ext uri="{FF2B5EF4-FFF2-40B4-BE49-F238E27FC236}">
+                <a16:creationId xmlns:a16="http://schemas.microsoft.com/office/drawing/2014/main" id="{06D4043B-6B0A-E807-297A-78F228CBBFA8}"/>
+              </a:ext>
+            </a:extLst>
+          </p:cNvPr>
+          <p:cNvSpPr/>
+          <p:nvPr/>
+        </p:nvSpPr>
+        <p:spPr>
+          <a:xfrm>
+            <a:off x="10978646" y="3588017"/>
+            <a:ext cx="9943729" cy="7423380"/>
+          </a:xfrm>
+          <a:prstGeom prst="roundRect">
+            <a:avLst/>
+          </a:prstGeom>
+          <a:solidFill>
+            <a:schemeClr val="bg1"/>
+          </a:solidFill>
+          <a:ln w="254000">
+            <a:solidFill>
+              <a:schemeClr val="tx2"/>
+            </a:solidFill>
+          </a:ln>
+        </p:spPr>
+        <p:style>
+          <a:lnRef idx="1">
+            <a:schemeClr val="accent4"/>
+          </a:lnRef>
+          <a:fillRef idx="2">
+            <a:schemeClr val="accent4"/>
+          </a:fillRef>
+          <a:effectRef idx="1">
+            <a:schemeClr val="accent4"/>
+          </a:effectRef>
+          <a:fontRef idx="minor">
+            <a:schemeClr val="dk1"/>
+          </a:fontRef>
+        </p:style>
+        <p:txBody>
+          <a:bodyPr rtlCol="0" anchor="ctr"/>
+          <a:lstStyle/>
+          <a:p>
+            <a:endParaRPr lang="en-GB" sz="1600" b="1" dirty="0">
+              <a:latin typeface="Calibri" panose="020F0502020204030204" pitchFamily="34" charset="0"/>
+              <a:ea typeface="Calibri" panose="020F0502020204030204" pitchFamily="34" charset="0"/>
+              <a:cs typeface="Calibri" panose="020F0502020204030204" pitchFamily="34" charset="0"/>
+            </a:endParaRPr>
+          </a:p>
+        </p:txBody>
+      </p:sp>
+      <p:sp>
+        <p:nvSpPr>
           <p:cNvPr id="4" name="Rectangle 3">
             <a:extLst>
               <a:ext uri="{FF2B5EF4-FFF2-40B4-BE49-F238E27FC236}">
@@ -3373,11 +3601,14 @@
         <p:spPr>
           <a:xfrm>
             <a:off x="1" y="0"/>
-            <a:ext cx="21383624" cy="3755571"/>
+            <a:ext cx="21383624" cy="3425125"/>
           </a:xfrm>
           <a:prstGeom prst="rect">
             <a:avLst/>
           </a:prstGeom>
+          <a:solidFill>
+            <a:schemeClr val="accent1"/>
+          </a:solidFill>
           <a:ln>
             <a:solidFill>
               <a:schemeClr val="accent1"/>
@@ -3406,7 +3637,7 @@
           <a:p>
             <a:pPr algn="ctr"/>
             <a:r>
-              <a:rPr lang="en-GB" sz="7200" b="1" dirty="0">
+              <a:rPr lang="en-GB" sz="5400" b="1" dirty="0">
                 <a:latin typeface="Calibri" panose="020F0502020204030204" pitchFamily="34" charset="0"/>
                 <a:ea typeface="Calibri" panose="020F0502020204030204" pitchFamily="34" charset="0"/>
                 <a:cs typeface="Calibri" panose="020F0502020204030204" pitchFamily="34" charset="0"/>
@@ -3414,14 +3645,14 @@
               <a:t>Using Machine Learning to Understand and </a:t>
             </a:r>
             <a:br>
-              <a:rPr lang="en-GB" sz="7200" b="1" dirty="0">
+              <a:rPr lang="en-GB" sz="5400" b="1" dirty="0">
                 <a:latin typeface="Calibri" panose="020F0502020204030204" pitchFamily="34" charset="0"/>
                 <a:ea typeface="Calibri" panose="020F0502020204030204" pitchFamily="34" charset="0"/>
                 <a:cs typeface="Calibri" panose="020F0502020204030204" pitchFamily="34" charset="0"/>
               </a:rPr>
             </a:br>
             <a:r>
-              <a:rPr lang="en-GB" sz="7200" b="1" dirty="0">
+              <a:rPr lang="en-GB" sz="5400" b="1" dirty="0">
                 <a:latin typeface="Calibri" panose="020F0502020204030204" pitchFamily="34" charset="0"/>
                 <a:ea typeface="Calibri" panose="020F0502020204030204" pitchFamily="34" charset="0"/>
                 <a:cs typeface="Calibri" panose="020F0502020204030204" pitchFamily="34" charset="0"/>
@@ -3485,8 +3716,8 @@
         </p:blipFill>
         <p:spPr>
           <a:xfrm>
-            <a:off x="195942" y="26702906"/>
-            <a:ext cx="3396344" cy="3396344"/>
+            <a:off x="1301706" y="25785139"/>
+            <a:ext cx="2126922" cy="2126922"/>
           </a:xfrm>
           <a:prstGeom prst="rect">
             <a:avLst/>
@@ -3507,12 +3738,20 @@
         </p:nvSpPr>
         <p:spPr>
           <a:xfrm>
-            <a:off x="228599" y="4249452"/>
-            <a:ext cx="10123714" cy="6834548"/>
+            <a:off x="490047" y="3588017"/>
+            <a:ext cx="9972463" cy="3300122"/>
           </a:xfrm>
           <a:prstGeom prst="roundRect">
             <a:avLst/>
           </a:prstGeom>
+          <a:solidFill>
+            <a:schemeClr val="bg1"/>
+          </a:solidFill>
+          <a:ln w="254000">
+            <a:solidFill>
+              <a:schemeClr val="tx2"/>
+            </a:solidFill>
+          </a:ln>
         </p:spPr>
         <p:style>
           <a:lnRef idx="1">
@@ -3533,7 +3772,7 @@
           <a:lstStyle/>
           <a:p>
             <a:r>
-              <a:rPr lang="en-GB" sz="4400" b="1" dirty="0">
+              <a:rPr lang="en-GB" sz="2400" b="1" dirty="0">
                 <a:solidFill>
                   <a:schemeClr val="tx1"/>
                 </a:solidFill>
@@ -3546,7 +3785,7 @@
           </a:p>
           <a:p>
             <a:r>
-              <a:rPr lang="en-GB" sz="2400" dirty="0">
+              <a:rPr lang="en-GB" sz="1600" dirty="0">
                 <a:solidFill>
                   <a:schemeClr val="tx1"/>
                 </a:solidFill>
@@ -3559,7 +3798,7 @@
           </a:p>
           <a:p>
             <a:r>
-              <a:rPr lang="en-GB" sz="2400" b="1" dirty="0">
+              <a:rPr lang="en-GB" sz="1600" b="1" dirty="0">
                 <a:solidFill>
                   <a:schemeClr val="tx1"/>
                 </a:solidFill>
@@ -3569,7 +3808,7 @@
               </a:rPr>
               <a:t>This project aimed to build a ML system capable of extracting driving behaviour features from real Formula One race telemetry as well as sim racing video game telemetry to provide real-time feedback to drivers on how to improve their lap times.</a:t>
             </a:r>
-            <a:endParaRPr lang="en-GB" sz="4400" dirty="0">
+            <a:endParaRPr lang="en-GB" sz="1600" dirty="0">
               <a:solidFill>
                 <a:schemeClr val="tx1"/>
               </a:solidFill>
@@ -3582,10 +3821,10 @@
       </p:sp>
       <p:sp>
         <p:nvSpPr>
-          <p:cNvPr id="12" name="Rectangle: Rounded Corners 11">
-            <a:extLst>
-              <a:ext uri="{FF2B5EF4-FFF2-40B4-BE49-F238E27FC236}">
-                <a16:creationId xmlns:a16="http://schemas.microsoft.com/office/drawing/2014/main" id="{1E7C8517-C347-4A68-733D-F48EEECE3B89}"/>
+          <p:cNvPr id="14" name="Rectangle: Rounded Corners 13">
+            <a:extLst>
+              <a:ext uri="{FF2B5EF4-FFF2-40B4-BE49-F238E27FC236}">
+                <a16:creationId xmlns:a16="http://schemas.microsoft.com/office/drawing/2014/main" id="{8E6298C8-913F-3313-A467-E69E9967C7E6}"/>
               </a:ext>
             </a:extLst>
           </p:cNvPr>
@@ -3594,12 +3833,20 @@
         </p:nvSpPr>
         <p:spPr>
           <a:xfrm>
-            <a:off x="11031312" y="9797144"/>
-            <a:ext cx="10123714" cy="6834549"/>
+            <a:off x="443218" y="17778247"/>
+            <a:ext cx="9957091" cy="5824704"/>
           </a:xfrm>
           <a:prstGeom prst="roundRect">
             <a:avLst/>
           </a:prstGeom>
+          <a:solidFill>
+            <a:schemeClr val="bg1"/>
+          </a:solidFill>
+          <a:ln w="254000">
+            <a:solidFill>
+              <a:schemeClr val="tx2"/>
+            </a:solidFill>
+          </a:ln>
         </p:spPr>
         <p:style>
           <a:lnRef idx="1">
@@ -3620,27 +3867,12 @@
           <a:lstStyle/>
           <a:p>
             <a:r>
-              <a:rPr lang="en-GB" sz="4400" b="1" dirty="0">
-                <a:latin typeface="Calibri" panose="020F0502020204030204" pitchFamily="34" charset="0"/>
-                <a:ea typeface="Calibri" panose="020F0502020204030204" pitchFamily="34" charset="0"/>
-                <a:cs typeface="Calibri" panose="020F0502020204030204" pitchFamily="34" charset="0"/>
-              </a:rPr>
-              <a:t>Datasets &amp; Models:</a:t>
-            </a:r>
-            <a:br>
-              <a:rPr lang="en-GB" sz="4400" b="1" dirty="0">
-                <a:latin typeface="Calibri" panose="020F0502020204030204" pitchFamily="34" charset="0"/>
-                <a:ea typeface="Calibri" panose="020F0502020204030204" pitchFamily="34" charset="0"/>
-                <a:cs typeface="Calibri" panose="020F0502020204030204" pitchFamily="34" charset="0"/>
-              </a:rPr>
-            </a:br>
-            <a:r>
               <a:rPr lang="en-GB" sz="2400" b="1" dirty="0">
                 <a:latin typeface="Calibri" panose="020F0502020204030204" pitchFamily="34" charset="0"/>
                 <a:ea typeface="Calibri" panose="020F0502020204030204" pitchFamily="34" charset="0"/>
                 <a:cs typeface="Calibri" panose="020F0502020204030204" pitchFamily="34" charset="0"/>
               </a:rPr>
-              <a:t>Random Forest Model:</a:t>
+              <a:t>Results:</a:t>
             </a:r>
             <a:br>
               <a:rPr lang="en-GB" sz="2400" b="1" dirty="0">
@@ -3650,21 +3882,14 @@
               </a:rPr>
             </a:br>
             <a:r>
-              <a:rPr lang="en-GB" sz="2400" b="1" dirty="0">
+              <a:rPr lang="en-GB" sz="1600" dirty="0" err="1">
                 <a:latin typeface="Calibri" panose="020F0502020204030204" pitchFamily="34" charset="0"/>
                 <a:ea typeface="Calibri" panose="020F0502020204030204" pitchFamily="34" charset="0"/>
                 <a:cs typeface="Calibri" panose="020F0502020204030204" pitchFamily="34" charset="0"/>
               </a:rPr>
-              <a:t>- </a:t>
-            </a:r>
-            <a:br>
-              <a:rPr lang="en-GB" sz="4400" b="1" dirty="0">
-                <a:latin typeface="Calibri" panose="020F0502020204030204" pitchFamily="34" charset="0"/>
-                <a:ea typeface="Calibri" panose="020F0502020204030204" pitchFamily="34" charset="0"/>
-                <a:cs typeface="Calibri" panose="020F0502020204030204" pitchFamily="34" charset="0"/>
-              </a:rPr>
-            </a:br>
-            <a:endParaRPr lang="en-GB" sz="4400" b="1" dirty="0">
+              <a:t>aaaaa</a:t>
+            </a:r>
+            <a:endParaRPr lang="en-GB" sz="1600" b="1" dirty="0">
               <a:latin typeface="Calibri" panose="020F0502020204030204" pitchFamily="34" charset="0"/>
               <a:ea typeface="Calibri" panose="020F0502020204030204" pitchFamily="34" charset="0"/>
               <a:cs typeface="Calibri" panose="020F0502020204030204" pitchFamily="34" charset="0"/>
@@ -3674,10 +3899,10 @@
       </p:sp>
       <p:sp>
         <p:nvSpPr>
-          <p:cNvPr id="13" name="Rectangle: Rounded Corners 12">
-            <a:extLst>
-              <a:ext uri="{FF2B5EF4-FFF2-40B4-BE49-F238E27FC236}">
-                <a16:creationId xmlns:a16="http://schemas.microsoft.com/office/drawing/2014/main" id="{5C5A3CF9-A1DF-AF30-4680-5E2CFF8DD8C3}"/>
+          <p:cNvPr id="3" name="Rectangle: Rounded Corners 2">
+            <a:extLst>
+              <a:ext uri="{FF2B5EF4-FFF2-40B4-BE49-F238E27FC236}">
+                <a16:creationId xmlns:a16="http://schemas.microsoft.com/office/drawing/2014/main" id="{F2935F09-33C9-CC38-97D3-73F5D052BE49}"/>
               </a:ext>
             </a:extLst>
           </p:cNvPr>
@@ -3686,83 +3911,20 @@
         </p:nvSpPr>
         <p:spPr>
           <a:xfrm>
-            <a:off x="11031312" y="23152338"/>
-            <a:ext cx="10123714" cy="6834549"/>
+            <a:off x="490047" y="7234064"/>
+            <a:ext cx="9972464" cy="3777333"/>
           </a:xfrm>
           <a:prstGeom prst="roundRect">
             <a:avLst/>
           </a:prstGeom>
-        </p:spPr>
-        <p:style>
-          <a:lnRef idx="1">
-            <a:schemeClr val="accent4"/>
-          </a:lnRef>
-          <a:fillRef idx="3">
-            <a:schemeClr val="accent4"/>
-          </a:fillRef>
-          <a:effectRef idx="2">
-            <a:schemeClr val="accent4"/>
-          </a:effectRef>
-          <a:fontRef idx="minor">
-            <a:schemeClr val="lt1"/>
-          </a:fontRef>
-        </p:style>
-        <p:txBody>
-          <a:bodyPr rtlCol="0" anchor="ctr"/>
-          <a:lstStyle/>
-          <a:p>
-            <a:r>
-              <a:rPr lang="en-GB" sz="4400" b="1" dirty="0">
-                <a:solidFill>
-                  <a:schemeClr val="tx1"/>
-                </a:solidFill>
-                <a:latin typeface="Calibri" panose="020F0502020204030204" pitchFamily="34" charset="0"/>
-                <a:ea typeface="Calibri" panose="020F0502020204030204" pitchFamily="34" charset="0"/>
-                <a:cs typeface="Calibri" panose="020F0502020204030204" pitchFamily="34" charset="0"/>
-              </a:rPr>
-              <a:t>Results &amp; Discussion:</a:t>
-            </a:r>
-            <a:br>
-              <a:rPr lang="en-GB" sz="4400" b="1" dirty="0">
-                <a:solidFill>
-                  <a:schemeClr val="tx1"/>
-                </a:solidFill>
-                <a:latin typeface="Calibri" panose="020F0502020204030204" pitchFamily="34" charset="0"/>
-                <a:ea typeface="Calibri" panose="020F0502020204030204" pitchFamily="34" charset="0"/>
-                <a:cs typeface="Calibri" panose="020F0502020204030204" pitchFamily="34" charset="0"/>
-              </a:rPr>
-            </a:br>
-            <a:endParaRPr lang="en-GB" sz="4400" dirty="0">
-              <a:solidFill>
-                <a:schemeClr val="tx1"/>
-              </a:solidFill>
-              <a:latin typeface="Calibri" panose="020F0502020204030204" pitchFamily="34" charset="0"/>
-              <a:ea typeface="Calibri" panose="020F0502020204030204" pitchFamily="34" charset="0"/>
-              <a:cs typeface="Calibri" panose="020F0502020204030204" pitchFamily="34" charset="0"/>
-            </a:endParaRPr>
-          </a:p>
-        </p:txBody>
-      </p:sp>
-      <p:sp>
-        <p:nvSpPr>
-          <p:cNvPr id="14" name="Rectangle: Rounded Corners 13">
-            <a:extLst>
-              <a:ext uri="{FF2B5EF4-FFF2-40B4-BE49-F238E27FC236}">
-                <a16:creationId xmlns:a16="http://schemas.microsoft.com/office/drawing/2014/main" id="{8E6298C8-913F-3313-A467-E69E9967C7E6}"/>
-              </a:ext>
-            </a:extLst>
-          </p:cNvPr>
-          <p:cNvSpPr/>
-          <p:nvPr/>
-        </p:nvSpPr>
-        <p:spPr>
-          <a:xfrm>
-            <a:off x="228599" y="16631693"/>
-            <a:ext cx="10123714" cy="6834549"/>
-          </a:xfrm>
-          <a:prstGeom prst="roundRect">
-            <a:avLst/>
-          </a:prstGeom>
+          <a:solidFill>
+            <a:schemeClr val="bg1"/>
+          </a:solidFill>
+          <a:ln w="254000">
+            <a:solidFill>
+              <a:schemeClr val="tx2"/>
+            </a:solidFill>
+          </a:ln>
         </p:spPr>
         <p:style>
           <a:lnRef idx="1">
@@ -3783,14 +3945,102 @@
           <a:lstStyle/>
           <a:p>
             <a:r>
-              <a:rPr lang="en-GB" sz="4400" b="1" dirty="0">
+              <a:rPr lang="en-GB" sz="2400" b="1" dirty="0">
+                <a:solidFill>
+                  <a:schemeClr val="tx1"/>
+                </a:solidFill>
                 <a:latin typeface="Calibri" panose="020F0502020204030204" pitchFamily="34" charset="0"/>
                 <a:ea typeface="Calibri" panose="020F0502020204030204" pitchFamily="34" charset="0"/>
                 <a:cs typeface="Calibri" panose="020F0502020204030204" pitchFamily="34" charset="0"/>
               </a:rPr>
-              <a:t>Development Methods:</a:t>
-            </a:r>
-            <a:endParaRPr lang="en-GB" sz="4400" dirty="0">
+              <a:t>Data Collection &amp; Preprocessing:</a:t>
+            </a:r>
+            <a:br>
+              <a:rPr lang="en-GB" sz="2400" b="1" dirty="0">
+                <a:solidFill>
+                  <a:schemeClr val="tx1"/>
+                </a:solidFill>
+                <a:latin typeface="Calibri" panose="020F0502020204030204" pitchFamily="34" charset="0"/>
+                <a:ea typeface="Calibri" panose="020F0502020204030204" pitchFamily="34" charset="0"/>
+                <a:cs typeface="Calibri" panose="020F0502020204030204" pitchFamily="34" charset="0"/>
+              </a:rPr>
+            </a:br>
+            <a:r>
+              <a:rPr lang="en-GB" sz="1600" dirty="0">
+                <a:solidFill>
+                  <a:schemeClr val="tx1"/>
+                </a:solidFill>
+                <a:latin typeface="Calibri" panose="020F0502020204030204" pitchFamily="34" charset="0"/>
+                <a:ea typeface="Calibri" panose="020F0502020204030204" pitchFamily="34" charset="0"/>
+                <a:cs typeface="Calibri" panose="020F0502020204030204" pitchFamily="34" charset="0"/>
+              </a:rPr>
+              <a:t>Publicly available telemetric data from real Formula One races were accessed using the FastF1 Python library. From here, taking all fast-lap qualifying data from events under dry conditions to form the historical dataset.</a:t>
+            </a:r>
+          </a:p>
+          <a:p>
+            <a:r>
+              <a:rPr lang="en-GB" sz="1600" b="1" dirty="0">
+                <a:solidFill>
+                  <a:schemeClr val="tx1"/>
+                </a:solidFill>
+                <a:latin typeface="Calibri" panose="020F0502020204030204" pitchFamily="34" charset="0"/>
+                <a:ea typeface="Calibri" panose="020F0502020204030204" pitchFamily="34" charset="0"/>
+                <a:cs typeface="Calibri" panose="020F0502020204030204" pitchFamily="34" charset="0"/>
+              </a:rPr>
+              <a:t>AI (CPU) qualifying data from the F1 25 game was harvested using Telemetry Tool by Iko Rein.</a:t>
+            </a:r>
+            <a:r>
+              <a:rPr lang="en-GB" sz="1600" dirty="0">
+                <a:solidFill>
+                  <a:schemeClr val="tx1"/>
+                </a:solidFill>
+                <a:latin typeface="Calibri" panose="020F0502020204030204" pitchFamily="34" charset="0"/>
+                <a:ea typeface="Calibri" panose="020F0502020204030204" pitchFamily="34" charset="0"/>
+                <a:cs typeface="Calibri" panose="020F0502020204030204" pitchFamily="34" charset="0"/>
+              </a:rPr>
+              <a:t> </a:t>
+            </a:r>
+            <a:r>
+              <a:rPr lang="en-GB" sz="1600" b="1" dirty="0">
+                <a:solidFill>
+                  <a:schemeClr val="tx1"/>
+                </a:solidFill>
+                <a:latin typeface="Calibri" panose="020F0502020204030204" pitchFamily="34" charset="0"/>
+                <a:ea typeface="Calibri" panose="020F0502020204030204" pitchFamily="34" charset="0"/>
+                <a:cs typeface="Calibri" panose="020F0502020204030204" pitchFamily="34" charset="0"/>
+              </a:rPr>
+              <a:t>This was run under conditions with equal performance across all cars, as well as exclusively time-fixed dry conditions to eliminate potential variability.</a:t>
+            </a:r>
+          </a:p>
+          <a:p>
+            <a:r>
+              <a:rPr lang="en-GB" sz="1600" dirty="0">
+                <a:solidFill>
+                  <a:schemeClr val="tx1"/>
+                </a:solidFill>
+                <a:latin typeface="Calibri" panose="020F0502020204030204" pitchFamily="34" charset="0"/>
+                <a:ea typeface="Calibri" panose="020F0502020204030204" pitchFamily="34" charset="0"/>
+                <a:cs typeface="Calibri" panose="020F0502020204030204" pitchFamily="34" charset="0"/>
+              </a:rPr>
+              <a:t>Preprocessing was applied to all data collected. Historical data throttle and braking values were binarised and was temporally interpolated to every 0.05s (20hz). Game coordinates were realigned to match real-world values, with its throttle and braking values normalised to 0-1. The data were also interpolated to match 5 metre track intervals, appropriate for the 20hz sample intervals, so that comparisons between laps had reliable accuracy. </a:t>
+            </a:r>
+          </a:p>
+          <a:p>
+            <a:r>
+              <a:rPr lang="en-GB" sz="1600" b="1" dirty="0">
+                <a:solidFill>
+                  <a:schemeClr val="tx1"/>
+                </a:solidFill>
+                <a:latin typeface="Calibri" panose="020F0502020204030204" pitchFamily="34" charset="0"/>
+                <a:ea typeface="Calibri" panose="020F0502020204030204" pitchFamily="34" charset="0"/>
+                <a:cs typeface="Calibri" panose="020F0502020204030204" pitchFamily="34" charset="0"/>
+              </a:rPr>
+              <a:t>Data had the following columns: distance, x, y, z, norm_speed, speed, time, throttle, brake, gear, drs, rpm, source.</a:t>
+            </a:r>
+            <a:endParaRPr lang="en-GB" sz="2400" b="1" dirty="0">
+              <a:solidFill>
+                <a:schemeClr val="tx1"/>
+              </a:solidFill>
               <a:latin typeface="Calibri" panose="020F0502020204030204" pitchFamily="34" charset="0"/>
               <a:ea typeface="Calibri" panose="020F0502020204030204" pitchFamily="34" charset="0"/>
               <a:cs typeface="Calibri" panose="020F0502020204030204" pitchFamily="34" charset="0"/>
@@ -3798,12 +4048,245 @@
           </a:p>
         </p:txBody>
       </p:sp>
+      <p:grpSp>
+        <p:nvGrpSpPr>
+          <p:cNvPr id="11" name="Group 10">
+            <a:extLst>
+              <a:ext uri="{FF2B5EF4-FFF2-40B4-BE49-F238E27FC236}">
+                <a16:creationId xmlns:a16="http://schemas.microsoft.com/office/drawing/2014/main" id="{3BFB25DB-8FD1-81DD-DCF0-2F3EE7C54E67}"/>
+              </a:ext>
+            </a:extLst>
+          </p:cNvPr>
+          <p:cNvGrpSpPr/>
+          <p:nvPr/>
+        </p:nvGrpSpPr>
+        <p:grpSpPr>
+          <a:xfrm>
+            <a:off x="12866423" y="3941880"/>
+            <a:ext cx="6154817" cy="2783671"/>
+            <a:chOff x="10801687" y="4065336"/>
+            <a:chExt cx="6154817" cy="2783671"/>
+          </a:xfrm>
+        </p:grpSpPr>
+        <p:pic>
+          <p:nvPicPr>
+            <p:cNvPr id="20" name="Picture 19">
+              <a:extLst>
+                <a:ext uri="{FF2B5EF4-FFF2-40B4-BE49-F238E27FC236}">
+                  <a16:creationId xmlns:a16="http://schemas.microsoft.com/office/drawing/2014/main" id="{CFD3E36D-F382-F785-206B-D605246EFCD7}"/>
+                </a:ext>
+              </a:extLst>
+            </p:cNvPr>
+            <p:cNvPicPr>
+              <a:picLocks noChangeAspect="1"/>
+            </p:cNvPicPr>
+            <p:nvPr/>
+          </p:nvPicPr>
+          <p:blipFill>
+            <a:blip r:embed="rId3"/>
+            <a:stretch>
+              <a:fillRect/>
+            </a:stretch>
+          </p:blipFill>
+          <p:spPr>
+            <a:xfrm>
+              <a:off x="10915879" y="4065336"/>
+              <a:ext cx="5723940" cy="2578918"/>
+            </a:xfrm>
+            <a:prstGeom prst="rect">
+              <a:avLst/>
+            </a:prstGeom>
+          </p:spPr>
+        </p:pic>
+        <p:sp>
+          <p:nvSpPr>
+            <p:cNvPr id="10" name="TextBox 9">
+              <a:extLst>
+                <a:ext uri="{FF2B5EF4-FFF2-40B4-BE49-F238E27FC236}">
+                  <a16:creationId xmlns:a16="http://schemas.microsoft.com/office/drawing/2014/main" id="{CA9944B3-6E95-E157-44E2-27265B6D8B79}"/>
+                </a:ext>
+              </a:extLst>
+            </p:cNvPr>
+            <p:cNvSpPr txBox="1"/>
+            <p:nvPr/>
+          </p:nvSpPr>
+          <p:spPr>
+            <a:xfrm>
+              <a:off x="10801687" y="6510453"/>
+              <a:ext cx="6154817" cy="338554"/>
+            </a:xfrm>
+            <a:prstGeom prst="rect">
+              <a:avLst/>
+            </a:prstGeom>
+            <a:noFill/>
+          </p:spPr>
+          <p:txBody>
+            <a:bodyPr wrap="square" rtlCol="0">
+              <a:spAutoFit/>
+            </a:bodyPr>
+            <a:lstStyle/>
+            <a:p>
+              <a:r>
+                <a:rPr lang="en-GB" sz="1600" b="1" dirty="0"/>
+                <a:t>Figure 1: </a:t>
+              </a:r>
+              <a:r>
+                <a:rPr lang="en-GB" sz="1600" dirty="0"/>
+                <a:t>Curvature over Distance Plot for the Red Bull Ring (Austria).</a:t>
+              </a:r>
+              <a:endParaRPr lang="en-GB" sz="1600" b="1" dirty="0"/>
+            </a:p>
+          </p:txBody>
+        </p:sp>
+      </p:grpSp>
+      <p:grpSp>
+        <p:nvGrpSpPr>
+          <p:cNvPr id="19" name="Group 18">
+            <a:extLst>
+              <a:ext uri="{FF2B5EF4-FFF2-40B4-BE49-F238E27FC236}">
+                <a16:creationId xmlns:a16="http://schemas.microsoft.com/office/drawing/2014/main" id="{F4BC4623-EAD9-CB3F-B5B3-CC881163C38B}"/>
+              </a:ext>
+            </a:extLst>
+          </p:cNvPr>
+          <p:cNvGrpSpPr/>
+          <p:nvPr/>
+        </p:nvGrpSpPr>
+        <p:grpSpPr>
+          <a:xfrm>
+            <a:off x="14079738" y="6849523"/>
+            <a:ext cx="3530656" cy="3800024"/>
+            <a:chOff x="10845672" y="6707406"/>
+            <a:chExt cx="4123314" cy="3585470"/>
+          </a:xfrm>
+        </p:grpSpPr>
+        <p:grpSp>
+          <p:nvGrpSpPr>
+            <p:cNvPr id="15" name="Group 14">
+              <a:extLst>
+                <a:ext uri="{FF2B5EF4-FFF2-40B4-BE49-F238E27FC236}">
+                  <a16:creationId xmlns:a16="http://schemas.microsoft.com/office/drawing/2014/main" id="{2C11DD64-CABE-CA55-55CE-448EDC0C8F4E}"/>
+                </a:ext>
+              </a:extLst>
+            </p:cNvPr>
+            <p:cNvGrpSpPr/>
+            <p:nvPr/>
+          </p:nvGrpSpPr>
+          <p:grpSpPr>
+            <a:xfrm>
+              <a:off x="11042337" y="6707406"/>
+              <a:ext cx="3739242" cy="2916740"/>
+              <a:chOff x="10915877" y="7365592"/>
+              <a:chExt cx="3739242" cy="2916740"/>
+            </a:xfrm>
+          </p:grpSpPr>
+          <p:pic>
+            <p:nvPicPr>
+              <p:cNvPr id="16" name="Picture 15">
+                <a:extLst>
+                  <a:ext uri="{FF2B5EF4-FFF2-40B4-BE49-F238E27FC236}">
+                    <a16:creationId xmlns:a16="http://schemas.microsoft.com/office/drawing/2014/main" id="{8C629B29-B49F-AE4D-B983-68DF8FC4E32E}"/>
+                  </a:ext>
+                </a:extLst>
+              </p:cNvPr>
+              <p:cNvPicPr>
+                <a:picLocks noChangeAspect="1"/>
+              </p:cNvPicPr>
+              <p:nvPr/>
+            </p:nvPicPr>
+            <p:blipFill>
+              <a:blip r:embed="rId4"/>
+              <a:stretch>
+                <a:fillRect/>
+              </a:stretch>
+            </p:blipFill>
+            <p:spPr>
+              <a:xfrm>
+                <a:off x="10915877" y="7365592"/>
+                <a:ext cx="1980337" cy="2916740"/>
+              </a:xfrm>
+              <a:prstGeom prst="rect">
+                <a:avLst/>
+              </a:prstGeom>
+            </p:spPr>
+          </p:pic>
+          <p:pic>
+            <p:nvPicPr>
+              <p:cNvPr id="18" name="Picture 17">
+                <a:extLst>
+                  <a:ext uri="{FF2B5EF4-FFF2-40B4-BE49-F238E27FC236}">
+                    <a16:creationId xmlns:a16="http://schemas.microsoft.com/office/drawing/2014/main" id="{4EAF249F-FBD2-2B79-F522-372ED78F52BC}"/>
+                  </a:ext>
+                </a:extLst>
+              </p:cNvPr>
+              <p:cNvPicPr>
+                <a:picLocks noChangeAspect="1"/>
+              </p:cNvPicPr>
+              <p:nvPr/>
+            </p:nvPicPr>
+            <p:blipFill>
+              <a:blip r:embed="rId5"/>
+              <a:stretch>
+                <a:fillRect/>
+              </a:stretch>
+            </p:blipFill>
+            <p:spPr>
+              <a:xfrm>
+                <a:off x="12896214" y="7384257"/>
+                <a:ext cx="1758905" cy="2883888"/>
+              </a:xfrm>
+              <a:prstGeom prst="rect">
+                <a:avLst/>
+              </a:prstGeom>
+            </p:spPr>
+          </p:pic>
+        </p:grpSp>
+        <p:sp>
+          <p:nvSpPr>
+            <p:cNvPr id="17" name="TextBox 16">
+              <a:extLst>
+                <a:ext uri="{FF2B5EF4-FFF2-40B4-BE49-F238E27FC236}">
+                  <a16:creationId xmlns:a16="http://schemas.microsoft.com/office/drawing/2014/main" id="{8D17F905-2A11-8104-169A-6083B82773C8}"/>
+                </a:ext>
+              </a:extLst>
+            </p:cNvPr>
+            <p:cNvSpPr txBox="1"/>
+            <p:nvPr/>
+          </p:nvSpPr>
+          <p:spPr>
+            <a:xfrm>
+              <a:off x="10845672" y="9741118"/>
+              <a:ext cx="4123314" cy="551758"/>
+            </a:xfrm>
+            <a:prstGeom prst="rect">
+              <a:avLst/>
+            </a:prstGeom>
+            <a:noFill/>
+          </p:spPr>
+          <p:txBody>
+            <a:bodyPr wrap="square" rtlCol="0">
+              <a:spAutoFit/>
+            </a:bodyPr>
+            <a:lstStyle/>
+            <a:p>
+              <a:r>
+                <a:rPr lang="en-GB" sz="1600" b="1" dirty="0"/>
+                <a:t>Figures 2 &amp; 3: </a:t>
+              </a:r>
+              <a:r>
+                <a:rPr lang="en-GB" sz="1600" dirty="0"/>
+                <a:t>Car State and Speed plots for the Red Bull Ring (Austria).</a:t>
+              </a:r>
+              <a:endParaRPr lang="en-GB" sz="1600" b="1" dirty="0"/>
+            </a:p>
+          </p:txBody>
+        </p:sp>
+      </p:grpSp>
       <p:pic>
         <p:nvPicPr>
-          <p:cNvPr id="16" name="Picture 15">
-            <a:extLst>
-              <a:ext uri="{FF2B5EF4-FFF2-40B4-BE49-F238E27FC236}">
-                <a16:creationId xmlns:a16="http://schemas.microsoft.com/office/drawing/2014/main" id="{8C629B29-B49F-AE4D-B983-68DF8FC4E32E}"/>
+          <p:cNvPr id="22" name="Picture 21">
+            <a:extLst>
+              <a:ext uri="{FF2B5EF4-FFF2-40B4-BE49-F238E27FC236}">
+                <a16:creationId xmlns:a16="http://schemas.microsoft.com/office/drawing/2014/main" id="{1F60DBE7-CAD8-922C-A22A-F395D5F75435}"/>
               </a:ext>
             </a:extLst>
           </p:cNvPr>
@@ -3813,15 +4296,15 @@
           <p:nvPr/>
         </p:nvPicPr>
         <p:blipFill>
-          <a:blip r:embed="rId3"/>
+          <a:blip r:embed="rId6"/>
           <a:stretch>
             <a:fillRect/>
           </a:stretch>
         </p:blipFill>
         <p:spPr>
           <a:xfrm>
-            <a:off x="237971" y="11482846"/>
-            <a:ext cx="3354315" cy="4940405"/>
+            <a:off x="2365167" y="11682574"/>
+            <a:ext cx="5225229" cy="2340562"/>
           </a:xfrm>
           <a:prstGeom prst="rect">
             <a:avLst/>
@@ -3830,10 +4313,10 @@
       </p:pic>
       <p:pic>
         <p:nvPicPr>
-          <p:cNvPr id="18" name="Picture 17">
-            <a:extLst>
-              <a:ext uri="{FF2B5EF4-FFF2-40B4-BE49-F238E27FC236}">
-                <a16:creationId xmlns:a16="http://schemas.microsoft.com/office/drawing/2014/main" id="{4EAF249F-FBD2-2B79-F522-372ED78F52BC}"/>
+          <p:cNvPr id="24" name="Picture 23">
+            <a:extLst>
+              <a:ext uri="{FF2B5EF4-FFF2-40B4-BE49-F238E27FC236}">
+                <a16:creationId xmlns:a16="http://schemas.microsoft.com/office/drawing/2014/main" id="{36F8C087-00E0-D9B9-F42A-069442A99ABB}"/>
               </a:ext>
             </a:extLst>
           </p:cNvPr>
@@ -3843,15 +4326,15 @@
           <p:nvPr/>
         </p:nvPicPr>
         <p:blipFill>
-          <a:blip r:embed="rId4"/>
+          <a:blip r:embed="rId7"/>
           <a:stretch>
             <a:fillRect/>
           </a:stretch>
         </p:blipFill>
         <p:spPr>
           <a:xfrm>
-            <a:off x="7339125" y="11482846"/>
-            <a:ext cx="3013188" cy="4940405"/>
+            <a:off x="2266186" y="14468852"/>
+            <a:ext cx="6268934" cy="2563968"/>
           </a:xfrm>
           <a:prstGeom prst="rect">
             <a:avLst/>
@@ -3860,10 +4343,10 @@
       </p:pic>
       <p:pic>
         <p:nvPicPr>
-          <p:cNvPr id="20" name="Picture 19">
-            <a:extLst>
-              <a:ext uri="{FF2B5EF4-FFF2-40B4-BE49-F238E27FC236}">
-                <a16:creationId xmlns:a16="http://schemas.microsoft.com/office/drawing/2014/main" id="{CFD3E36D-F382-F785-206B-D605246EFCD7}"/>
+          <p:cNvPr id="30" name="Picture 29">
+            <a:extLst>
+              <a:ext uri="{FF2B5EF4-FFF2-40B4-BE49-F238E27FC236}">
+                <a16:creationId xmlns:a16="http://schemas.microsoft.com/office/drawing/2014/main" id="{D2F64817-0EB2-E5E8-47C4-F7473A4533F6}"/>
               </a:ext>
             </a:extLst>
           </p:cNvPr>
@@ -3873,21 +4356,178 @@
           <p:nvPr/>
         </p:nvPicPr>
         <p:blipFill>
-          <a:blip r:embed="rId5"/>
+          <a:blip r:embed="rId8"/>
+          <a:srcRect l="3870"/>
           <a:stretch>
             <a:fillRect/>
           </a:stretch>
         </p:blipFill>
         <p:spPr>
           <a:xfrm>
-            <a:off x="11031312" y="4510709"/>
-            <a:ext cx="9774138" cy="4403733"/>
+            <a:off x="13320933" y="18369187"/>
+            <a:ext cx="5250755" cy="4642821"/>
           </a:xfrm>
           <a:prstGeom prst="rect">
             <a:avLst/>
           </a:prstGeom>
         </p:spPr>
       </p:pic>
+      <p:sp>
+        <p:nvSpPr>
+          <p:cNvPr id="45" name="Rectangle: Rounded Corners 44">
+            <a:extLst>
+              <a:ext uri="{FF2B5EF4-FFF2-40B4-BE49-F238E27FC236}">
+                <a16:creationId xmlns:a16="http://schemas.microsoft.com/office/drawing/2014/main" id="{4763A920-50C0-2CA3-7F95-83106B143CB1}"/>
+              </a:ext>
+            </a:extLst>
+          </p:cNvPr>
+          <p:cNvSpPr/>
+          <p:nvPr/>
+        </p:nvSpPr>
+        <p:spPr>
+          <a:xfrm>
+            <a:off x="10980981" y="23936248"/>
+            <a:ext cx="9957091" cy="5824704"/>
+          </a:xfrm>
+          <a:prstGeom prst="roundRect">
+            <a:avLst/>
+          </a:prstGeom>
+          <a:solidFill>
+            <a:schemeClr val="bg1"/>
+          </a:solidFill>
+          <a:ln w="254000">
+            <a:solidFill>
+              <a:schemeClr val="tx2"/>
+            </a:solidFill>
+          </a:ln>
+        </p:spPr>
+        <p:style>
+          <a:lnRef idx="1">
+            <a:schemeClr val="accent4"/>
+          </a:lnRef>
+          <a:fillRef idx="2">
+            <a:schemeClr val="accent4"/>
+          </a:fillRef>
+          <a:effectRef idx="1">
+            <a:schemeClr val="accent4"/>
+          </a:effectRef>
+          <a:fontRef idx="minor">
+            <a:schemeClr val="dk1"/>
+          </a:fontRef>
+        </p:style>
+        <p:txBody>
+          <a:bodyPr rtlCol="0" anchor="ctr"/>
+          <a:lstStyle/>
+          <a:p>
+            <a:r>
+              <a:rPr lang="en-GB" sz="2400" b="1" dirty="0">
+                <a:latin typeface="Calibri" panose="020F0502020204030204" pitchFamily="34" charset="0"/>
+                <a:ea typeface="Calibri" panose="020F0502020204030204" pitchFamily="34" charset="0"/>
+                <a:cs typeface="Calibri" panose="020F0502020204030204" pitchFamily="34" charset="0"/>
+              </a:rPr>
+              <a:t>Discussion &amp; Future Work:</a:t>
+            </a:r>
+            <a:br>
+              <a:rPr lang="en-GB" sz="2400" b="1" dirty="0">
+                <a:latin typeface="Calibri" panose="020F0502020204030204" pitchFamily="34" charset="0"/>
+                <a:ea typeface="Calibri" panose="020F0502020204030204" pitchFamily="34" charset="0"/>
+                <a:cs typeface="Calibri" panose="020F0502020204030204" pitchFamily="34" charset="0"/>
+              </a:rPr>
+            </a:br>
+            <a:r>
+              <a:rPr lang="en-GB" sz="1600" dirty="0" err="1">
+                <a:latin typeface="Calibri" panose="020F0502020204030204" pitchFamily="34" charset="0"/>
+                <a:ea typeface="Calibri" panose="020F0502020204030204" pitchFamily="34" charset="0"/>
+                <a:cs typeface="Calibri" panose="020F0502020204030204" pitchFamily="34" charset="0"/>
+              </a:rPr>
+              <a:t>aaaa</a:t>
+            </a:r>
+            <a:endParaRPr lang="en-GB" sz="2400" b="1" dirty="0">
+              <a:latin typeface="Calibri" panose="020F0502020204030204" pitchFamily="34" charset="0"/>
+              <a:ea typeface="Calibri" panose="020F0502020204030204" pitchFamily="34" charset="0"/>
+              <a:cs typeface="Calibri" panose="020F0502020204030204" pitchFamily="34" charset="0"/>
+            </a:endParaRPr>
+          </a:p>
+        </p:txBody>
+      </p:sp>
+      <p:sp>
+        <p:nvSpPr>
+          <p:cNvPr id="47" name="Rectangle: Rounded Corners 46">
+            <a:extLst>
+              <a:ext uri="{FF2B5EF4-FFF2-40B4-BE49-F238E27FC236}">
+                <a16:creationId xmlns:a16="http://schemas.microsoft.com/office/drawing/2014/main" id="{BEB09868-B3B9-7F72-E19F-60716C2E67D6}"/>
+              </a:ext>
+            </a:extLst>
+          </p:cNvPr>
+          <p:cNvSpPr/>
+          <p:nvPr/>
+        </p:nvSpPr>
+        <p:spPr>
+          <a:xfrm>
+            <a:off x="10965285" y="11466018"/>
+            <a:ext cx="9957091" cy="5824704"/>
+          </a:xfrm>
+          <a:prstGeom prst="roundRect">
+            <a:avLst/>
+          </a:prstGeom>
+          <a:solidFill>
+            <a:schemeClr val="bg1"/>
+          </a:solidFill>
+          <a:ln w="254000">
+            <a:solidFill>
+              <a:schemeClr val="tx2"/>
+            </a:solidFill>
+          </a:ln>
+        </p:spPr>
+        <p:style>
+          <a:lnRef idx="1">
+            <a:schemeClr val="accent4"/>
+          </a:lnRef>
+          <a:fillRef idx="2">
+            <a:schemeClr val="accent4"/>
+          </a:fillRef>
+          <a:effectRef idx="1">
+            <a:schemeClr val="accent4"/>
+          </a:effectRef>
+          <a:fontRef idx="minor">
+            <a:schemeClr val="dk1"/>
+          </a:fontRef>
+        </p:style>
+        <p:txBody>
+          <a:bodyPr rtlCol="0" anchor="ctr"/>
+          <a:lstStyle/>
+          <a:p>
+            <a:r>
+              <a:rPr lang="en-GB" sz="2400" b="1" dirty="0">
+                <a:latin typeface="Calibri" panose="020F0502020204030204" pitchFamily="34" charset="0"/>
+                <a:ea typeface="Calibri" panose="020F0502020204030204" pitchFamily="34" charset="0"/>
+                <a:cs typeface="Calibri" panose="020F0502020204030204" pitchFamily="34" charset="0"/>
+              </a:rPr>
+              <a:t>Results:</a:t>
+            </a:r>
+            <a:br>
+              <a:rPr lang="en-GB" sz="2400" b="1" dirty="0">
+                <a:latin typeface="Calibri" panose="020F0502020204030204" pitchFamily="34" charset="0"/>
+                <a:ea typeface="Calibri" panose="020F0502020204030204" pitchFamily="34" charset="0"/>
+                <a:cs typeface="Calibri" panose="020F0502020204030204" pitchFamily="34" charset="0"/>
+              </a:rPr>
+            </a:br>
+            <a:r>
+              <a:rPr lang="en-GB" sz="1600" dirty="0" err="1">
+                <a:latin typeface="Calibri" panose="020F0502020204030204" pitchFamily="34" charset="0"/>
+                <a:ea typeface="Calibri" panose="020F0502020204030204" pitchFamily="34" charset="0"/>
+                <a:cs typeface="Calibri" panose="020F0502020204030204" pitchFamily="34" charset="0"/>
+              </a:rPr>
+              <a:t>aaaaa</a:t>
+            </a:r>
+            <a:endParaRPr lang="en-GB" sz="1600" b="1" dirty="0">
+              <a:latin typeface="Calibri" panose="020F0502020204030204" pitchFamily="34" charset="0"/>
+              <a:ea typeface="Calibri" panose="020F0502020204030204" pitchFamily="34" charset="0"/>
+              <a:cs typeface="Calibri" panose="020F0502020204030204" pitchFamily="34" charset="0"/>
+            </a:endParaRPr>
+          </a:p>
+        </p:txBody>
+      </p:sp>
     </p:spTree>
     <p:extLst>
       <p:ext uri="{BB962C8B-B14F-4D97-AF65-F5344CB8AC3E}">

--- a/Presentation1.pptx
+++ b/Presentation1.pptx
@@ -272,7 +272,7 @@
           <a:p>
             <a:fld id="{9BA507A8-AB1E-4362-AD52-AB8FDE0591EF}" type="datetimeFigureOut">
               <a:rPr lang="en-GB" smtClean="0"/>
-              <a:t>29/03/2026</a:t>
+              <a:t>30/03/2026</a:t>
             </a:fld>
             <a:endParaRPr lang="en-GB"/>
           </a:p>
@@ -472,7 +472,7 @@
           <a:p>
             <a:fld id="{9BA507A8-AB1E-4362-AD52-AB8FDE0591EF}" type="datetimeFigureOut">
               <a:rPr lang="en-GB" smtClean="0"/>
-              <a:t>29/03/2026</a:t>
+              <a:t>30/03/2026</a:t>
             </a:fld>
             <a:endParaRPr lang="en-GB"/>
           </a:p>
@@ -682,7 +682,7 @@
           <a:p>
             <a:fld id="{9BA507A8-AB1E-4362-AD52-AB8FDE0591EF}" type="datetimeFigureOut">
               <a:rPr lang="en-GB" smtClean="0"/>
-              <a:t>29/03/2026</a:t>
+              <a:t>30/03/2026</a:t>
             </a:fld>
             <a:endParaRPr lang="en-GB"/>
           </a:p>
@@ -882,7 +882,7 @@
           <a:p>
             <a:fld id="{9BA507A8-AB1E-4362-AD52-AB8FDE0591EF}" type="datetimeFigureOut">
               <a:rPr lang="en-GB" smtClean="0"/>
-              <a:t>29/03/2026</a:t>
+              <a:t>30/03/2026</a:t>
             </a:fld>
             <a:endParaRPr lang="en-GB"/>
           </a:p>
@@ -1158,7 +1158,7 @@
           <a:p>
             <a:fld id="{9BA507A8-AB1E-4362-AD52-AB8FDE0591EF}" type="datetimeFigureOut">
               <a:rPr lang="en-GB" smtClean="0"/>
-              <a:t>29/03/2026</a:t>
+              <a:t>30/03/2026</a:t>
             </a:fld>
             <a:endParaRPr lang="en-GB"/>
           </a:p>
@@ -1426,7 +1426,7 @@
           <a:p>
             <a:fld id="{9BA507A8-AB1E-4362-AD52-AB8FDE0591EF}" type="datetimeFigureOut">
               <a:rPr lang="en-GB" smtClean="0"/>
-              <a:t>29/03/2026</a:t>
+              <a:t>30/03/2026</a:t>
             </a:fld>
             <a:endParaRPr lang="en-GB"/>
           </a:p>
@@ -1841,7 +1841,7 @@
           <a:p>
             <a:fld id="{9BA507A8-AB1E-4362-AD52-AB8FDE0591EF}" type="datetimeFigureOut">
               <a:rPr lang="en-GB" smtClean="0"/>
-              <a:t>29/03/2026</a:t>
+              <a:t>30/03/2026</a:t>
             </a:fld>
             <a:endParaRPr lang="en-GB"/>
           </a:p>
@@ -1983,7 +1983,7 @@
           <a:p>
             <a:fld id="{9BA507A8-AB1E-4362-AD52-AB8FDE0591EF}" type="datetimeFigureOut">
               <a:rPr lang="en-GB" smtClean="0"/>
-              <a:t>29/03/2026</a:t>
+              <a:t>30/03/2026</a:t>
             </a:fld>
             <a:endParaRPr lang="en-GB"/>
           </a:p>
@@ -2096,7 +2096,7 @@
           <a:p>
             <a:fld id="{9BA507A8-AB1E-4362-AD52-AB8FDE0591EF}" type="datetimeFigureOut">
               <a:rPr lang="en-GB" smtClean="0"/>
-              <a:t>29/03/2026</a:t>
+              <a:t>30/03/2026</a:t>
             </a:fld>
             <a:endParaRPr lang="en-GB"/>
           </a:p>
@@ -2409,7 +2409,7 @@
           <a:p>
             <a:fld id="{9BA507A8-AB1E-4362-AD52-AB8FDE0591EF}" type="datetimeFigureOut">
               <a:rPr lang="en-GB" smtClean="0"/>
-              <a:t>29/03/2026</a:t>
+              <a:t>30/03/2026</a:t>
             </a:fld>
             <a:endParaRPr lang="en-GB"/>
           </a:p>
@@ -2698,7 +2698,7 @@
           <a:p>
             <a:fld id="{9BA507A8-AB1E-4362-AD52-AB8FDE0591EF}" type="datetimeFigureOut">
               <a:rPr lang="en-GB" smtClean="0"/>
-              <a:t>29/03/2026</a:t>
+              <a:t>30/03/2026</a:t>
             </a:fld>
             <a:endParaRPr lang="en-GB"/>
           </a:p>
@@ -2941,7 +2941,7 @@
           <a:p>
             <a:fld id="{9BA507A8-AB1E-4362-AD52-AB8FDE0591EF}" type="datetimeFigureOut">
               <a:rPr lang="en-GB" smtClean="0"/>
-              <a:t>29/03/2026</a:t>
+              <a:t>30/03/2026</a:t>
             </a:fld>
             <a:endParaRPr lang="en-GB"/>
           </a:p>
@@ -3380,7 +3380,7 @@
         </p:nvSpPr>
         <p:spPr>
           <a:xfrm>
-            <a:off x="461249" y="11466018"/>
+            <a:off x="443217" y="11482470"/>
             <a:ext cx="9957091" cy="5824704"/>
           </a:xfrm>
           <a:prstGeom prst="roundRect">
@@ -3413,7 +3413,94 @@
           <a:bodyPr rtlCol="0" anchor="ctr"/>
           <a:lstStyle/>
           <a:p>
+            <a:r>
+              <a:rPr lang="en-GB" sz="2400" b="1" dirty="0">
+                <a:latin typeface="Calibri" panose="020F0502020204030204" pitchFamily="34" charset="0"/>
+                <a:ea typeface="Calibri" panose="020F0502020204030204" pitchFamily="34" charset="0"/>
+                <a:cs typeface="Calibri" panose="020F0502020204030204" pitchFamily="34" charset="0"/>
+              </a:rPr>
+              <a:t>Data Points Visualised – F1 25 Circuits:</a:t>
+            </a:r>
+          </a:p>
+          <a:p>
             <a:endParaRPr lang="en-GB" sz="1600" b="1" dirty="0">
+              <a:latin typeface="Calibri" panose="020F0502020204030204" pitchFamily="34" charset="0"/>
+              <a:ea typeface="Calibri" panose="020F0502020204030204" pitchFamily="34" charset="0"/>
+              <a:cs typeface="Calibri" panose="020F0502020204030204" pitchFamily="34" charset="0"/>
+            </a:endParaRPr>
+          </a:p>
+          <a:p>
+            <a:endParaRPr lang="en-GB" sz="2400" b="1" dirty="0">
+              <a:latin typeface="Calibri" panose="020F0502020204030204" pitchFamily="34" charset="0"/>
+              <a:ea typeface="Calibri" panose="020F0502020204030204" pitchFamily="34" charset="0"/>
+              <a:cs typeface="Calibri" panose="020F0502020204030204" pitchFamily="34" charset="0"/>
+            </a:endParaRPr>
+          </a:p>
+          <a:p>
+            <a:endParaRPr lang="en-GB" sz="2400" b="1" dirty="0">
+              <a:latin typeface="Calibri" panose="020F0502020204030204" pitchFamily="34" charset="0"/>
+              <a:ea typeface="Calibri" panose="020F0502020204030204" pitchFamily="34" charset="0"/>
+              <a:cs typeface="Calibri" panose="020F0502020204030204" pitchFamily="34" charset="0"/>
+            </a:endParaRPr>
+          </a:p>
+          <a:p>
+            <a:endParaRPr lang="en-GB" sz="2400" b="1" dirty="0">
+              <a:latin typeface="Calibri" panose="020F0502020204030204" pitchFamily="34" charset="0"/>
+              <a:ea typeface="Calibri" panose="020F0502020204030204" pitchFamily="34" charset="0"/>
+              <a:cs typeface="Calibri" panose="020F0502020204030204" pitchFamily="34" charset="0"/>
+            </a:endParaRPr>
+          </a:p>
+          <a:p>
+            <a:endParaRPr lang="en-GB" sz="2400" b="1" dirty="0">
+              <a:latin typeface="Calibri" panose="020F0502020204030204" pitchFamily="34" charset="0"/>
+              <a:ea typeface="Calibri" panose="020F0502020204030204" pitchFamily="34" charset="0"/>
+              <a:cs typeface="Calibri" panose="020F0502020204030204" pitchFamily="34" charset="0"/>
+            </a:endParaRPr>
+          </a:p>
+          <a:p>
+            <a:endParaRPr lang="en-GB" sz="2400" b="1" dirty="0">
+              <a:latin typeface="Calibri" panose="020F0502020204030204" pitchFamily="34" charset="0"/>
+              <a:ea typeface="Calibri" panose="020F0502020204030204" pitchFamily="34" charset="0"/>
+              <a:cs typeface="Calibri" panose="020F0502020204030204" pitchFamily="34" charset="0"/>
+            </a:endParaRPr>
+          </a:p>
+          <a:p>
+            <a:endParaRPr lang="en-GB" sz="2400" b="1" dirty="0">
+              <a:latin typeface="Calibri" panose="020F0502020204030204" pitchFamily="34" charset="0"/>
+              <a:ea typeface="Calibri" panose="020F0502020204030204" pitchFamily="34" charset="0"/>
+              <a:cs typeface="Calibri" panose="020F0502020204030204" pitchFamily="34" charset="0"/>
+            </a:endParaRPr>
+          </a:p>
+          <a:p>
+            <a:endParaRPr lang="en-GB" sz="2400" b="1" dirty="0">
+              <a:latin typeface="Calibri" panose="020F0502020204030204" pitchFamily="34" charset="0"/>
+              <a:ea typeface="Calibri" panose="020F0502020204030204" pitchFamily="34" charset="0"/>
+              <a:cs typeface="Calibri" panose="020F0502020204030204" pitchFamily="34" charset="0"/>
+            </a:endParaRPr>
+          </a:p>
+          <a:p>
+            <a:endParaRPr lang="en-GB" sz="2400" b="1" dirty="0">
+              <a:latin typeface="Calibri" panose="020F0502020204030204" pitchFamily="34" charset="0"/>
+              <a:ea typeface="Calibri" panose="020F0502020204030204" pitchFamily="34" charset="0"/>
+              <a:cs typeface="Calibri" panose="020F0502020204030204" pitchFamily="34" charset="0"/>
+            </a:endParaRPr>
+          </a:p>
+          <a:p>
+            <a:endParaRPr lang="en-GB" sz="2400" b="1" dirty="0">
+              <a:latin typeface="Calibri" panose="020F0502020204030204" pitchFamily="34" charset="0"/>
+              <a:ea typeface="Calibri" panose="020F0502020204030204" pitchFamily="34" charset="0"/>
+              <a:cs typeface="Calibri" panose="020F0502020204030204" pitchFamily="34" charset="0"/>
+            </a:endParaRPr>
+          </a:p>
+          <a:p>
+            <a:endParaRPr lang="en-GB" sz="2400" b="1" dirty="0">
+              <a:latin typeface="Calibri" panose="020F0502020204030204" pitchFamily="34" charset="0"/>
+              <a:ea typeface="Calibri" panose="020F0502020204030204" pitchFamily="34" charset="0"/>
+              <a:cs typeface="Calibri" panose="020F0502020204030204" pitchFamily="34" charset="0"/>
+            </a:endParaRPr>
+          </a:p>
+          <a:p>
+            <a:endParaRPr lang="en-GB" sz="2400" b="1" dirty="0">
               <a:latin typeface="Calibri" panose="020F0502020204030204" pitchFamily="34" charset="0"/>
               <a:ea typeface="Calibri" panose="020F0502020204030204" pitchFamily="34" charset="0"/>
               <a:cs typeface="Calibri" panose="020F0502020204030204" pitchFamily="34" charset="0"/>
@@ -3523,7 +3610,94 @@
           <a:bodyPr rtlCol="0" anchor="ctr"/>
           <a:lstStyle/>
           <a:p>
-            <a:endParaRPr lang="en-GB" sz="1600" b="1" dirty="0">
+            <a:r>
+              <a:rPr lang="en-GB" sz="2400" b="1" dirty="0">
+                <a:latin typeface="Calibri" panose="020F0502020204030204" pitchFamily="34" charset="0"/>
+                <a:ea typeface="Calibri" panose="020F0502020204030204" pitchFamily="34" charset="0"/>
+                <a:cs typeface="Calibri" panose="020F0502020204030204" pitchFamily="34" charset="0"/>
+              </a:rPr>
+              <a:t>Visualised F1 25 Game Feedback:</a:t>
+            </a:r>
+          </a:p>
+          <a:p>
+            <a:endParaRPr lang="en-GB" sz="2400" b="1" dirty="0">
+              <a:latin typeface="Calibri" panose="020F0502020204030204" pitchFamily="34" charset="0"/>
+              <a:ea typeface="Calibri" panose="020F0502020204030204" pitchFamily="34" charset="0"/>
+              <a:cs typeface="Calibri" panose="020F0502020204030204" pitchFamily="34" charset="0"/>
+            </a:endParaRPr>
+          </a:p>
+          <a:p>
+            <a:endParaRPr lang="en-GB" sz="2400" b="1" dirty="0">
+              <a:latin typeface="Calibri" panose="020F0502020204030204" pitchFamily="34" charset="0"/>
+              <a:ea typeface="Calibri" panose="020F0502020204030204" pitchFamily="34" charset="0"/>
+              <a:cs typeface="Calibri" panose="020F0502020204030204" pitchFamily="34" charset="0"/>
+            </a:endParaRPr>
+          </a:p>
+          <a:p>
+            <a:endParaRPr lang="en-GB" sz="2400" b="1" dirty="0">
+              <a:latin typeface="Calibri" panose="020F0502020204030204" pitchFamily="34" charset="0"/>
+              <a:ea typeface="Calibri" panose="020F0502020204030204" pitchFamily="34" charset="0"/>
+              <a:cs typeface="Calibri" panose="020F0502020204030204" pitchFamily="34" charset="0"/>
+            </a:endParaRPr>
+          </a:p>
+          <a:p>
+            <a:endParaRPr lang="en-GB" sz="2400" b="1" dirty="0">
+              <a:latin typeface="Calibri" panose="020F0502020204030204" pitchFamily="34" charset="0"/>
+              <a:ea typeface="Calibri" panose="020F0502020204030204" pitchFamily="34" charset="0"/>
+              <a:cs typeface="Calibri" panose="020F0502020204030204" pitchFamily="34" charset="0"/>
+            </a:endParaRPr>
+          </a:p>
+          <a:p>
+            <a:endParaRPr lang="en-GB" sz="2400" b="1" dirty="0">
+              <a:latin typeface="Calibri" panose="020F0502020204030204" pitchFamily="34" charset="0"/>
+              <a:ea typeface="Calibri" panose="020F0502020204030204" pitchFamily="34" charset="0"/>
+              <a:cs typeface="Calibri" panose="020F0502020204030204" pitchFamily="34" charset="0"/>
+            </a:endParaRPr>
+          </a:p>
+          <a:p>
+            <a:endParaRPr lang="en-GB" sz="2400" b="1" dirty="0">
+              <a:latin typeface="Calibri" panose="020F0502020204030204" pitchFamily="34" charset="0"/>
+              <a:ea typeface="Calibri" panose="020F0502020204030204" pitchFamily="34" charset="0"/>
+              <a:cs typeface="Calibri" panose="020F0502020204030204" pitchFamily="34" charset="0"/>
+            </a:endParaRPr>
+          </a:p>
+          <a:p>
+            <a:endParaRPr lang="en-GB" sz="2400" b="1" dirty="0">
+              <a:latin typeface="Calibri" panose="020F0502020204030204" pitchFamily="34" charset="0"/>
+              <a:ea typeface="Calibri" panose="020F0502020204030204" pitchFamily="34" charset="0"/>
+              <a:cs typeface="Calibri" panose="020F0502020204030204" pitchFamily="34" charset="0"/>
+            </a:endParaRPr>
+          </a:p>
+          <a:p>
+            <a:endParaRPr lang="en-GB" sz="2400" b="1" dirty="0">
+              <a:latin typeface="Calibri" panose="020F0502020204030204" pitchFamily="34" charset="0"/>
+              <a:ea typeface="Calibri" panose="020F0502020204030204" pitchFamily="34" charset="0"/>
+              <a:cs typeface="Calibri" panose="020F0502020204030204" pitchFamily="34" charset="0"/>
+            </a:endParaRPr>
+          </a:p>
+          <a:p>
+            <a:endParaRPr lang="en-GB" sz="2400" b="1" dirty="0">
+              <a:latin typeface="Calibri" panose="020F0502020204030204" pitchFamily="34" charset="0"/>
+              <a:ea typeface="Calibri" panose="020F0502020204030204" pitchFamily="34" charset="0"/>
+              <a:cs typeface="Calibri" panose="020F0502020204030204" pitchFamily="34" charset="0"/>
+            </a:endParaRPr>
+          </a:p>
+          <a:p>
+            <a:endParaRPr lang="en-GB" sz="2400" b="1" dirty="0">
+              <a:latin typeface="Calibri" panose="020F0502020204030204" pitchFamily="34" charset="0"/>
+              <a:ea typeface="Calibri" panose="020F0502020204030204" pitchFamily="34" charset="0"/>
+              <a:cs typeface="Calibri" panose="020F0502020204030204" pitchFamily="34" charset="0"/>
+            </a:endParaRPr>
+          </a:p>
+          <a:p>
+            <a:endParaRPr lang="en-GB" sz="2400" b="1" dirty="0">
+              <a:latin typeface="Calibri" panose="020F0502020204030204" pitchFamily="34" charset="0"/>
+              <a:ea typeface="Calibri" panose="020F0502020204030204" pitchFamily="34" charset="0"/>
+              <a:cs typeface="Calibri" panose="020F0502020204030204" pitchFamily="34" charset="0"/>
+            </a:endParaRPr>
+          </a:p>
+          <a:p>
+            <a:endParaRPr lang="en-GB" sz="2400" b="1" dirty="0">
               <a:latin typeface="Calibri" panose="020F0502020204030204" pitchFamily="34" charset="0"/>
               <a:ea typeface="Calibri" panose="020F0502020204030204" pitchFamily="34" charset="0"/>
               <a:cs typeface="Calibri" panose="020F0502020204030204" pitchFamily="34" charset="0"/>
@@ -3545,7 +3719,7 @@
         </p:nvSpPr>
         <p:spPr>
           <a:xfrm>
-            <a:off x="10978646" y="3588017"/>
+            <a:off x="10975632" y="3588017"/>
             <a:ext cx="9943729" cy="7423380"/>
           </a:xfrm>
           <a:prstGeom prst="roundRect">
@@ -3578,7 +3752,118 @@
           <a:bodyPr rtlCol="0" anchor="ctr"/>
           <a:lstStyle/>
           <a:p>
-            <a:endParaRPr lang="en-GB" sz="1600" b="1" dirty="0">
+            <a:r>
+              <a:rPr lang="en-GB" sz="2400" b="1" dirty="0">
+                <a:latin typeface="Calibri" panose="020F0502020204030204" pitchFamily="34" charset="0"/>
+                <a:ea typeface="Calibri" panose="020F0502020204030204" pitchFamily="34" charset="0"/>
+                <a:cs typeface="Calibri" panose="020F0502020204030204" pitchFamily="34" charset="0"/>
+              </a:rPr>
+              <a:t>Plots Generated from the F1 25 Game Model:</a:t>
+            </a:r>
+          </a:p>
+          <a:p>
+            <a:r>
+              <a:rPr lang="en-GB" sz="1600" dirty="0">
+                <a:latin typeface="Calibri" panose="020F0502020204030204" pitchFamily="34" charset="0"/>
+                <a:ea typeface="Calibri" panose="020F0502020204030204" pitchFamily="34" charset="0"/>
+                <a:cs typeface="Calibri" panose="020F0502020204030204" pitchFamily="34" charset="0"/>
+              </a:rPr>
+              <a:t>All graphs come directly from the game model’s outputs, using the ground truth data for each track on the Grand Prix calendar to produce accurate telemetric expectations for the fastest time trial run.</a:t>
+            </a:r>
+          </a:p>
+          <a:p>
+            <a:endParaRPr lang="en-GB" sz="1600" dirty="0">
+              <a:latin typeface="Calibri" panose="020F0502020204030204" pitchFamily="34" charset="0"/>
+              <a:ea typeface="Calibri" panose="020F0502020204030204" pitchFamily="34" charset="0"/>
+              <a:cs typeface="Calibri" panose="020F0502020204030204" pitchFamily="34" charset="0"/>
+            </a:endParaRPr>
+          </a:p>
+          <a:p>
+            <a:endParaRPr lang="en-GB" sz="2400" b="1" dirty="0">
+              <a:latin typeface="Calibri" panose="020F0502020204030204" pitchFamily="34" charset="0"/>
+              <a:ea typeface="Calibri" panose="020F0502020204030204" pitchFamily="34" charset="0"/>
+              <a:cs typeface="Calibri" panose="020F0502020204030204" pitchFamily="34" charset="0"/>
+            </a:endParaRPr>
+          </a:p>
+          <a:p>
+            <a:endParaRPr lang="en-GB" sz="2400" b="1" dirty="0">
+              <a:latin typeface="Calibri" panose="020F0502020204030204" pitchFamily="34" charset="0"/>
+              <a:ea typeface="Calibri" panose="020F0502020204030204" pitchFamily="34" charset="0"/>
+              <a:cs typeface="Calibri" panose="020F0502020204030204" pitchFamily="34" charset="0"/>
+            </a:endParaRPr>
+          </a:p>
+          <a:p>
+            <a:endParaRPr lang="en-GB" sz="2400" b="1" dirty="0">
+              <a:latin typeface="Calibri" panose="020F0502020204030204" pitchFamily="34" charset="0"/>
+              <a:ea typeface="Calibri" panose="020F0502020204030204" pitchFamily="34" charset="0"/>
+              <a:cs typeface="Calibri" panose="020F0502020204030204" pitchFamily="34" charset="0"/>
+            </a:endParaRPr>
+          </a:p>
+          <a:p>
+            <a:endParaRPr lang="en-GB" sz="2400" b="1" dirty="0">
+              <a:latin typeface="Calibri" panose="020F0502020204030204" pitchFamily="34" charset="0"/>
+              <a:ea typeface="Calibri" panose="020F0502020204030204" pitchFamily="34" charset="0"/>
+              <a:cs typeface="Calibri" panose="020F0502020204030204" pitchFamily="34" charset="0"/>
+            </a:endParaRPr>
+          </a:p>
+          <a:p>
+            <a:endParaRPr lang="en-GB" sz="2400" b="1" dirty="0">
+              <a:latin typeface="Calibri" panose="020F0502020204030204" pitchFamily="34" charset="0"/>
+              <a:ea typeface="Calibri" panose="020F0502020204030204" pitchFamily="34" charset="0"/>
+              <a:cs typeface="Calibri" panose="020F0502020204030204" pitchFamily="34" charset="0"/>
+            </a:endParaRPr>
+          </a:p>
+          <a:p>
+            <a:endParaRPr lang="en-GB" sz="2400" b="1" dirty="0">
+              <a:latin typeface="Calibri" panose="020F0502020204030204" pitchFamily="34" charset="0"/>
+              <a:ea typeface="Calibri" panose="020F0502020204030204" pitchFamily="34" charset="0"/>
+              <a:cs typeface="Calibri" panose="020F0502020204030204" pitchFamily="34" charset="0"/>
+            </a:endParaRPr>
+          </a:p>
+          <a:p>
+            <a:endParaRPr lang="en-GB" sz="2400" b="1" dirty="0">
+              <a:latin typeface="Calibri" panose="020F0502020204030204" pitchFamily="34" charset="0"/>
+              <a:ea typeface="Calibri" panose="020F0502020204030204" pitchFamily="34" charset="0"/>
+              <a:cs typeface="Calibri" panose="020F0502020204030204" pitchFamily="34" charset="0"/>
+            </a:endParaRPr>
+          </a:p>
+          <a:p>
+            <a:endParaRPr lang="en-GB" sz="2400" b="1" dirty="0">
+              <a:latin typeface="Calibri" panose="020F0502020204030204" pitchFamily="34" charset="0"/>
+              <a:ea typeface="Calibri" panose="020F0502020204030204" pitchFamily="34" charset="0"/>
+              <a:cs typeface="Calibri" panose="020F0502020204030204" pitchFamily="34" charset="0"/>
+            </a:endParaRPr>
+          </a:p>
+          <a:p>
+            <a:endParaRPr lang="en-GB" sz="2400" b="1" dirty="0">
+              <a:latin typeface="Calibri" panose="020F0502020204030204" pitchFamily="34" charset="0"/>
+              <a:ea typeface="Calibri" panose="020F0502020204030204" pitchFamily="34" charset="0"/>
+              <a:cs typeface="Calibri" panose="020F0502020204030204" pitchFamily="34" charset="0"/>
+            </a:endParaRPr>
+          </a:p>
+          <a:p>
+            <a:endParaRPr lang="en-GB" sz="2400" b="1" dirty="0">
+              <a:latin typeface="Calibri" panose="020F0502020204030204" pitchFamily="34" charset="0"/>
+              <a:ea typeface="Calibri" panose="020F0502020204030204" pitchFamily="34" charset="0"/>
+              <a:cs typeface="Calibri" panose="020F0502020204030204" pitchFamily="34" charset="0"/>
+            </a:endParaRPr>
+          </a:p>
+          <a:p>
+            <a:endParaRPr lang="en-GB" sz="2400" b="1" dirty="0">
+              <a:latin typeface="Calibri" panose="020F0502020204030204" pitchFamily="34" charset="0"/>
+              <a:ea typeface="Calibri" panose="020F0502020204030204" pitchFamily="34" charset="0"/>
+              <a:cs typeface="Calibri" panose="020F0502020204030204" pitchFamily="34" charset="0"/>
+            </a:endParaRPr>
+          </a:p>
+          <a:p>
+            <a:endParaRPr lang="en-GB" sz="2400" b="1" dirty="0">
+              <a:latin typeface="Calibri" panose="020F0502020204030204" pitchFamily="34" charset="0"/>
+              <a:ea typeface="Calibri" panose="020F0502020204030204" pitchFamily="34" charset="0"/>
+              <a:cs typeface="Calibri" panose="020F0502020204030204" pitchFamily="34" charset="0"/>
+            </a:endParaRPr>
+          </a:p>
+          <a:p>
+            <a:endParaRPr lang="en-GB" sz="2400" b="1" dirty="0">
               <a:latin typeface="Calibri" panose="020F0502020204030204" pitchFamily="34" charset="0"/>
               <a:ea typeface="Calibri" panose="020F0502020204030204" pitchFamily="34" charset="0"/>
               <a:cs typeface="Calibri" panose="020F0502020204030204" pitchFamily="34" charset="0"/>
@@ -3657,7 +3942,7 @@
                 <a:ea typeface="Calibri" panose="020F0502020204030204" pitchFamily="34" charset="0"/>
                 <a:cs typeface="Calibri" panose="020F0502020204030204" pitchFamily="34" charset="0"/>
               </a:rPr>
-              <a:t>Enhance Racing Driver Performance</a:t>
+              <a:t>Enhance Racing Driver Cornering Performance</a:t>
             </a:r>
           </a:p>
           <a:p>
@@ -3678,7 +3963,7 @@
               </a:rPr>
             </a:br>
             <a:r>
-              <a:rPr lang="en-GB" sz="2800" b="1" dirty="0">
+              <a:rPr lang="en-GB" sz="2400" b="1" dirty="0">
                 <a:latin typeface="Calibri" panose="020F0502020204030204" pitchFamily="34" charset="0"/>
                 <a:ea typeface="Calibri" panose="020F0502020204030204" pitchFamily="34" charset="0"/>
                 <a:cs typeface="Calibri" panose="020F0502020204030204" pitchFamily="34" charset="0"/>
@@ -3716,7 +4001,7 @@
         </p:blipFill>
         <p:spPr>
           <a:xfrm>
-            <a:off x="1301706" y="25785139"/>
+            <a:off x="1014101" y="27118639"/>
             <a:ext cx="2126922" cy="2126922"/>
           </a:xfrm>
           <a:prstGeom prst="rect">
@@ -3738,7 +4023,7 @@
         </p:nvSpPr>
         <p:spPr>
           <a:xfrm>
-            <a:off x="490047" y="3588017"/>
+            <a:off x="427845" y="3588017"/>
             <a:ext cx="9972463" cy="3300122"/>
           </a:xfrm>
           <a:prstGeom prst="roundRect">
@@ -3806,7 +4091,7 @@
                 <a:ea typeface="Calibri" panose="020F0502020204030204" pitchFamily="34" charset="0"/>
                 <a:cs typeface="Calibri" panose="020F0502020204030204" pitchFamily="34" charset="0"/>
               </a:rPr>
-              <a:t>This project aimed to build a ML system capable of extracting driving behaviour features from real Formula One race telemetry as well as sim racing video game telemetry to provide real-time feedback to drivers on how to improve their lap times.</a:t>
+              <a:t>This project aimed to build a ML system capable of extracting driving behaviour features from real Formula One race telemetry as well as sim racing video game telemetry to provide real-time feedback to drivers on how to improve their lap times, with a focus on improving cornering entry and exits.</a:t>
             </a:r>
             <a:endParaRPr lang="en-GB" sz="1600" dirty="0">
               <a:solidFill>
@@ -3863,7 +4148,7 @@
           </a:fontRef>
         </p:style>
         <p:txBody>
-          <a:bodyPr rtlCol="0" anchor="ctr"/>
+          <a:bodyPr numCol="2" rtlCol="0" anchor="ctr"/>
           <a:lstStyle/>
           <a:p>
             <a:r>
@@ -3872,7 +4157,7 @@
                 <a:ea typeface="Calibri" panose="020F0502020204030204" pitchFamily="34" charset="0"/>
                 <a:cs typeface="Calibri" panose="020F0502020204030204" pitchFamily="34" charset="0"/>
               </a:rPr>
-              <a:t>Results:</a:t>
+              <a:t>Model &amp; Advice/Feedback Results:</a:t>
             </a:r>
             <a:br>
               <a:rPr lang="en-GB" sz="2400" b="1" dirty="0">
@@ -3882,18 +4167,432 @@
               </a:rPr>
             </a:br>
             <a:r>
-              <a:rPr lang="en-GB" sz="1600" dirty="0" err="1">
-                <a:latin typeface="Calibri" panose="020F0502020204030204" pitchFamily="34" charset="0"/>
-                <a:ea typeface="Calibri" panose="020F0502020204030204" pitchFamily="34" charset="0"/>
-                <a:cs typeface="Calibri" panose="020F0502020204030204" pitchFamily="34" charset="0"/>
-              </a:rPr>
-              <a:t>aaaaa</a:t>
-            </a:r>
+              <a:rPr lang="en-GB" sz="1600" b="1" dirty="0">
+                <a:latin typeface="Calibri" panose="020F0502020204030204" pitchFamily="34" charset="0"/>
+                <a:ea typeface="Calibri" panose="020F0502020204030204" pitchFamily="34" charset="0"/>
+                <a:cs typeface="Calibri" panose="020F0502020204030204" pitchFamily="34" charset="0"/>
+              </a:rPr>
+              <a:t>Game Model:</a:t>
+            </a:r>
+            <a:br>
+              <a:rPr lang="en-GB" sz="1600" b="1" dirty="0">
+                <a:latin typeface="Calibri" panose="020F0502020204030204" pitchFamily="34" charset="0"/>
+                <a:ea typeface="Calibri" panose="020F0502020204030204" pitchFamily="34" charset="0"/>
+                <a:cs typeface="Calibri" panose="020F0502020204030204" pitchFamily="34" charset="0"/>
+              </a:rPr>
+            </a:br>
+            <a:r>
+              <a:rPr lang="en-GB" sz="1600" dirty="0">
+                <a:latin typeface="Calibri" panose="020F0502020204030204" pitchFamily="34" charset="0"/>
+                <a:ea typeface="Calibri" panose="020F0502020204030204" pitchFamily="34" charset="0"/>
+                <a:cs typeface="Calibri" panose="020F0502020204030204" pitchFamily="34" charset="0"/>
+              </a:rPr>
+              <a:t>- Average brake accuracy: </a:t>
+            </a:r>
+            <a:r>
+              <a:rPr lang="en-GB" sz="1600" b="1" dirty="0">
+                <a:latin typeface="Calibri" panose="020F0502020204030204" pitchFamily="34" charset="0"/>
+                <a:ea typeface="Calibri" panose="020F0502020204030204" pitchFamily="34" charset="0"/>
+                <a:cs typeface="Calibri" panose="020F0502020204030204" pitchFamily="34" charset="0"/>
+              </a:rPr>
+              <a:t>0.9853</a:t>
+            </a:r>
+            <a:br>
+              <a:rPr lang="en-GB" sz="1600" dirty="0">
+                <a:latin typeface="Calibri" panose="020F0502020204030204" pitchFamily="34" charset="0"/>
+                <a:ea typeface="Calibri" panose="020F0502020204030204" pitchFamily="34" charset="0"/>
+                <a:cs typeface="Calibri" panose="020F0502020204030204" pitchFamily="34" charset="0"/>
+              </a:rPr>
+            </a:br>
+            <a:r>
+              <a:rPr lang="en-GB" sz="1600" dirty="0">
+                <a:latin typeface="Calibri" panose="020F0502020204030204" pitchFamily="34" charset="0"/>
+                <a:ea typeface="Calibri" panose="020F0502020204030204" pitchFamily="34" charset="0"/>
+                <a:cs typeface="Calibri" panose="020F0502020204030204" pitchFamily="34" charset="0"/>
+              </a:rPr>
+              <a:t>- Average throttle accuracy: </a:t>
+            </a:r>
+            <a:r>
+              <a:rPr lang="en-GB" sz="1600" b="1" dirty="0">
+                <a:latin typeface="Calibri" panose="020F0502020204030204" pitchFamily="34" charset="0"/>
+                <a:ea typeface="Calibri" panose="020F0502020204030204" pitchFamily="34" charset="0"/>
+                <a:cs typeface="Calibri" panose="020F0502020204030204" pitchFamily="34" charset="0"/>
+              </a:rPr>
+              <a:t>0.9872</a:t>
+            </a:r>
+            <a:br>
+              <a:rPr lang="en-GB" sz="1600" dirty="0">
+                <a:latin typeface="Calibri" panose="020F0502020204030204" pitchFamily="34" charset="0"/>
+                <a:ea typeface="Calibri" panose="020F0502020204030204" pitchFamily="34" charset="0"/>
+                <a:cs typeface="Calibri" panose="020F0502020204030204" pitchFamily="34" charset="0"/>
+              </a:rPr>
+            </a:br>
+            <a:r>
+              <a:rPr lang="en-GB" sz="1600" dirty="0">
+                <a:latin typeface="Calibri" panose="020F0502020204030204" pitchFamily="34" charset="0"/>
+                <a:ea typeface="Calibri" panose="020F0502020204030204" pitchFamily="34" charset="0"/>
+                <a:cs typeface="Calibri" panose="020F0502020204030204" pitchFamily="34" charset="0"/>
+              </a:rPr>
+              <a:t>- Lowest accuracy: </a:t>
+            </a:r>
+            <a:r>
+              <a:rPr lang="en-GB" sz="1600" b="1" dirty="0">
+                <a:latin typeface="Calibri" panose="020F0502020204030204" pitchFamily="34" charset="0"/>
+                <a:ea typeface="Calibri" panose="020F0502020204030204" pitchFamily="34" charset="0"/>
+                <a:cs typeface="Calibri" panose="020F0502020204030204" pitchFamily="34" charset="0"/>
+              </a:rPr>
+              <a:t>Vegas</a:t>
+            </a:r>
+            <a:r>
+              <a:rPr lang="en-GB" sz="1600" dirty="0">
+                <a:latin typeface="Calibri" panose="020F0502020204030204" pitchFamily="34" charset="0"/>
+                <a:ea typeface="Calibri" panose="020F0502020204030204" pitchFamily="34" charset="0"/>
+                <a:cs typeface="Calibri" panose="020F0502020204030204" pitchFamily="34" charset="0"/>
+              </a:rPr>
+              <a:t> </a:t>
+            </a:r>
+            <a:r>
+              <a:rPr lang="en-GB" sz="1600" b="1" dirty="0">
+                <a:latin typeface="Calibri" panose="020F0502020204030204" pitchFamily="34" charset="0"/>
+                <a:ea typeface="Calibri" panose="020F0502020204030204" pitchFamily="34" charset="0"/>
+                <a:cs typeface="Calibri" panose="020F0502020204030204" pitchFamily="34" charset="0"/>
+              </a:rPr>
+              <a:t>- 0.9761 / Abu Dhabi – 0.9753</a:t>
+            </a:r>
+            <a:br>
+              <a:rPr lang="en-GB" sz="1600" dirty="0">
+                <a:latin typeface="Calibri" panose="020F0502020204030204" pitchFamily="34" charset="0"/>
+                <a:ea typeface="Calibri" panose="020F0502020204030204" pitchFamily="34" charset="0"/>
+                <a:cs typeface="Calibri" panose="020F0502020204030204" pitchFamily="34" charset="0"/>
+              </a:rPr>
+            </a:br>
+            <a:endParaRPr lang="en-GB" sz="1600" dirty="0">
+              <a:latin typeface="Calibri" panose="020F0502020204030204" pitchFamily="34" charset="0"/>
+              <a:ea typeface="Calibri" panose="020F0502020204030204" pitchFamily="34" charset="0"/>
+              <a:cs typeface="Calibri" panose="020F0502020204030204" pitchFamily="34" charset="0"/>
+            </a:endParaRPr>
+          </a:p>
+          <a:p>
+            <a:r>
+              <a:rPr lang="en-GB" sz="1600" b="1" dirty="0">
+                <a:latin typeface="Calibri" panose="020F0502020204030204" pitchFamily="34" charset="0"/>
+                <a:ea typeface="Calibri" panose="020F0502020204030204" pitchFamily="34" charset="0"/>
+                <a:cs typeface="Calibri" panose="020F0502020204030204" pitchFamily="34" charset="0"/>
+              </a:rPr>
+              <a:t>Historical Model:</a:t>
+            </a:r>
+            <a:br>
+              <a:rPr lang="en-GB" sz="1600" b="1" dirty="0">
+                <a:latin typeface="Calibri" panose="020F0502020204030204" pitchFamily="34" charset="0"/>
+                <a:ea typeface="Calibri" panose="020F0502020204030204" pitchFamily="34" charset="0"/>
+                <a:cs typeface="Calibri" panose="020F0502020204030204" pitchFamily="34" charset="0"/>
+              </a:rPr>
+            </a:br>
+            <a:r>
+              <a:rPr lang="en-GB" sz="1600" dirty="0">
+                <a:latin typeface="Calibri" panose="020F0502020204030204" pitchFamily="34" charset="0"/>
+                <a:ea typeface="Calibri" panose="020F0502020204030204" pitchFamily="34" charset="0"/>
+                <a:cs typeface="Calibri" panose="020F0502020204030204" pitchFamily="34" charset="0"/>
+              </a:rPr>
+              <a:t>- Average brake accuracy: </a:t>
+            </a:r>
+            <a:r>
+              <a:rPr lang="en-GB" sz="1600" b="1" dirty="0">
+                <a:latin typeface="Calibri" panose="020F0502020204030204" pitchFamily="34" charset="0"/>
+                <a:ea typeface="Calibri" panose="020F0502020204030204" pitchFamily="34" charset="0"/>
+                <a:cs typeface="Calibri" panose="020F0502020204030204" pitchFamily="34" charset="0"/>
+              </a:rPr>
+              <a:t>0.9677</a:t>
+            </a:r>
+            <a:br>
+              <a:rPr lang="en-GB" sz="1600" dirty="0">
+                <a:latin typeface="Calibri" panose="020F0502020204030204" pitchFamily="34" charset="0"/>
+                <a:ea typeface="Calibri" panose="020F0502020204030204" pitchFamily="34" charset="0"/>
+                <a:cs typeface="Calibri" panose="020F0502020204030204" pitchFamily="34" charset="0"/>
+              </a:rPr>
+            </a:br>
+            <a:r>
+              <a:rPr lang="en-GB" sz="1600" dirty="0">
+                <a:latin typeface="Calibri" panose="020F0502020204030204" pitchFamily="34" charset="0"/>
+                <a:ea typeface="Calibri" panose="020F0502020204030204" pitchFamily="34" charset="0"/>
+                <a:cs typeface="Calibri" panose="020F0502020204030204" pitchFamily="34" charset="0"/>
+              </a:rPr>
+              <a:t>- Average throttle accuracy: </a:t>
+            </a:r>
+            <a:r>
+              <a:rPr lang="en-GB" sz="1600" b="1" dirty="0">
+                <a:latin typeface="Calibri" panose="020F0502020204030204" pitchFamily="34" charset="0"/>
+                <a:ea typeface="Calibri" panose="020F0502020204030204" pitchFamily="34" charset="0"/>
+                <a:cs typeface="Calibri" panose="020F0502020204030204" pitchFamily="34" charset="0"/>
+              </a:rPr>
+              <a:t>0.9885</a:t>
+            </a:r>
+            <a:br>
+              <a:rPr lang="en-GB" sz="1600" dirty="0">
+                <a:latin typeface="Calibri" panose="020F0502020204030204" pitchFamily="34" charset="0"/>
+                <a:ea typeface="Calibri" panose="020F0502020204030204" pitchFamily="34" charset="0"/>
+                <a:cs typeface="Calibri" panose="020F0502020204030204" pitchFamily="34" charset="0"/>
+              </a:rPr>
+            </a:br>
+            <a:r>
+              <a:rPr lang="en-GB" sz="1600" dirty="0">
+                <a:latin typeface="Calibri" panose="020F0502020204030204" pitchFamily="34" charset="0"/>
+                <a:ea typeface="Calibri" panose="020F0502020204030204" pitchFamily="34" charset="0"/>
+                <a:cs typeface="Calibri" panose="020F0502020204030204" pitchFamily="34" charset="0"/>
+              </a:rPr>
+              <a:t>- Lowest accuracy: </a:t>
+            </a:r>
+            <a:r>
+              <a:rPr lang="en-GB" sz="1600" b="1" dirty="0">
+                <a:latin typeface="Calibri" panose="020F0502020204030204" pitchFamily="34" charset="0"/>
+                <a:ea typeface="Calibri" panose="020F0502020204030204" pitchFamily="34" charset="0"/>
+                <a:cs typeface="Calibri" panose="020F0502020204030204" pitchFamily="34" charset="0"/>
+              </a:rPr>
+              <a:t>Monaco – 0.9374 / 0.9606</a:t>
+            </a:r>
+            <a:endParaRPr lang="en-GB" sz="1600" dirty="0">
+              <a:latin typeface="Calibri" panose="020F0502020204030204" pitchFamily="34" charset="0"/>
+              <a:ea typeface="Calibri" panose="020F0502020204030204" pitchFamily="34" charset="0"/>
+              <a:cs typeface="Calibri" panose="020F0502020204030204" pitchFamily="34" charset="0"/>
+            </a:endParaRPr>
+          </a:p>
+          <a:p>
             <a:endParaRPr lang="en-GB" sz="1600" b="1" dirty="0">
               <a:latin typeface="Calibri" panose="020F0502020204030204" pitchFamily="34" charset="0"/>
               <a:ea typeface="Calibri" panose="020F0502020204030204" pitchFamily="34" charset="0"/>
               <a:cs typeface="Calibri" panose="020F0502020204030204" pitchFamily="34" charset="0"/>
             </a:endParaRPr>
+          </a:p>
+          <a:p>
+            <a:r>
+              <a:rPr lang="en-GB" sz="1600" b="1" dirty="0">
+                <a:latin typeface="Calibri" panose="020F0502020204030204" pitchFamily="34" charset="0"/>
+                <a:ea typeface="Calibri" panose="020F0502020204030204" pitchFamily="34" charset="0"/>
+                <a:cs typeface="Calibri" panose="020F0502020204030204" pitchFamily="34" charset="0"/>
+              </a:rPr>
+              <a:t>Speed Model:</a:t>
+            </a:r>
+            <a:br>
+              <a:rPr lang="en-GB" sz="1600" b="1" dirty="0">
+                <a:latin typeface="Calibri" panose="020F0502020204030204" pitchFamily="34" charset="0"/>
+                <a:ea typeface="Calibri" panose="020F0502020204030204" pitchFamily="34" charset="0"/>
+                <a:cs typeface="Calibri" panose="020F0502020204030204" pitchFamily="34" charset="0"/>
+              </a:rPr>
+            </a:br>
+            <a:r>
+              <a:rPr lang="en-GB" sz="1600" dirty="0">
+                <a:latin typeface="Calibri" panose="020F0502020204030204" pitchFamily="34" charset="0"/>
+                <a:ea typeface="Calibri" panose="020F0502020204030204" pitchFamily="34" charset="0"/>
+                <a:cs typeface="Calibri" panose="020F0502020204030204" pitchFamily="34" charset="0"/>
+              </a:rPr>
+              <a:t>- Average MAE: </a:t>
+            </a:r>
+            <a:r>
+              <a:rPr lang="en-GB" sz="1600" b="1" dirty="0">
+                <a:latin typeface="Calibri" panose="020F0502020204030204" pitchFamily="34" charset="0"/>
+                <a:ea typeface="Calibri" panose="020F0502020204030204" pitchFamily="34" charset="0"/>
+                <a:cs typeface="Calibri" panose="020F0502020204030204" pitchFamily="34" charset="0"/>
+              </a:rPr>
+              <a:t>1.6968</a:t>
+            </a:r>
+            <a:endParaRPr lang="en-GB" sz="1600" dirty="0">
+              <a:latin typeface="Calibri" panose="020F0502020204030204" pitchFamily="34" charset="0"/>
+              <a:ea typeface="Calibri" panose="020F0502020204030204" pitchFamily="34" charset="0"/>
+              <a:cs typeface="Calibri" panose="020F0502020204030204" pitchFamily="34" charset="0"/>
+            </a:endParaRPr>
+          </a:p>
+          <a:p>
+            <a:r>
+              <a:rPr lang="en-GB" sz="1600" dirty="0">
+                <a:latin typeface="Calibri" panose="020F0502020204030204" pitchFamily="34" charset="0"/>
+                <a:ea typeface="Calibri" panose="020F0502020204030204" pitchFamily="34" charset="0"/>
+                <a:cs typeface="Calibri" panose="020F0502020204030204" pitchFamily="34" charset="0"/>
+              </a:rPr>
+              <a:t>- Average R</a:t>
+            </a:r>
+            <a:r>
+              <a:rPr lang="en-GB" sz="1600" baseline="30000" dirty="0">
+                <a:latin typeface="Calibri" panose="020F0502020204030204" pitchFamily="34" charset="0"/>
+                <a:ea typeface="Calibri" panose="020F0502020204030204" pitchFamily="34" charset="0"/>
+                <a:cs typeface="Calibri" panose="020F0502020204030204" pitchFamily="34" charset="0"/>
+              </a:rPr>
+              <a:t>2</a:t>
+            </a:r>
+            <a:r>
+              <a:rPr lang="en-GB" sz="1600" dirty="0">
+                <a:latin typeface="Calibri" panose="020F0502020204030204" pitchFamily="34" charset="0"/>
+                <a:ea typeface="Calibri" panose="020F0502020204030204" pitchFamily="34" charset="0"/>
+                <a:cs typeface="Calibri" panose="020F0502020204030204" pitchFamily="34" charset="0"/>
+              </a:rPr>
+              <a:t>: </a:t>
+            </a:r>
+            <a:r>
+              <a:rPr lang="en-GB" sz="1600" b="1" dirty="0">
+                <a:latin typeface="Calibri" panose="020F0502020204030204" pitchFamily="34" charset="0"/>
+                <a:ea typeface="Calibri" panose="020F0502020204030204" pitchFamily="34" charset="0"/>
+                <a:cs typeface="Calibri" panose="020F0502020204030204" pitchFamily="34" charset="0"/>
+              </a:rPr>
+              <a:t>0.9984</a:t>
+            </a:r>
+            <a:br>
+              <a:rPr lang="en-GB" sz="1600" dirty="0">
+                <a:latin typeface="Calibri" panose="020F0502020204030204" pitchFamily="34" charset="0"/>
+                <a:ea typeface="Calibri" panose="020F0502020204030204" pitchFamily="34" charset="0"/>
+                <a:cs typeface="Calibri" panose="020F0502020204030204" pitchFamily="34" charset="0"/>
+              </a:rPr>
+            </a:br>
+            <a:r>
+              <a:rPr lang="en-GB" sz="1600" dirty="0">
+                <a:latin typeface="Calibri" panose="020F0502020204030204" pitchFamily="34" charset="0"/>
+                <a:ea typeface="Calibri" panose="020F0502020204030204" pitchFamily="34" charset="0"/>
+                <a:cs typeface="Calibri" panose="020F0502020204030204" pitchFamily="34" charset="0"/>
+              </a:rPr>
+              <a:t>- Lowest accuracy: </a:t>
+            </a:r>
+            <a:r>
+              <a:rPr lang="en-GB" sz="1600" b="1" dirty="0">
+                <a:latin typeface="Calibri" panose="020F0502020204030204" pitchFamily="34" charset="0"/>
+                <a:ea typeface="Calibri" panose="020F0502020204030204" pitchFamily="34" charset="0"/>
+                <a:cs typeface="Calibri" panose="020F0502020204030204" pitchFamily="34" charset="0"/>
+              </a:rPr>
+              <a:t>Miami – 1.3621 / Jeddah – 0.9964</a:t>
+            </a:r>
+          </a:p>
+          <a:p>
+            <a:endParaRPr lang="en-GB" sz="1600" b="1" dirty="0">
+              <a:latin typeface="Calibri" panose="020F0502020204030204" pitchFamily="34" charset="0"/>
+              <a:ea typeface="Calibri" panose="020F0502020204030204" pitchFamily="34" charset="0"/>
+              <a:cs typeface="Calibri" panose="020F0502020204030204" pitchFamily="34" charset="0"/>
+            </a:endParaRPr>
+          </a:p>
+          <a:p>
+            <a:endParaRPr lang="en-GB" sz="1600" b="1" dirty="0">
+              <a:latin typeface="Calibri" panose="020F0502020204030204" pitchFamily="34" charset="0"/>
+              <a:ea typeface="Calibri" panose="020F0502020204030204" pitchFamily="34" charset="0"/>
+              <a:cs typeface="Calibri" panose="020F0502020204030204" pitchFamily="34" charset="0"/>
+            </a:endParaRPr>
+          </a:p>
+          <a:p>
+            <a:endParaRPr lang="en-GB" sz="1600" b="1" dirty="0">
+              <a:latin typeface="Calibri" panose="020F0502020204030204" pitchFamily="34" charset="0"/>
+              <a:ea typeface="Calibri" panose="020F0502020204030204" pitchFamily="34" charset="0"/>
+              <a:cs typeface="Calibri" panose="020F0502020204030204" pitchFamily="34" charset="0"/>
+            </a:endParaRPr>
+          </a:p>
+          <a:p>
+            <a:endParaRPr lang="en-GB" sz="1600" b="1" dirty="0">
+              <a:latin typeface="Calibri" panose="020F0502020204030204" pitchFamily="34" charset="0"/>
+              <a:ea typeface="Calibri" panose="020F0502020204030204" pitchFamily="34" charset="0"/>
+              <a:cs typeface="Calibri" panose="020F0502020204030204" pitchFamily="34" charset="0"/>
+            </a:endParaRPr>
+          </a:p>
+          <a:p>
+            <a:endParaRPr lang="en-GB" sz="1600" b="1" dirty="0">
+              <a:latin typeface="Calibri" panose="020F0502020204030204" pitchFamily="34" charset="0"/>
+              <a:ea typeface="Calibri" panose="020F0502020204030204" pitchFamily="34" charset="0"/>
+              <a:cs typeface="Calibri" panose="020F0502020204030204" pitchFamily="34" charset="0"/>
+            </a:endParaRPr>
+          </a:p>
+          <a:p>
+            <a:endParaRPr lang="en-GB" sz="1600" b="1" dirty="0">
+              <a:latin typeface="Calibri" panose="020F0502020204030204" pitchFamily="34" charset="0"/>
+              <a:ea typeface="Calibri" panose="020F0502020204030204" pitchFamily="34" charset="0"/>
+              <a:cs typeface="Calibri" panose="020F0502020204030204" pitchFamily="34" charset="0"/>
+            </a:endParaRPr>
+          </a:p>
+          <a:p>
+            <a:endParaRPr lang="en-GB" sz="1600" b="1" dirty="0">
+              <a:latin typeface="Calibri" panose="020F0502020204030204" pitchFamily="34" charset="0"/>
+              <a:ea typeface="Calibri" panose="020F0502020204030204" pitchFamily="34" charset="0"/>
+              <a:cs typeface="Calibri" panose="020F0502020204030204" pitchFamily="34" charset="0"/>
+            </a:endParaRPr>
+          </a:p>
+          <a:p>
+            <a:endParaRPr lang="en-GB" sz="1600" b="1" dirty="0">
+              <a:latin typeface="Calibri" panose="020F0502020204030204" pitchFamily="34" charset="0"/>
+              <a:ea typeface="Calibri" panose="020F0502020204030204" pitchFamily="34" charset="0"/>
+              <a:cs typeface="Calibri" panose="020F0502020204030204" pitchFamily="34" charset="0"/>
+            </a:endParaRPr>
+          </a:p>
+          <a:p>
+            <a:endParaRPr lang="en-GB" sz="1600" b="1" dirty="0">
+              <a:latin typeface="Calibri" panose="020F0502020204030204" pitchFamily="34" charset="0"/>
+              <a:ea typeface="Calibri" panose="020F0502020204030204" pitchFamily="34" charset="0"/>
+              <a:cs typeface="Calibri" panose="020F0502020204030204" pitchFamily="34" charset="0"/>
+            </a:endParaRPr>
+          </a:p>
+          <a:p>
+            <a:endParaRPr lang="en-GB" sz="1600" b="1" dirty="0">
+              <a:latin typeface="Calibri" panose="020F0502020204030204" pitchFamily="34" charset="0"/>
+              <a:ea typeface="Calibri" panose="020F0502020204030204" pitchFamily="34" charset="0"/>
+              <a:cs typeface="Calibri" panose="020F0502020204030204" pitchFamily="34" charset="0"/>
+            </a:endParaRPr>
+          </a:p>
+          <a:p>
+            <a:endParaRPr lang="en-GB" sz="1600" b="1" dirty="0">
+              <a:latin typeface="Calibri" panose="020F0502020204030204" pitchFamily="34" charset="0"/>
+              <a:ea typeface="Calibri" panose="020F0502020204030204" pitchFamily="34" charset="0"/>
+              <a:cs typeface="Calibri" panose="020F0502020204030204" pitchFamily="34" charset="0"/>
+            </a:endParaRPr>
+          </a:p>
+          <a:p>
+            <a:endParaRPr lang="en-GB" sz="1600" b="1" dirty="0">
+              <a:latin typeface="Calibri" panose="020F0502020204030204" pitchFamily="34" charset="0"/>
+              <a:ea typeface="Calibri" panose="020F0502020204030204" pitchFamily="34" charset="0"/>
+              <a:cs typeface="Calibri" panose="020F0502020204030204" pitchFamily="34" charset="0"/>
+            </a:endParaRPr>
+          </a:p>
+          <a:p>
+            <a:endParaRPr lang="en-GB" sz="1600" b="1" dirty="0">
+              <a:latin typeface="Calibri" panose="020F0502020204030204" pitchFamily="34" charset="0"/>
+              <a:ea typeface="Calibri" panose="020F0502020204030204" pitchFamily="34" charset="0"/>
+              <a:cs typeface="Calibri" panose="020F0502020204030204" pitchFamily="34" charset="0"/>
+            </a:endParaRPr>
+          </a:p>
+          <a:p>
+            <a:endParaRPr lang="en-GB" sz="1600" b="1" dirty="0">
+              <a:latin typeface="Calibri" panose="020F0502020204030204" pitchFamily="34" charset="0"/>
+              <a:ea typeface="Calibri" panose="020F0502020204030204" pitchFamily="34" charset="0"/>
+              <a:cs typeface="Calibri" panose="020F0502020204030204" pitchFamily="34" charset="0"/>
+            </a:endParaRPr>
+          </a:p>
+          <a:p>
+            <a:endParaRPr lang="en-GB" sz="1600" b="1" dirty="0">
+              <a:latin typeface="Calibri" panose="020F0502020204030204" pitchFamily="34" charset="0"/>
+              <a:ea typeface="Calibri" panose="020F0502020204030204" pitchFamily="34" charset="0"/>
+              <a:cs typeface="Calibri" panose="020F0502020204030204" pitchFamily="34" charset="0"/>
+            </a:endParaRPr>
+          </a:p>
+          <a:p>
+            <a:endParaRPr lang="en-GB" sz="1600" b="1" dirty="0">
+              <a:latin typeface="Calibri" panose="020F0502020204030204" pitchFamily="34" charset="0"/>
+              <a:ea typeface="Calibri" panose="020F0502020204030204" pitchFamily="34" charset="0"/>
+              <a:cs typeface="Calibri" panose="020F0502020204030204" pitchFamily="34" charset="0"/>
+            </a:endParaRPr>
+          </a:p>
+          <a:p>
+            <a:endParaRPr lang="en-GB" sz="1600" b="1" dirty="0">
+              <a:latin typeface="Calibri" panose="020F0502020204030204" pitchFamily="34" charset="0"/>
+              <a:ea typeface="Calibri" panose="020F0502020204030204" pitchFamily="34" charset="0"/>
+              <a:cs typeface="Calibri" panose="020F0502020204030204" pitchFamily="34" charset="0"/>
+            </a:endParaRPr>
+          </a:p>
+          <a:p>
+            <a:endParaRPr lang="en-GB" sz="1600" b="1" dirty="0">
+              <a:latin typeface="Calibri" panose="020F0502020204030204" pitchFamily="34" charset="0"/>
+              <a:ea typeface="Calibri" panose="020F0502020204030204" pitchFamily="34" charset="0"/>
+              <a:cs typeface="Calibri" panose="020F0502020204030204" pitchFamily="34" charset="0"/>
+            </a:endParaRPr>
+          </a:p>
+          <a:p>
+            <a:r>
+              <a:rPr lang="en-GB" sz="1600" b="1" dirty="0">
+                <a:latin typeface="Calibri" panose="020F0502020204030204" pitchFamily="34" charset="0"/>
+                <a:ea typeface="Calibri" panose="020F0502020204030204" pitchFamily="34" charset="0"/>
+                <a:cs typeface="Calibri" panose="020F0502020204030204" pitchFamily="34" charset="0"/>
+              </a:rPr>
+              <a:t>Something in this column too idk</a:t>
+            </a:r>
           </a:p>
         </p:txBody>
       </p:sp>
@@ -3911,7 +4610,7 @@
         </p:nvSpPr>
         <p:spPr>
           <a:xfrm>
-            <a:off x="490047" y="7234064"/>
+            <a:off x="435530" y="7234064"/>
             <a:ext cx="9972464" cy="3777333"/>
           </a:xfrm>
           <a:prstGeom prst="roundRect">
@@ -3974,7 +4673,7 @@
                 <a:ea typeface="Calibri" panose="020F0502020204030204" pitchFamily="34" charset="0"/>
                 <a:cs typeface="Calibri" panose="020F0502020204030204" pitchFamily="34" charset="0"/>
               </a:rPr>
-              <a:t>Publicly available telemetric data from real Formula One races were accessed using the FastF1 Python library. From here, taking all fast-lap qualifying data from events under dry conditions to form the historical dataset.</a:t>
+              <a:t>Publicly available telemetric data from real Formula One races were accessed using the FastF1 Python library. From here, fast-lap qualifying data from events under dry conditions are taken to form the historical dataset.</a:t>
             </a:r>
           </a:p>
           <a:p>
@@ -4022,7 +4721,7 @@
                 <a:ea typeface="Calibri" panose="020F0502020204030204" pitchFamily="34" charset="0"/>
                 <a:cs typeface="Calibri" panose="020F0502020204030204" pitchFamily="34" charset="0"/>
               </a:rPr>
-              <a:t>Preprocessing was applied to all data collected. Historical data throttle and braking values were binarised and was temporally interpolated to every 0.05s (20hz). Game coordinates were realigned to match real-world values, with its throttle and braking values normalised to 0-1. The data were also interpolated to match 5 metre track intervals, appropriate for the 20hz sample intervals, so that comparisons between laps had reliable accuracy. </a:t>
+              <a:t>Preprocessing was applied to all data collected. Historical throttle and braking values were binarised and temporally interpolated to every 0.05s (20hz). Game coordinates were realigned to match real-world values, with its throttle and braking values normalised to 0-1. The data were interpolated to match 5 metre track intervals, appropriate for the 20hz sample intervals, so that comparisons between laps had reliable accuracy. </a:t>
             </a:r>
           </a:p>
           <a:p>
@@ -4035,7 +4734,7 @@
                 <a:ea typeface="Calibri" panose="020F0502020204030204" pitchFamily="34" charset="0"/>
                 <a:cs typeface="Calibri" panose="020F0502020204030204" pitchFamily="34" charset="0"/>
               </a:rPr>
-              <a:t>Data had the following columns: distance, x, y, z, norm_speed, speed, time, throttle, brake, gear, drs, rpm, source.</a:t>
+              <a:t>Data had the following columns: distance, x, y, z, norm_speed, speed, time, throttle, brake, gear, drs, rpm.</a:t>
             </a:r>
             <a:endParaRPr lang="en-GB" sz="2400" b="1" dirty="0">
               <a:solidFill>
@@ -4062,10 +4761,10 @@
         </p:nvGrpSpPr>
         <p:grpSpPr>
           <a:xfrm>
-            <a:off x="12866423" y="3941880"/>
-            <a:ext cx="6154817" cy="2783671"/>
-            <a:chOff x="10801687" y="4065336"/>
-            <a:chExt cx="6154817" cy="2783671"/>
+            <a:off x="11455577" y="5470306"/>
+            <a:ext cx="4541593" cy="2005918"/>
+            <a:chOff x="10801689" y="4065336"/>
+            <a:chExt cx="6154818" cy="2865483"/>
           </a:xfrm>
         </p:grpSpPr>
         <p:pic>
@@ -4112,8 +4811,8 @@
           </p:nvSpPr>
           <p:spPr>
             <a:xfrm>
-              <a:off x="10801687" y="6510453"/>
-              <a:ext cx="6154817" cy="338554"/>
+              <a:off x="10801689" y="6592264"/>
+              <a:ext cx="6154818" cy="338555"/>
             </a:xfrm>
             <a:prstGeom prst="rect">
               <a:avLst/>
@@ -4153,10 +4852,10 @@
         </p:nvGrpSpPr>
         <p:grpSpPr>
           <a:xfrm>
-            <a:off x="14079738" y="6849523"/>
-            <a:ext cx="3530656" cy="3800024"/>
-            <a:chOff x="10845672" y="6707406"/>
-            <a:chExt cx="4123314" cy="3585470"/>
+            <a:off x="11455577" y="7963749"/>
+            <a:ext cx="3272793" cy="2524307"/>
+            <a:chOff x="10845670" y="6707406"/>
+            <a:chExt cx="6336178" cy="3948387"/>
           </a:xfrm>
         </p:grpSpPr>
         <p:grpSp>
@@ -4174,9 +4873,9 @@
           <p:grpSpPr>
             <a:xfrm>
               <a:off x="11042337" y="6707406"/>
-              <a:ext cx="3739242" cy="2916740"/>
+              <a:ext cx="5076721" cy="2916740"/>
               <a:chOff x="10915877" y="7365592"/>
-              <a:chExt cx="3739242" cy="2916740"/>
+              <a:chExt cx="5076721" cy="2916740"/>
             </a:xfrm>
           </p:grpSpPr>
           <p:pic>
@@ -4231,8 +4930,8 @@
             </p:blipFill>
             <p:spPr>
               <a:xfrm>
-                <a:off x="12896214" y="7384257"/>
-                <a:ext cx="1758905" cy="2883888"/>
+                <a:off x="14233695" y="7384121"/>
+                <a:ext cx="1758903" cy="2883890"/>
               </a:xfrm>
               <a:prstGeom prst="rect">
                 <a:avLst/>
@@ -4254,8 +4953,8 @@
           </p:nvSpPr>
           <p:spPr>
             <a:xfrm>
-              <a:off x="10845672" y="9741118"/>
-              <a:ext cx="4123314" cy="551758"/>
+              <a:off x="10845670" y="9741119"/>
+              <a:ext cx="6336178" cy="914674"/>
             </a:xfrm>
             <a:prstGeom prst="rect">
               <a:avLst/>
@@ -4270,7 +4969,7 @@
             <a:p>
               <a:r>
                 <a:rPr lang="en-GB" sz="1600" b="1" dirty="0"/>
-                <a:t>Figures 2 &amp; 3: </a:t>
+                <a:t>Figures 3 &amp; 4: </a:t>
               </a:r>
               <a:r>
                 <a:rPr lang="en-GB" sz="1600" dirty="0"/>
@@ -4281,97 +4980,6 @@
           </p:txBody>
         </p:sp>
       </p:grpSp>
-      <p:pic>
-        <p:nvPicPr>
-          <p:cNvPr id="22" name="Picture 21">
-            <a:extLst>
-              <a:ext uri="{FF2B5EF4-FFF2-40B4-BE49-F238E27FC236}">
-                <a16:creationId xmlns:a16="http://schemas.microsoft.com/office/drawing/2014/main" id="{1F60DBE7-CAD8-922C-A22A-F395D5F75435}"/>
-              </a:ext>
-            </a:extLst>
-          </p:cNvPr>
-          <p:cNvPicPr>
-            <a:picLocks noChangeAspect="1"/>
-          </p:cNvPicPr>
-          <p:nvPr/>
-        </p:nvPicPr>
-        <p:blipFill>
-          <a:blip r:embed="rId6"/>
-          <a:stretch>
-            <a:fillRect/>
-          </a:stretch>
-        </p:blipFill>
-        <p:spPr>
-          <a:xfrm>
-            <a:off x="2365167" y="11682574"/>
-            <a:ext cx="5225229" cy="2340562"/>
-          </a:xfrm>
-          <a:prstGeom prst="rect">
-            <a:avLst/>
-          </a:prstGeom>
-        </p:spPr>
-      </p:pic>
-      <p:pic>
-        <p:nvPicPr>
-          <p:cNvPr id="24" name="Picture 23">
-            <a:extLst>
-              <a:ext uri="{FF2B5EF4-FFF2-40B4-BE49-F238E27FC236}">
-                <a16:creationId xmlns:a16="http://schemas.microsoft.com/office/drawing/2014/main" id="{36F8C087-00E0-D9B9-F42A-069442A99ABB}"/>
-              </a:ext>
-            </a:extLst>
-          </p:cNvPr>
-          <p:cNvPicPr>
-            <a:picLocks noChangeAspect="1"/>
-          </p:cNvPicPr>
-          <p:nvPr/>
-        </p:nvPicPr>
-        <p:blipFill>
-          <a:blip r:embed="rId7"/>
-          <a:stretch>
-            <a:fillRect/>
-          </a:stretch>
-        </p:blipFill>
-        <p:spPr>
-          <a:xfrm>
-            <a:off x="2266186" y="14468852"/>
-            <a:ext cx="6268934" cy="2563968"/>
-          </a:xfrm>
-          <a:prstGeom prst="rect">
-            <a:avLst/>
-          </a:prstGeom>
-        </p:spPr>
-      </p:pic>
-      <p:pic>
-        <p:nvPicPr>
-          <p:cNvPr id="30" name="Picture 29">
-            <a:extLst>
-              <a:ext uri="{FF2B5EF4-FFF2-40B4-BE49-F238E27FC236}">
-                <a16:creationId xmlns:a16="http://schemas.microsoft.com/office/drawing/2014/main" id="{D2F64817-0EB2-E5E8-47C4-F7473A4533F6}"/>
-              </a:ext>
-            </a:extLst>
-          </p:cNvPr>
-          <p:cNvPicPr>
-            <a:picLocks noChangeAspect="1"/>
-          </p:cNvPicPr>
-          <p:nvPr/>
-        </p:nvPicPr>
-        <p:blipFill>
-          <a:blip r:embed="rId8"/>
-          <a:srcRect l="3870"/>
-          <a:stretch>
-            <a:fillRect/>
-          </a:stretch>
-        </p:blipFill>
-        <p:spPr>
-          <a:xfrm>
-            <a:off x="13320933" y="18369187"/>
-            <a:ext cx="5250755" cy="4642821"/>
-          </a:xfrm>
-          <a:prstGeom prst="rect">
-            <a:avLst/>
-          </a:prstGeom>
-        </p:spPr>
-      </p:pic>
       <p:sp>
         <p:nvSpPr>
           <p:cNvPr id="45" name="Rectangle: Rounded Corners 44">
@@ -4464,7 +5072,7 @@
         </p:nvSpPr>
         <p:spPr>
           <a:xfrm>
-            <a:off x="10965285" y="11466018"/>
+            <a:off x="10978646" y="11482470"/>
             <a:ext cx="9957091" cy="5824704"/>
           </a:xfrm>
           <a:prstGeom prst="roundRect">
@@ -4494,16 +5102,23 @@
           </a:fontRef>
         </p:style>
         <p:txBody>
-          <a:bodyPr rtlCol="0" anchor="ctr"/>
+          <a:bodyPr numCol="2" rtlCol="0" anchor="ctr"/>
           <a:lstStyle/>
           <a:p>
+            <a:endParaRPr lang="en-GB" sz="2400" b="1" dirty="0">
+              <a:latin typeface="Calibri" panose="020F0502020204030204" pitchFamily="34" charset="0"/>
+              <a:ea typeface="Calibri" panose="020F0502020204030204" pitchFamily="34" charset="0"/>
+              <a:cs typeface="Calibri" panose="020F0502020204030204" pitchFamily="34" charset="0"/>
+            </a:endParaRPr>
+          </a:p>
+          <a:p>
             <a:r>
               <a:rPr lang="en-GB" sz="2400" b="1" dirty="0">
                 <a:latin typeface="Calibri" panose="020F0502020204030204" pitchFamily="34" charset="0"/>
                 <a:ea typeface="Calibri" panose="020F0502020204030204" pitchFamily="34" charset="0"/>
                 <a:cs typeface="Calibri" panose="020F0502020204030204" pitchFamily="34" charset="0"/>
               </a:rPr>
-              <a:t>Results:</a:t>
+              <a:t>Model Training &amp; Optimisation:</a:t>
             </a:r>
             <a:br>
               <a:rPr lang="en-GB" sz="2400" b="1" dirty="0">
@@ -4513,12 +5128,57 @@
               </a:rPr>
             </a:br>
             <a:r>
-              <a:rPr lang="en-GB" sz="1600" dirty="0" err="1">
-                <a:latin typeface="Calibri" panose="020F0502020204030204" pitchFamily="34" charset="0"/>
-                <a:ea typeface="Calibri" panose="020F0502020204030204" pitchFamily="34" charset="0"/>
-                <a:cs typeface="Calibri" panose="020F0502020204030204" pitchFamily="34" charset="0"/>
-              </a:rPr>
-              <a:t>aaaaa</a:t>
+              <a:rPr lang="en-GB" sz="1600" b="1" dirty="0">
+                <a:latin typeface="Calibri" panose="020F0502020204030204" pitchFamily="34" charset="0"/>
+                <a:ea typeface="Calibri" panose="020F0502020204030204" pitchFamily="34" charset="0"/>
+                <a:cs typeface="Calibri" panose="020F0502020204030204" pitchFamily="34" charset="0"/>
+              </a:rPr>
+              <a:t>Game &amp; Historical Model:</a:t>
+            </a:r>
+            <a:br>
+              <a:rPr lang="en-GB" sz="1600" b="1" dirty="0">
+                <a:latin typeface="Calibri" panose="020F0502020204030204" pitchFamily="34" charset="0"/>
+                <a:ea typeface="Calibri" panose="020F0502020204030204" pitchFamily="34" charset="0"/>
+                <a:cs typeface="Calibri" panose="020F0502020204030204" pitchFamily="34" charset="0"/>
+              </a:rPr>
+            </a:br>
+            <a:r>
+              <a:rPr lang="en-GB" sz="1600" dirty="0">
+                <a:latin typeface="Calibri" panose="020F0502020204030204" pitchFamily="34" charset="0"/>
+                <a:ea typeface="Calibri" panose="020F0502020204030204" pitchFamily="34" charset="0"/>
+                <a:cs typeface="Calibri" panose="020F0502020204030204" pitchFamily="34" charset="0"/>
+              </a:rPr>
+              <a:t>- Uses Random Forest Classifier.</a:t>
+            </a:r>
+            <a:br>
+              <a:rPr lang="en-GB" sz="1600" dirty="0">
+                <a:latin typeface="Calibri" panose="020F0502020204030204" pitchFamily="34" charset="0"/>
+                <a:ea typeface="Calibri" panose="020F0502020204030204" pitchFamily="34" charset="0"/>
+                <a:cs typeface="Calibri" panose="020F0502020204030204" pitchFamily="34" charset="0"/>
+              </a:rPr>
+            </a:br>
+            <a:r>
+              <a:rPr lang="en-GB" sz="1600" dirty="0">
+                <a:latin typeface="Calibri" panose="020F0502020204030204" pitchFamily="34" charset="0"/>
+                <a:ea typeface="Calibri" panose="020F0502020204030204" pitchFamily="34" charset="0"/>
+                <a:cs typeface="Calibri" panose="020F0502020204030204" pitchFamily="34" charset="0"/>
+              </a:rPr>
+              <a:t>- Classifies braking and throttle zone based on spatial telemetry (x, y, z coordinates) and track curvature (smoothed using look-ahead bands to predict future corners).</a:t>
+            </a:r>
+            <a:br>
+              <a:rPr lang="en-GB" sz="1600" dirty="0">
+                <a:latin typeface="Calibri" panose="020F0502020204030204" pitchFamily="34" charset="0"/>
+                <a:ea typeface="Calibri" panose="020F0502020204030204" pitchFamily="34" charset="0"/>
+                <a:cs typeface="Calibri" panose="020F0502020204030204" pitchFamily="34" charset="0"/>
+              </a:rPr>
+            </a:br>
+            <a:r>
+              <a:rPr lang="en-GB" sz="1600" dirty="0">
+                <a:latin typeface="Calibri" panose="020F0502020204030204" pitchFamily="34" charset="0"/>
+                <a:ea typeface="Calibri" panose="020F0502020204030204" pitchFamily="34" charset="0"/>
+                <a:cs typeface="Calibri" panose="020F0502020204030204" pitchFamily="34" charset="0"/>
+              </a:rPr>
+              <a:t>-  Labels dynamically generated by interpreting raw inputs against threshold values.</a:t>
             </a:r>
             <a:endParaRPr lang="en-GB" sz="1600" b="1" dirty="0">
               <a:latin typeface="Calibri" panose="020F0502020204030204" pitchFamily="34" charset="0"/>
@@ -4526,8 +5186,462 @@
               <a:cs typeface="Calibri" panose="020F0502020204030204" pitchFamily="34" charset="0"/>
             </a:endParaRPr>
           </a:p>
-        </p:txBody>
-      </p:sp>
+          <a:p>
+            <a:endParaRPr lang="en-GB" sz="1600" b="1" dirty="0">
+              <a:latin typeface="Calibri" panose="020F0502020204030204" pitchFamily="34" charset="0"/>
+              <a:ea typeface="Calibri" panose="020F0502020204030204" pitchFamily="34" charset="0"/>
+              <a:cs typeface="Calibri" panose="020F0502020204030204" pitchFamily="34" charset="0"/>
+            </a:endParaRPr>
+          </a:p>
+          <a:p>
+            <a:r>
+              <a:rPr lang="en-GB" sz="1600" b="1" dirty="0">
+                <a:latin typeface="Calibri" panose="020F0502020204030204" pitchFamily="34" charset="0"/>
+                <a:ea typeface="Calibri" panose="020F0502020204030204" pitchFamily="34" charset="0"/>
+                <a:cs typeface="Calibri" panose="020F0502020204030204" pitchFamily="34" charset="0"/>
+              </a:rPr>
+              <a:t>Speed Model:</a:t>
+            </a:r>
+            <a:br>
+              <a:rPr lang="en-GB" sz="1600" b="1" dirty="0">
+                <a:latin typeface="Calibri" panose="020F0502020204030204" pitchFamily="34" charset="0"/>
+                <a:ea typeface="Calibri" panose="020F0502020204030204" pitchFamily="34" charset="0"/>
+                <a:cs typeface="Calibri" panose="020F0502020204030204" pitchFamily="34" charset="0"/>
+              </a:rPr>
+            </a:br>
+            <a:r>
+              <a:rPr lang="en-GB" sz="1600" dirty="0">
+                <a:latin typeface="Calibri" panose="020F0502020204030204" pitchFamily="34" charset="0"/>
+                <a:ea typeface="Calibri" panose="020F0502020204030204" pitchFamily="34" charset="0"/>
+                <a:cs typeface="Calibri" panose="020F0502020204030204" pitchFamily="34" charset="0"/>
+              </a:rPr>
+              <a:t>- Uses Random Forest Regressor.</a:t>
+            </a:r>
+            <a:br>
+              <a:rPr lang="en-GB" sz="1600" dirty="0">
+                <a:latin typeface="Calibri" panose="020F0502020204030204" pitchFamily="34" charset="0"/>
+                <a:ea typeface="Calibri" panose="020F0502020204030204" pitchFamily="34" charset="0"/>
+                <a:cs typeface="Calibri" panose="020F0502020204030204" pitchFamily="34" charset="0"/>
+              </a:rPr>
+            </a:br>
+            <a:r>
+              <a:rPr lang="en-GB" sz="1600" dirty="0">
+                <a:latin typeface="Calibri" panose="020F0502020204030204" pitchFamily="34" charset="0"/>
+                <a:ea typeface="Calibri" panose="020F0502020204030204" pitchFamily="34" charset="0"/>
+                <a:cs typeface="Calibri" panose="020F0502020204030204" pitchFamily="34" charset="0"/>
+              </a:rPr>
+              <a:t>- Models trained independently per track; enables the model to learn track-specific speed boundaries to a higher accuracy.</a:t>
+            </a:r>
+            <a:br>
+              <a:rPr lang="en-GB" sz="1600" dirty="0">
+                <a:latin typeface="Calibri" panose="020F0502020204030204" pitchFamily="34" charset="0"/>
+                <a:ea typeface="Calibri" panose="020F0502020204030204" pitchFamily="34" charset="0"/>
+                <a:cs typeface="Calibri" panose="020F0502020204030204" pitchFamily="34" charset="0"/>
+              </a:rPr>
+            </a:br>
+            <a:r>
+              <a:rPr lang="en-GB" sz="1600" dirty="0">
+                <a:latin typeface="Calibri" panose="020F0502020204030204" pitchFamily="34" charset="0"/>
+                <a:ea typeface="Calibri" panose="020F0502020204030204" pitchFamily="34" charset="0"/>
+                <a:cs typeface="Calibri" panose="020F0502020204030204" pitchFamily="34" charset="0"/>
+              </a:rPr>
+              <a:t>- GroupShuffleSplit used to prevent data leakage – distinct laps kept entirely in either training or testing set.</a:t>
+            </a:r>
+          </a:p>
+          <a:p>
+            <a:endParaRPr lang="en-GB" sz="1600" dirty="0">
+              <a:latin typeface="Calibri" panose="020F0502020204030204" pitchFamily="34" charset="0"/>
+              <a:ea typeface="Calibri" panose="020F0502020204030204" pitchFamily="34" charset="0"/>
+              <a:cs typeface="Calibri" panose="020F0502020204030204" pitchFamily="34" charset="0"/>
+            </a:endParaRPr>
+          </a:p>
+          <a:p>
+            <a:endParaRPr lang="en-GB" sz="1600" dirty="0">
+              <a:latin typeface="Calibri" panose="020F0502020204030204" pitchFamily="34" charset="0"/>
+              <a:ea typeface="Calibri" panose="020F0502020204030204" pitchFamily="34" charset="0"/>
+              <a:cs typeface="Calibri" panose="020F0502020204030204" pitchFamily="34" charset="0"/>
+            </a:endParaRPr>
+          </a:p>
+          <a:p>
+            <a:endParaRPr lang="en-GB" sz="1600" dirty="0">
+              <a:latin typeface="Calibri" panose="020F0502020204030204" pitchFamily="34" charset="0"/>
+              <a:ea typeface="Calibri" panose="020F0502020204030204" pitchFamily="34" charset="0"/>
+              <a:cs typeface="Calibri" panose="020F0502020204030204" pitchFamily="34" charset="0"/>
+            </a:endParaRPr>
+          </a:p>
+          <a:p>
+            <a:r>
+              <a:rPr lang="en-GB" sz="1600" dirty="0">
+                <a:latin typeface="Calibri" panose="020F0502020204030204" pitchFamily="34" charset="0"/>
+                <a:ea typeface="Calibri" panose="020F0502020204030204" pitchFamily="34" charset="0"/>
+                <a:cs typeface="Calibri" panose="020F0502020204030204" pitchFamily="34" charset="0"/>
+              </a:rPr>
+              <a:t>- Extensively optimised by hyperparameter constraints on the depth and min/max samples, as well as bootstrap limits and using exclusively MAE and R</a:t>
+            </a:r>
+            <a:r>
+              <a:rPr lang="en-GB" sz="1600" baseline="30000" dirty="0">
+                <a:latin typeface="Calibri" panose="020F0502020204030204" pitchFamily="34" charset="0"/>
+                <a:ea typeface="Calibri" panose="020F0502020204030204" pitchFamily="34" charset="0"/>
+                <a:cs typeface="Calibri" panose="020F0502020204030204" pitchFamily="34" charset="0"/>
+              </a:rPr>
+              <a:t>2</a:t>
+            </a:r>
+            <a:r>
+              <a:rPr lang="en-GB" sz="1600" dirty="0">
+                <a:latin typeface="Calibri" panose="020F0502020204030204" pitchFamily="34" charset="0"/>
+                <a:ea typeface="Calibri" panose="020F0502020204030204" pitchFamily="34" charset="0"/>
+                <a:cs typeface="Calibri" panose="020F0502020204030204" pitchFamily="34" charset="0"/>
+              </a:rPr>
+              <a:t> for evaluation.</a:t>
+            </a:r>
+          </a:p>
+          <a:p>
+            <a:endParaRPr lang="en-GB" sz="1600" dirty="0">
+              <a:latin typeface="Calibri" panose="020F0502020204030204" pitchFamily="34" charset="0"/>
+              <a:ea typeface="Calibri" panose="020F0502020204030204" pitchFamily="34" charset="0"/>
+              <a:cs typeface="Calibri" panose="020F0502020204030204" pitchFamily="34" charset="0"/>
+            </a:endParaRPr>
+          </a:p>
+          <a:p>
+            <a:r>
+              <a:rPr lang="en-GB" sz="1600" b="1" dirty="0">
+                <a:latin typeface="Calibri" panose="020F0502020204030204" pitchFamily="34" charset="0"/>
+                <a:ea typeface="Calibri" panose="020F0502020204030204" pitchFamily="34" charset="0"/>
+                <a:cs typeface="Calibri" panose="020F0502020204030204" pitchFamily="34" charset="0"/>
+              </a:rPr>
+              <a:t>Issues with Historical Model:</a:t>
+            </a:r>
+          </a:p>
+          <a:p>
+            <a:r>
+              <a:rPr lang="en-GB" sz="1600" dirty="0">
+                <a:latin typeface="Calibri" panose="020F0502020204030204" pitchFamily="34" charset="0"/>
+                <a:ea typeface="Calibri" panose="020F0502020204030204" pitchFamily="34" charset="0"/>
+                <a:cs typeface="Calibri" panose="020F0502020204030204" pitchFamily="34" charset="0"/>
+              </a:rPr>
+              <a:t>- Historical data, even when interpolated, experiences data inaccuracies.</a:t>
+            </a:r>
+            <a:br>
+              <a:rPr lang="en-GB" sz="1600" dirty="0">
+                <a:latin typeface="Calibri" panose="020F0502020204030204" pitchFamily="34" charset="0"/>
+                <a:ea typeface="Calibri" panose="020F0502020204030204" pitchFamily="34" charset="0"/>
+                <a:cs typeface="Calibri" panose="020F0502020204030204" pitchFamily="34" charset="0"/>
+              </a:rPr>
+            </a:br>
+            <a:r>
+              <a:rPr lang="en-GB" sz="1600" dirty="0">
+                <a:latin typeface="Calibri" panose="020F0502020204030204" pitchFamily="34" charset="0"/>
+                <a:ea typeface="Calibri" panose="020F0502020204030204" pitchFamily="34" charset="0"/>
+                <a:cs typeface="Calibri" panose="020F0502020204030204" pitchFamily="34" charset="0"/>
+              </a:rPr>
+              <a:t>- The original FastF1 dataset, as well as all publicly available Formula One datasets, updates at a rate of only 4hz; interpolating to 20hz means data is highly likely to contain inaccurate braking/throttling zones.</a:t>
+            </a:r>
+          </a:p>
+          <a:p>
+            <a:r>
+              <a:rPr lang="en-GB" sz="1600" dirty="0">
+                <a:latin typeface="Calibri" panose="020F0502020204030204" pitchFamily="34" charset="0"/>
+                <a:ea typeface="Calibri" panose="020F0502020204030204" pitchFamily="34" charset="0"/>
+                <a:cs typeface="Calibri" panose="020F0502020204030204" pitchFamily="34" charset="0"/>
+              </a:rPr>
+              <a:t>- This is further made difficult to rectify by braking values only being TRUE or FALSE in the original dataset, meaning no decimal values are able to be retrieved.</a:t>
+            </a:r>
+          </a:p>
+          <a:p>
+            <a:r>
+              <a:rPr lang="en-GB" sz="1600" dirty="0">
+                <a:latin typeface="Calibri" panose="020F0502020204030204" pitchFamily="34" charset="0"/>
+                <a:ea typeface="Calibri" panose="020F0502020204030204" pitchFamily="34" charset="0"/>
+                <a:cs typeface="Calibri" panose="020F0502020204030204" pitchFamily="34" charset="0"/>
+              </a:rPr>
+              <a:t>- This is something I am unable to fix – this is a pure limitation in publicly available Formula One data.</a:t>
+            </a:r>
+            <a:br>
+              <a:rPr lang="en-GB" sz="2400" b="1" dirty="0">
+                <a:latin typeface="Calibri" panose="020F0502020204030204" pitchFamily="34" charset="0"/>
+                <a:ea typeface="Calibri" panose="020F0502020204030204" pitchFamily="34" charset="0"/>
+                <a:cs typeface="Calibri" panose="020F0502020204030204" pitchFamily="34" charset="0"/>
+              </a:rPr>
+            </a:br>
+            <a:endParaRPr lang="en-GB" sz="1600" b="1" dirty="0">
+              <a:latin typeface="Calibri" panose="020F0502020204030204" pitchFamily="34" charset="0"/>
+              <a:ea typeface="Calibri" panose="020F0502020204030204" pitchFamily="34" charset="0"/>
+              <a:cs typeface="Calibri" panose="020F0502020204030204" pitchFamily="34" charset="0"/>
+            </a:endParaRPr>
+          </a:p>
+        </p:txBody>
+      </p:sp>
+      <p:grpSp>
+        <p:nvGrpSpPr>
+          <p:cNvPr id="5" name="Group 4">
+            <a:extLst>
+              <a:ext uri="{FF2B5EF4-FFF2-40B4-BE49-F238E27FC236}">
+                <a16:creationId xmlns:a16="http://schemas.microsoft.com/office/drawing/2014/main" id="{3028E529-45B9-13BD-F434-F2378C5B856B}"/>
+              </a:ext>
+            </a:extLst>
+          </p:cNvPr>
+          <p:cNvGrpSpPr/>
+          <p:nvPr/>
+        </p:nvGrpSpPr>
+        <p:grpSpPr>
+          <a:xfrm>
+            <a:off x="15997171" y="5365647"/>
+            <a:ext cx="4524504" cy="2573048"/>
+            <a:chOff x="11526900" y="6015640"/>
+            <a:chExt cx="3844294" cy="2186218"/>
+          </a:xfrm>
+        </p:grpSpPr>
+        <p:pic>
+          <p:nvPicPr>
+            <p:cNvPr id="22" name="Picture 21">
+              <a:extLst>
+                <a:ext uri="{FF2B5EF4-FFF2-40B4-BE49-F238E27FC236}">
+                  <a16:creationId xmlns:a16="http://schemas.microsoft.com/office/drawing/2014/main" id="{1F60DBE7-CAD8-922C-A22A-F395D5F75435}"/>
+                </a:ext>
+              </a:extLst>
+            </p:cNvPr>
+            <p:cNvPicPr>
+              <a:picLocks noChangeAspect="1"/>
+            </p:cNvPicPr>
+            <p:nvPr/>
+          </p:nvPicPr>
+          <p:blipFill>
+            <a:blip r:embed="rId6"/>
+            <a:stretch>
+              <a:fillRect/>
+            </a:stretch>
+          </p:blipFill>
+          <p:spPr>
+            <a:xfrm>
+              <a:off x="11526900" y="6015640"/>
+              <a:ext cx="3575169" cy="1601443"/>
+            </a:xfrm>
+            <a:prstGeom prst="rect">
+              <a:avLst/>
+            </a:prstGeom>
+          </p:spPr>
+        </p:pic>
+        <p:sp>
+          <p:nvSpPr>
+            <p:cNvPr id="2" name="TextBox 1">
+              <a:extLst>
+                <a:ext uri="{FF2B5EF4-FFF2-40B4-BE49-F238E27FC236}">
+                  <a16:creationId xmlns:a16="http://schemas.microsoft.com/office/drawing/2014/main" id="{5EB8D625-8285-7085-DFAD-DFCBFFAEE137}"/>
+                </a:ext>
+              </a:extLst>
+            </p:cNvPr>
+            <p:cNvSpPr txBox="1"/>
+            <p:nvPr/>
+          </p:nvSpPr>
+          <p:spPr>
+            <a:xfrm>
+              <a:off x="11526900" y="7617083"/>
+              <a:ext cx="3844294" cy="584775"/>
+            </a:xfrm>
+            <a:prstGeom prst="rect">
+              <a:avLst/>
+            </a:prstGeom>
+            <a:noFill/>
+          </p:spPr>
+          <p:txBody>
+            <a:bodyPr wrap="square" rtlCol="0">
+              <a:spAutoFit/>
+            </a:bodyPr>
+            <a:lstStyle/>
+            <a:p>
+              <a:r>
+                <a:rPr lang="en-GB" sz="1600" b="1" dirty="0"/>
+                <a:t>Figure 2: </a:t>
+              </a:r>
+              <a:r>
+                <a:rPr lang="en-GB" sz="1600" dirty="0"/>
+                <a:t>Curvature vs Speed scatter plot for the Red Bull Ring (Austria).</a:t>
+              </a:r>
+              <a:endParaRPr lang="en-GB" sz="1600" b="1" dirty="0"/>
+            </a:p>
+          </p:txBody>
+        </p:sp>
+      </p:grpSp>
+      <p:grpSp>
+        <p:nvGrpSpPr>
+          <p:cNvPr id="9" name="Group 8">
+            <a:extLst>
+              <a:ext uri="{FF2B5EF4-FFF2-40B4-BE49-F238E27FC236}">
+                <a16:creationId xmlns:a16="http://schemas.microsoft.com/office/drawing/2014/main" id="{C5B06375-CECF-FC3C-1E6C-DE7FEB7B17E9}"/>
+              </a:ext>
+            </a:extLst>
+          </p:cNvPr>
+          <p:cNvGrpSpPr/>
+          <p:nvPr/>
+        </p:nvGrpSpPr>
+        <p:grpSpPr>
+          <a:xfrm>
+            <a:off x="15080441" y="7879868"/>
+            <a:ext cx="4758187" cy="2608187"/>
+            <a:chOff x="15080441" y="6393968"/>
+            <a:chExt cx="4758187" cy="2608187"/>
+          </a:xfrm>
+        </p:grpSpPr>
+        <p:pic>
+          <p:nvPicPr>
+            <p:cNvPr id="24" name="Picture 23">
+              <a:extLst>
+                <a:ext uri="{FF2B5EF4-FFF2-40B4-BE49-F238E27FC236}">
+                  <a16:creationId xmlns:a16="http://schemas.microsoft.com/office/drawing/2014/main" id="{36F8C087-00E0-D9B9-F42A-069442A99ABB}"/>
+                </a:ext>
+              </a:extLst>
+            </p:cNvPr>
+            <p:cNvPicPr>
+              <a:picLocks noChangeAspect="1"/>
+            </p:cNvPicPr>
+            <p:nvPr/>
+          </p:nvPicPr>
+          <p:blipFill>
+            <a:blip r:embed="rId7"/>
+            <a:stretch>
+              <a:fillRect/>
+            </a:stretch>
+          </p:blipFill>
+          <p:spPr>
+            <a:xfrm>
+              <a:off x="15080441" y="6393968"/>
+              <a:ext cx="4758187" cy="1946079"/>
+            </a:xfrm>
+            <a:prstGeom prst="rect">
+              <a:avLst/>
+            </a:prstGeom>
+          </p:spPr>
+        </p:pic>
+        <p:sp>
+          <p:nvSpPr>
+            <p:cNvPr id="8" name="TextBox 7">
+              <a:extLst>
+                <a:ext uri="{FF2B5EF4-FFF2-40B4-BE49-F238E27FC236}">
+                  <a16:creationId xmlns:a16="http://schemas.microsoft.com/office/drawing/2014/main" id="{654D291D-DACD-63FA-0982-80B444615460}"/>
+                </a:ext>
+              </a:extLst>
+            </p:cNvPr>
+            <p:cNvSpPr txBox="1"/>
+            <p:nvPr/>
+          </p:nvSpPr>
+          <p:spPr>
+            <a:xfrm>
+              <a:off x="15183946" y="8417380"/>
+              <a:ext cx="4524504" cy="584775"/>
+            </a:xfrm>
+            <a:prstGeom prst="rect">
+              <a:avLst/>
+            </a:prstGeom>
+            <a:noFill/>
+          </p:spPr>
+          <p:txBody>
+            <a:bodyPr wrap="square" rtlCol="0">
+              <a:spAutoFit/>
+            </a:bodyPr>
+            <a:lstStyle/>
+            <a:p>
+              <a:r>
+                <a:rPr lang="en-GB" sz="1600" b="1" dirty="0"/>
+                <a:t>Figure 5: </a:t>
+              </a:r>
+              <a:r>
+                <a:rPr lang="en-GB" sz="1600" dirty="0"/>
+                <a:t>Speed vs Distance scatter plot for the Red Bull Ring (Austria), coloured by curvature.</a:t>
+              </a:r>
+              <a:endParaRPr lang="en-GB" sz="1600" b="1" dirty="0"/>
+            </a:p>
+          </p:txBody>
+        </p:sp>
+      </p:grpSp>
+      <p:sp>
+        <p:nvSpPr>
+          <p:cNvPr id="12" name="TextBox 11">
+            <a:extLst>
+              <a:ext uri="{FF2B5EF4-FFF2-40B4-BE49-F238E27FC236}">
+                <a16:creationId xmlns:a16="http://schemas.microsoft.com/office/drawing/2014/main" id="{DDB27EA2-955E-B1DA-10A3-ADE175A4B347}"/>
+              </a:ext>
+            </a:extLst>
+          </p:cNvPr>
+          <p:cNvSpPr txBox="1"/>
+          <p:nvPr/>
+        </p:nvSpPr>
+        <p:spPr>
+          <a:xfrm>
+            <a:off x="6442757" y="12362433"/>
+            <a:ext cx="3272793" cy="4524315"/>
+          </a:xfrm>
+          <a:prstGeom prst="rect">
+            <a:avLst/>
+          </a:prstGeom>
+          <a:noFill/>
+        </p:spPr>
+        <p:txBody>
+          <a:bodyPr wrap="square" rtlCol="0">
+            <a:spAutoFit/>
+          </a:bodyPr>
+          <a:lstStyle/>
+          <a:p>
+            <a:r>
+              <a:rPr lang="en-GB" sz="1600" b="1" dirty="0"/>
+              <a:t>Figure 6: </a:t>
+            </a:r>
+            <a:r>
+              <a:rPr lang="en-GB" sz="1600" dirty="0"/>
+              <a:t>3D scatter plot (constellation) of Speed vs Curvature vs Input (+1 = full throttle, -1 = full brake). Visualises data across top 60% laps of all* tracks in the F1 25 game. Coloured by the gear the car is in at each given speed/curvature level.  </a:t>
+            </a:r>
+            <a:r>
+              <a:rPr lang="en-GB" sz="1600" b="1" dirty="0"/>
+              <a:t>634,232 data points.</a:t>
+            </a:r>
+            <a:endParaRPr lang="en-GB" sz="1600" dirty="0"/>
+          </a:p>
+          <a:p>
+            <a:r>
+              <a:rPr lang="en-GB" sz="1600" b="1" dirty="0"/>
+              <a:t>This helps visualise the average speeds at which the car is able to upshift and downshift, especially during and after taking a corner.</a:t>
+            </a:r>
+          </a:p>
+          <a:p>
+            <a:endParaRPr lang="en-GB" sz="1600" dirty="0"/>
+          </a:p>
+          <a:p>
+            <a:r>
+              <a:rPr lang="en-GB" sz="1600" dirty="0"/>
+              <a:t>*Data from Monaco has been removed from this visual as it’s an outlier (slowest average speed track by a large margin).</a:t>
+            </a:r>
+          </a:p>
+        </p:txBody>
+      </p:sp>
+      <p:pic>
+        <p:nvPicPr>
+          <p:cNvPr id="23" name="Picture 22">
+            <a:extLst>
+              <a:ext uri="{FF2B5EF4-FFF2-40B4-BE49-F238E27FC236}">
+                <a16:creationId xmlns:a16="http://schemas.microsoft.com/office/drawing/2014/main" id="{A89F512C-2336-4139-69F9-FAC7CDD778FF}"/>
+              </a:ext>
+            </a:extLst>
+          </p:cNvPr>
+          <p:cNvPicPr>
+            <a:picLocks noChangeAspect="1"/>
+          </p:cNvPicPr>
+          <p:nvPr/>
+        </p:nvPicPr>
+        <p:blipFill>
+          <a:blip r:embed="rId8"/>
+          <a:stretch>
+            <a:fillRect/>
+          </a:stretch>
+        </p:blipFill>
+        <p:spPr>
+          <a:xfrm>
+            <a:off x="1014101" y="12477171"/>
+            <a:ext cx="5374776" cy="4620118"/>
+          </a:xfrm>
+          <a:prstGeom prst="rect">
+            <a:avLst/>
+          </a:prstGeom>
+        </p:spPr>
+      </p:pic>
     </p:spTree>
     <p:extLst>
       <p:ext uri="{BB962C8B-B14F-4D97-AF65-F5344CB8AC3E}">

--- a/Presentation1.pptx
+++ b/Presentation1.pptx
@@ -272,7 +272,7 @@
           <a:p>
             <a:fld id="{9BA507A8-AB1E-4362-AD52-AB8FDE0591EF}" type="datetimeFigureOut">
               <a:rPr lang="en-GB" smtClean="0"/>
-              <a:t>30/03/2026</a:t>
+              <a:t>31/03/2026</a:t>
             </a:fld>
             <a:endParaRPr lang="en-GB"/>
           </a:p>
@@ -472,7 +472,7 @@
           <a:p>
             <a:fld id="{9BA507A8-AB1E-4362-AD52-AB8FDE0591EF}" type="datetimeFigureOut">
               <a:rPr lang="en-GB" smtClean="0"/>
-              <a:t>30/03/2026</a:t>
+              <a:t>31/03/2026</a:t>
             </a:fld>
             <a:endParaRPr lang="en-GB"/>
           </a:p>
@@ -682,7 +682,7 @@
           <a:p>
             <a:fld id="{9BA507A8-AB1E-4362-AD52-AB8FDE0591EF}" type="datetimeFigureOut">
               <a:rPr lang="en-GB" smtClean="0"/>
-              <a:t>30/03/2026</a:t>
+              <a:t>31/03/2026</a:t>
             </a:fld>
             <a:endParaRPr lang="en-GB"/>
           </a:p>
@@ -882,7 +882,7 @@
           <a:p>
             <a:fld id="{9BA507A8-AB1E-4362-AD52-AB8FDE0591EF}" type="datetimeFigureOut">
               <a:rPr lang="en-GB" smtClean="0"/>
-              <a:t>30/03/2026</a:t>
+              <a:t>31/03/2026</a:t>
             </a:fld>
             <a:endParaRPr lang="en-GB"/>
           </a:p>
@@ -1158,7 +1158,7 @@
           <a:p>
             <a:fld id="{9BA507A8-AB1E-4362-AD52-AB8FDE0591EF}" type="datetimeFigureOut">
               <a:rPr lang="en-GB" smtClean="0"/>
-              <a:t>30/03/2026</a:t>
+              <a:t>31/03/2026</a:t>
             </a:fld>
             <a:endParaRPr lang="en-GB"/>
           </a:p>
@@ -1426,7 +1426,7 @@
           <a:p>
             <a:fld id="{9BA507A8-AB1E-4362-AD52-AB8FDE0591EF}" type="datetimeFigureOut">
               <a:rPr lang="en-GB" smtClean="0"/>
-              <a:t>30/03/2026</a:t>
+              <a:t>31/03/2026</a:t>
             </a:fld>
             <a:endParaRPr lang="en-GB"/>
           </a:p>
@@ -1841,7 +1841,7 @@
           <a:p>
             <a:fld id="{9BA507A8-AB1E-4362-AD52-AB8FDE0591EF}" type="datetimeFigureOut">
               <a:rPr lang="en-GB" smtClean="0"/>
-              <a:t>30/03/2026</a:t>
+              <a:t>31/03/2026</a:t>
             </a:fld>
             <a:endParaRPr lang="en-GB"/>
           </a:p>
@@ -1983,7 +1983,7 @@
           <a:p>
             <a:fld id="{9BA507A8-AB1E-4362-AD52-AB8FDE0591EF}" type="datetimeFigureOut">
               <a:rPr lang="en-GB" smtClean="0"/>
-              <a:t>30/03/2026</a:t>
+              <a:t>31/03/2026</a:t>
             </a:fld>
             <a:endParaRPr lang="en-GB"/>
           </a:p>
@@ -2096,7 +2096,7 @@
           <a:p>
             <a:fld id="{9BA507A8-AB1E-4362-AD52-AB8FDE0591EF}" type="datetimeFigureOut">
               <a:rPr lang="en-GB" smtClean="0"/>
-              <a:t>30/03/2026</a:t>
+              <a:t>31/03/2026</a:t>
             </a:fld>
             <a:endParaRPr lang="en-GB"/>
           </a:p>
@@ -2409,7 +2409,7 @@
           <a:p>
             <a:fld id="{9BA507A8-AB1E-4362-AD52-AB8FDE0591EF}" type="datetimeFigureOut">
               <a:rPr lang="en-GB" smtClean="0"/>
-              <a:t>30/03/2026</a:t>
+              <a:t>31/03/2026</a:t>
             </a:fld>
             <a:endParaRPr lang="en-GB"/>
           </a:p>
@@ -2698,7 +2698,7 @@
           <a:p>
             <a:fld id="{9BA507A8-AB1E-4362-AD52-AB8FDE0591EF}" type="datetimeFigureOut">
               <a:rPr lang="en-GB" smtClean="0"/>
-              <a:t>30/03/2026</a:t>
+              <a:t>31/03/2026</a:t>
             </a:fld>
             <a:endParaRPr lang="en-GB"/>
           </a:p>
@@ -2941,7 +2941,7 @@
           <a:p>
             <a:fld id="{9BA507A8-AB1E-4362-AD52-AB8FDE0591EF}" type="datetimeFigureOut">
               <a:rPr lang="en-GB" smtClean="0"/>
-              <a:t>30/03/2026</a:t>
+              <a:t>31/03/2026</a:t>
             </a:fld>
             <a:endParaRPr lang="en-GB"/>
           </a:p>
@@ -3368,6 +3368,201 @@
       </p:grpSpPr>
       <p:sp>
         <p:nvSpPr>
+          <p:cNvPr id="45" name="Rectangle: Rounded Corners 44">
+            <a:extLst>
+              <a:ext uri="{FF2B5EF4-FFF2-40B4-BE49-F238E27FC236}">
+                <a16:creationId xmlns:a16="http://schemas.microsoft.com/office/drawing/2014/main" id="{4763A920-50C0-2CA3-7F95-83106B143CB1}"/>
+              </a:ext>
+            </a:extLst>
+          </p:cNvPr>
+          <p:cNvSpPr/>
+          <p:nvPr/>
+        </p:nvSpPr>
+        <p:spPr>
+          <a:xfrm>
+            <a:off x="10980981" y="23936248"/>
+            <a:ext cx="9957091" cy="5824704"/>
+          </a:xfrm>
+          <a:prstGeom prst="roundRect">
+            <a:avLst/>
+          </a:prstGeom>
+          <a:solidFill>
+            <a:schemeClr val="bg1"/>
+          </a:solidFill>
+          <a:ln w="254000">
+            <a:solidFill>
+              <a:schemeClr val="tx2"/>
+            </a:solidFill>
+          </a:ln>
+        </p:spPr>
+        <p:style>
+          <a:lnRef idx="1">
+            <a:schemeClr val="accent4"/>
+          </a:lnRef>
+          <a:fillRef idx="2">
+            <a:schemeClr val="accent4"/>
+          </a:fillRef>
+          <a:effectRef idx="1">
+            <a:schemeClr val="accent4"/>
+          </a:effectRef>
+          <a:fontRef idx="minor">
+            <a:schemeClr val="dk1"/>
+          </a:fontRef>
+        </p:style>
+        <p:txBody>
+          <a:bodyPr numCol="2" rtlCol="0" anchor="ctr"/>
+          <a:lstStyle/>
+          <a:p>
+            <a:r>
+              <a:rPr lang="en-GB" sz="2400" b="1" dirty="0">
+                <a:latin typeface="Calibri" panose="020F0502020204030204" pitchFamily="34" charset="0"/>
+                <a:ea typeface="Calibri" panose="020F0502020204030204" pitchFamily="34" charset="0"/>
+                <a:cs typeface="Calibri" panose="020F0502020204030204" pitchFamily="34" charset="0"/>
+              </a:rPr>
+              <a:t>Discussion &amp; Future Work:</a:t>
+            </a:r>
+            <a:br>
+              <a:rPr lang="en-GB" sz="2400" b="1" dirty="0">
+                <a:latin typeface="Calibri" panose="020F0502020204030204" pitchFamily="34" charset="0"/>
+                <a:ea typeface="Calibri" panose="020F0502020204030204" pitchFamily="34" charset="0"/>
+                <a:cs typeface="Calibri" panose="020F0502020204030204" pitchFamily="34" charset="0"/>
+              </a:rPr>
+            </a:br>
+            <a:r>
+              <a:rPr lang="en-GB" sz="1600" dirty="0">
+                <a:latin typeface="Calibri" panose="020F0502020204030204" pitchFamily="34" charset="0"/>
+                <a:ea typeface="Calibri" panose="020F0502020204030204" pitchFamily="34" charset="0"/>
+                <a:cs typeface="Calibri" panose="020F0502020204030204" pitchFamily="34" charset="0"/>
+              </a:rPr>
+              <a:t>Overall, this project successfully developed a system where detailed feedback and visualisations are generated to assist with a driver improving their lap times with a focus on cornering entry and exits.</a:t>
+            </a:r>
+          </a:p>
+          <a:p>
+            <a:r>
+              <a:rPr lang="en-GB" sz="1600" dirty="0">
+                <a:latin typeface="Calibri" panose="020F0502020204030204" pitchFamily="34" charset="0"/>
+                <a:ea typeface="Calibri" panose="020F0502020204030204" pitchFamily="34" charset="0"/>
+                <a:cs typeface="Calibri" panose="020F0502020204030204" pitchFamily="34" charset="0"/>
+              </a:rPr>
+              <a:t>The game model has the capacity to work with other sim-racing titles, such as Assetto Corsa or iRacing, with very little changes needed – the main adaptation </a:t>
+            </a:r>
+          </a:p>
+          <a:p>
+            <a:r>
+              <a:rPr lang="en-GB" sz="1600" dirty="0">
+                <a:latin typeface="Calibri" panose="020F0502020204030204" pitchFamily="34" charset="0"/>
+                <a:ea typeface="Calibri" panose="020F0502020204030204" pitchFamily="34" charset="0"/>
+                <a:cs typeface="Calibri" panose="020F0502020204030204" pitchFamily="34" charset="0"/>
+              </a:rPr>
+              <a:t>would be to create a different listener file, catering to the specific requirements of the game with different UDP packets. </a:t>
+            </a:r>
+          </a:p>
+          <a:p>
+            <a:endParaRPr lang="en-GB" sz="1600" dirty="0">
+              <a:latin typeface="Calibri" panose="020F0502020204030204" pitchFamily="34" charset="0"/>
+              <a:ea typeface="Calibri" panose="020F0502020204030204" pitchFamily="34" charset="0"/>
+              <a:cs typeface="Calibri" panose="020F0502020204030204" pitchFamily="34" charset="0"/>
+            </a:endParaRPr>
+          </a:p>
+          <a:p>
+            <a:r>
+              <a:rPr lang="en-GB" sz="1600" dirty="0">
+                <a:latin typeface="Calibri" panose="020F0502020204030204" pitchFamily="34" charset="0"/>
+                <a:ea typeface="Calibri" panose="020F0502020204030204" pitchFamily="34" charset="0"/>
+                <a:cs typeface="Calibri" panose="020F0502020204030204" pitchFamily="34" charset="0"/>
+              </a:rPr>
+              <a:t>While the historical model does work for generating advice for an existing lap by comparing all other laps for that track, there remain many inconsistencies and inaccuracies across the model. This could be improved with more accurate data, but this isn’t currently possible with what the FIA and Formula One make public.</a:t>
+            </a:r>
+          </a:p>
+          <a:p>
+            <a:endParaRPr lang="en-GB" sz="1600" dirty="0">
+              <a:latin typeface="Calibri" panose="020F0502020204030204" pitchFamily="34" charset="0"/>
+              <a:ea typeface="Calibri" panose="020F0502020204030204" pitchFamily="34" charset="0"/>
+              <a:cs typeface="Calibri" panose="020F0502020204030204" pitchFamily="34" charset="0"/>
+            </a:endParaRPr>
+          </a:p>
+          <a:p>
+            <a:r>
+              <a:rPr lang="en-GB" sz="1600" b="1" dirty="0">
+                <a:latin typeface="Calibri" panose="020F0502020204030204" pitchFamily="34" charset="0"/>
+                <a:ea typeface="Calibri" panose="020F0502020204030204" pitchFamily="34" charset="0"/>
+                <a:cs typeface="Calibri" panose="020F0502020204030204" pitchFamily="34" charset="0"/>
+              </a:rPr>
+              <a:t>Future work should aim on the following: </a:t>
+            </a:r>
+          </a:p>
+          <a:p>
+            <a:r>
+              <a:rPr lang="en-GB" sz="1600" dirty="0">
+                <a:latin typeface="Calibri" panose="020F0502020204030204" pitchFamily="34" charset="0"/>
+                <a:ea typeface="Calibri" panose="020F0502020204030204" pitchFamily="34" charset="0"/>
+                <a:cs typeface="Calibri" panose="020F0502020204030204" pitchFamily="34" charset="0"/>
+              </a:rPr>
+              <a:t>- Further enhancing the model for each of the games that it supports.</a:t>
+            </a:r>
+          </a:p>
+          <a:p>
+            <a:r>
+              <a:rPr lang="en-GB" sz="1600" dirty="0">
+                <a:latin typeface="Calibri" panose="020F0502020204030204" pitchFamily="34" charset="0"/>
+                <a:ea typeface="Calibri" panose="020F0502020204030204" pitchFamily="34" charset="0"/>
+                <a:cs typeface="Calibri" panose="020F0502020204030204" pitchFamily="34" charset="0"/>
+              </a:rPr>
+              <a:t>- Real-time feedback via Text To Speech (TTS).</a:t>
+            </a:r>
+            <a:br>
+              <a:rPr lang="en-GB" sz="1600" dirty="0">
+                <a:latin typeface="Calibri" panose="020F0502020204030204" pitchFamily="34" charset="0"/>
+                <a:ea typeface="Calibri" panose="020F0502020204030204" pitchFamily="34" charset="0"/>
+                <a:cs typeface="Calibri" panose="020F0502020204030204" pitchFamily="34" charset="0"/>
+              </a:rPr>
+            </a:br>
+            <a:r>
+              <a:rPr lang="en-GB" sz="1600" dirty="0">
+                <a:latin typeface="Calibri" panose="020F0502020204030204" pitchFamily="34" charset="0"/>
+                <a:ea typeface="Calibri" panose="020F0502020204030204" pitchFamily="34" charset="0"/>
+                <a:cs typeface="Calibri" panose="020F0502020204030204" pitchFamily="34" charset="0"/>
+              </a:rPr>
+              <a:t>- Alternative modelling experimentation (such as Sequence Modelling).</a:t>
+            </a:r>
+            <a:br>
+              <a:rPr lang="en-GB" sz="1600" dirty="0">
+                <a:latin typeface="Calibri" panose="020F0502020204030204" pitchFamily="34" charset="0"/>
+                <a:ea typeface="Calibri" panose="020F0502020204030204" pitchFamily="34" charset="0"/>
+                <a:cs typeface="Calibri" panose="020F0502020204030204" pitchFamily="34" charset="0"/>
+              </a:rPr>
+            </a:br>
+            <a:r>
+              <a:rPr lang="en-GB" sz="1600" dirty="0">
+                <a:latin typeface="Calibri" panose="020F0502020204030204" pitchFamily="34" charset="0"/>
+                <a:ea typeface="Calibri" panose="020F0502020204030204" pitchFamily="34" charset="0"/>
+                <a:cs typeface="Calibri" panose="020F0502020204030204" pitchFamily="34" charset="0"/>
+              </a:rPr>
+              <a:t>- Suggested track improvement goals may be unattainable to newer players; incorporate AI lap difficulty into the model so users learn from laps closer to their skill level.</a:t>
+            </a:r>
+          </a:p>
+          <a:p>
+            <a:endParaRPr lang="en-GB" sz="1600" dirty="0">
+              <a:latin typeface="Calibri" panose="020F0502020204030204" pitchFamily="34" charset="0"/>
+              <a:ea typeface="Calibri" panose="020F0502020204030204" pitchFamily="34" charset="0"/>
+              <a:cs typeface="Calibri" panose="020F0502020204030204" pitchFamily="34" charset="0"/>
+            </a:endParaRPr>
+          </a:p>
+          <a:p>
+            <a:pPr algn="ctr"/>
+            <a:r>
+              <a:rPr lang="en-GB" sz="1600" dirty="0">
+                <a:latin typeface="Calibri" panose="020F0502020204030204" pitchFamily="34" charset="0"/>
+                <a:ea typeface="Calibri" panose="020F0502020204030204" pitchFamily="34" charset="0"/>
+                <a:cs typeface="Calibri" panose="020F0502020204030204" pitchFamily="34" charset="0"/>
+              </a:rPr>
+              <a:t>To view all code and files related to this project, please scan the QR Code below!</a:t>
+            </a:r>
+          </a:p>
+        </p:txBody>
+      </p:sp>
+      <p:sp>
+        <p:nvSpPr>
           <p:cNvPr id="48" name="Rectangle: Rounded Corners 47">
             <a:extLst>
               <a:ext uri="{FF2B5EF4-FFF2-40B4-BE49-F238E27FC236}">
@@ -3419,7 +3614,7 @@
                 <a:ea typeface="Calibri" panose="020F0502020204030204" pitchFamily="34" charset="0"/>
                 <a:cs typeface="Calibri" panose="020F0502020204030204" pitchFamily="34" charset="0"/>
               </a:rPr>
-              <a:t>Data Points Visualised – F1 25 Circuits:</a:t>
+              <a:t>Data Points Visualised – F1 25 Circuits*:</a:t>
             </a:r>
           </a:p>
           <a:p>
@@ -3552,10 +3747,134 @@
           </a:fontRef>
         </p:style>
         <p:txBody>
-          <a:bodyPr rtlCol="0" anchor="ctr"/>
+          <a:bodyPr numCol="2" rtlCol="0" anchor="ctr"/>
           <a:lstStyle/>
           <a:p>
-            <a:endParaRPr lang="en-GB" sz="1600" b="1" dirty="0">
+            <a:r>
+              <a:rPr lang="en-GB" sz="2400" b="1" dirty="0">
+                <a:latin typeface="Calibri" panose="020F0502020204030204" pitchFamily="34" charset="0"/>
+                <a:ea typeface="Calibri" panose="020F0502020204030204" pitchFamily="34" charset="0"/>
+                <a:cs typeface="Calibri" panose="020F0502020204030204" pitchFamily="34" charset="0"/>
+              </a:rPr>
+              <a:t>In-Game Testing:</a:t>
+            </a:r>
+          </a:p>
+          <a:p>
+            <a:r>
+              <a:rPr lang="en-GB" sz="1600" dirty="0">
+                <a:latin typeface="Calibri" panose="020F0502020204030204" pitchFamily="34" charset="0"/>
+                <a:ea typeface="Calibri" panose="020F0502020204030204" pitchFamily="34" charset="0"/>
+                <a:cs typeface="Calibri" panose="020F0502020204030204" pitchFamily="34" charset="0"/>
+              </a:rPr>
+              <a:t>Using the detailed ground truth and advice feedback, a user can visualise in detail where on the track they should be applying the brakes, how long they should apply them for, and when they should get back on the throttle for every key braking zone on a track.</a:t>
+            </a:r>
+          </a:p>
+          <a:p>
+            <a:r>
+              <a:rPr lang="en-GB" sz="1600" dirty="0">
+                <a:latin typeface="Calibri" panose="020F0502020204030204" pitchFamily="34" charset="0"/>
+                <a:ea typeface="Calibri" panose="020F0502020204030204" pitchFamily="34" charset="0"/>
+                <a:cs typeface="Calibri" panose="020F0502020204030204" pitchFamily="34" charset="0"/>
+              </a:rPr>
+              <a:t>In each session, every lap is saved to a .csv file which can be read as a Pandas DataFrame, allowing the user to generate these visuals for any of the laps they’ve driven at any time, as well as retrieve comparisons between laps to see where time is lost or gained throughout.</a:t>
+            </a:r>
+          </a:p>
+          <a:p>
+            <a:r>
+              <a:rPr lang="en-GB" sz="1600" dirty="0">
+                <a:latin typeface="Calibri" panose="020F0502020204030204" pitchFamily="34" charset="0"/>
+                <a:ea typeface="Calibri" panose="020F0502020204030204" pitchFamily="34" charset="0"/>
+                <a:cs typeface="Calibri" panose="020F0502020204030204" pitchFamily="34" charset="0"/>
+              </a:rPr>
+              <a:t>While driving, if the user has already driven a lap that session, the overlay on-screen will assist them with reaching time improvements at set increments by letting them know their speed against their target speed, as well as alerting the user at each braking zone. A sound is played to the user to do this more easily, factoring in human reaction times to allow for training the braking zones at a high accuracy.</a:t>
+            </a:r>
+          </a:p>
+          <a:p>
+            <a:endParaRPr lang="en-GB" sz="1600" dirty="0">
+              <a:latin typeface="Calibri" panose="020F0502020204030204" pitchFamily="34" charset="0"/>
+              <a:ea typeface="Calibri" panose="020F0502020204030204" pitchFamily="34" charset="0"/>
+              <a:cs typeface="Calibri" panose="020F0502020204030204" pitchFamily="34" charset="0"/>
+            </a:endParaRPr>
+          </a:p>
+          <a:p>
+            <a:endParaRPr lang="en-GB" sz="1600" dirty="0">
+              <a:latin typeface="Calibri" panose="020F0502020204030204" pitchFamily="34" charset="0"/>
+              <a:ea typeface="Calibri" panose="020F0502020204030204" pitchFamily="34" charset="0"/>
+              <a:cs typeface="Calibri" panose="020F0502020204030204" pitchFamily="34" charset="0"/>
+            </a:endParaRPr>
+          </a:p>
+          <a:p>
+            <a:endParaRPr lang="en-GB" sz="1600" dirty="0">
+              <a:latin typeface="Calibri" panose="020F0502020204030204" pitchFamily="34" charset="0"/>
+              <a:ea typeface="Calibri" panose="020F0502020204030204" pitchFamily="34" charset="0"/>
+              <a:cs typeface="Calibri" panose="020F0502020204030204" pitchFamily="34" charset="0"/>
+            </a:endParaRPr>
+          </a:p>
+          <a:p>
+            <a:endParaRPr lang="en-GB" sz="2400" b="1" dirty="0">
+              <a:latin typeface="Calibri" panose="020F0502020204030204" pitchFamily="34" charset="0"/>
+              <a:ea typeface="Calibri" panose="020F0502020204030204" pitchFamily="34" charset="0"/>
+              <a:cs typeface="Calibri" panose="020F0502020204030204" pitchFamily="34" charset="0"/>
+            </a:endParaRPr>
+          </a:p>
+          <a:p>
+            <a:endParaRPr lang="en-GB" sz="2400" b="1" dirty="0">
+              <a:latin typeface="Calibri" panose="020F0502020204030204" pitchFamily="34" charset="0"/>
+              <a:ea typeface="Calibri" panose="020F0502020204030204" pitchFamily="34" charset="0"/>
+              <a:cs typeface="Calibri" panose="020F0502020204030204" pitchFamily="34" charset="0"/>
+            </a:endParaRPr>
+          </a:p>
+          <a:p>
+            <a:endParaRPr lang="en-GB" sz="2400" b="1" dirty="0">
+              <a:latin typeface="Calibri" panose="020F0502020204030204" pitchFamily="34" charset="0"/>
+              <a:ea typeface="Calibri" panose="020F0502020204030204" pitchFamily="34" charset="0"/>
+              <a:cs typeface="Calibri" panose="020F0502020204030204" pitchFamily="34" charset="0"/>
+            </a:endParaRPr>
+          </a:p>
+          <a:p>
+            <a:endParaRPr lang="en-GB" sz="2400" b="1" dirty="0">
+              <a:latin typeface="Calibri" panose="020F0502020204030204" pitchFamily="34" charset="0"/>
+              <a:ea typeface="Calibri" panose="020F0502020204030204" pitchFamily="34" charset="0"/>
+              <a:cs typeface="Calibri" panose="020F0502020204030204" pitchFamily="34" charset="0"/>
+            </a:endParaRPr>
+          </a:p>
+          <a:p>
+            <a:endParaRPr lang="en-GB" sz="2400" b="1" dirty="0">
+              <a:latin typeface="Calibri" panose="020F0502020204030204" pitchFamily="34" charset="0"/>
+              <a:ea typeface="Calibri" panose="020F0502020204030204" pitchFamily="34" charset="0"/>
+              <a:cs typeface="Calibri" panose="020F0502020204030204" pitchFamily="34" charset="0"/>
+            </a:endParaRPr>
+          </a:p>
+          <a:p>
+            <a:endParaRPr lang="en-GB" sz="2400" b="1" dirty="0">
+              <a:latin typeface="Calibri" panose="020F0502020204030204" pitchFamily="34" charset="0"/>
+              <a:ea typeface="Calibri" panose="020F0502020204030204" pitchFamily="34" charset="0"/>
+              <a:cs typeface="Calibri" panose="020F0502020204030204" pitchFamily="34" charset="0"/>
+            </a:endParaRPr>
+          </a:p>
+          <a:p>
+            <a:endParaRPr lang="en-GB" sz="2400" b="1" dirty="0">
+              <a:latin typeface="Calibri" panose="020F0502020204030204" pitchFamily="34" charset="0"/>
+              <a:ea typeface="Calibri" panose="020F0502020204030204" pitchFamily="34" charset="0"/>
+              <a:cs typeface="Calibri" panose="020F0502020204030204" pitchFamily="34" charset="0"/>
+            </a:endParaRPr>
+          </a:p>
+          <a:p>
+            <a:endParaRPr lang="en-GB" sz="2400" b="1" dirty="0">
+              <a:latin typeface="Calibri" panose="020F0502020204030204" pitchFamily="34" charset="0"/>
+              <a:ea typeface="Calibri" panose="020F0502020204030204" pitchFamily="34" charset="0"/>
+              <a:cs typeface="Calibri" panose="020F0502020204030204" pitchFamily="34" charset="0"/>
+            </a:endParaRPr>
+          </a:p>
+          <a:p>
+            <a:endParaRPr lang="en-GB" sz="2400" b="1" dirty="0">
+              <a:latin typeface="Calibri" panose="020F0502020204030204" pitchFamily="34" charset="0"/>
+              <a:ea typeface="Calibri" panose="020F0502020204030204" pitchFamily="34" charset="0"/>
+              <a:cs typeface="Calibri" panose="020F0502020204030204" pitchFamily="34" charset="0"/>
+            </a:endParaRPr>
+          </a:p>
+          <a:p>
+            <a:endParaRPr lang="en-GB" sz="2400" b="1" dirty="0">
               <a:latin typeface="Calibri" panose="020F0502020204030204" pitchFamily="34" charset="0"/>
               <a:ea typeface="Calibri" panose="020F0502020204030204" pitchFamily="34" charset="0"/>
               <a:cs typeface="Calibri" panose="020F0502020204030204" pitchFamily="34" charset="0"/>
@@ -3607,16 +3926,63 @@
           </a:fontRef>
         </p:style>
         <p:txBody>
-          <a:bodyPr rtlCol="0" anchor="ctr"/>
+          <a:bodyPr numCol="2" rtlCol="0" anchor="ctr"/>
           <a:lstStyle/>
           <a:p>
+            <a:endParaRPr lang="en-GB" sz="2400" b="1" dirty="0">
+              <a:latin typeface="Calibri" panose="020F0502020204030204" pitchFamily="34" charset="0"/>
+              <a:ea typeface="Calibri" panose="020F0502020204030204" pitchFamily="34" charset="0"/>
+              <a:cs typeface="Calibri" panose="020F0502020204030204" pitchFamily="34" charset="0"/>
+            </a:endParaRPr>
+          </a:p>
+          <a:p>
             <a:r>
               <a:rPr lang="en-GB" sz="2400" b="1" dirty="0">
                 <a:latin typeface="Calibri" panose="020F0502020204030204" pitchFamily="34" charset="0"/>
                 <a:ea typeface="Calibri" panose="020F0502020204030204" pitchFamily="34" charset="0"/>
                 <a:cs typeface="Calibri" panose="020F0502020204030204" pitchFamily="34" charset="0"/>
               </a:rPr>
-              <a:t>Visualised F1 25 Game Feedback:</a:t>
+              <a:t>Feedback Generation:</a:t>
+            </a:r>
+          </a:p>
+          <a:p>
+            <a:r>
+              <a:rPr lang="en-GB" sz="1600" dirty="0">
+                <a:latin typeface="Calibri" panose="020F0502020204030204" pitchFamily="34" charset="0"/>
+                <a:ea typeface="Calibri" panose="020F0502020204030204" pitchFamily="34" charset="0"/>
+                <a:cs typeface="Calibri" panose="020F0502020204030204" pitchFamily="34" charset="0"/>
+              </a:rPr>
+              <a:t>Using the ground truth generated for each track in the datasets, I was able to generate advice for the user to make improvements on their next lap by gauging the braking zones from the lap they’ve driven.</a:t>
+            </a:r>
+          </a:p>
+          <a:p>
+            <a:r>
+              <a:rPr lang="en-GB" sz="1600" dirty="0">
+                <a:latin typeface="Calibri" panose="020F0502020204030204" pitchFamily="34" charset="0"/>
+                <a:ea typeface="Calibri" panose="020F0502020204030204" pitchFamily="34" charset="0"/>
+                <a:cs typeface="Calibri" panose="020F0502020204030204" pitchFamily="34" charset="0"/>
+              </a:rPr>
+              <a:t>Each braking zone is ranked in order of most time lost in that section of the track (beginning of current zone – beginning of next zone), allowing the user to focus on their biggest mistakes first.</a:t>
+            </a:r>
+          </a:p>
+          <a:p>
+            <a:r>
+              <a:rPr lang="en-GB" sz="1600" dirty="0">
+                <a:latin typeface="Calibri" panose="020F0502020204030204" pitchFamily="34" charset="0"/>
+                <a:ea typeface="Calibri" panose="020F0502020204030204" pitchFamily="34" charset="0"/>
+                <a:cs typeface="Calibri" panose="020F0502020204030204" pitchFamily="34" charset="0"/>
+              </a:rPr>
+              <a:t>Braking distance suggestions are modified based on the entry speed and the ground truth expected entry speed; if the user is slower than the ground truth in the entry to the corner, they can get away with braking slightly later than the expected braking mark.</a:t>
+            </a:r>
+          </a:p>
+          <a:p>
+            <a:r>
+              <a:rPr lang="en-GB" sz="1600" dirty="0">
+                <a:latin typeface="Calibri" panose="020F0502020204030204" pitchFamily="34" charset="0"/>
+                <a:ea typeface="Calibri" panose="020F0502020204030204" pitchFamily="34" charset="0"/>
+                <a:cs typeface="Calibri" panose="020F0502020204030204" pitchFamily="34" charset="0"/>
+              </a:rPr>
+              <a:t>These comparisons can be viewed by the user after their lap has concluded, or a simplified version is visible during the next lap via the on-screen overlay.</a:t>
             </a:r>
           </a:p>
           <a:p>
@@ -4001,8 +4367,8 @@
         </p:blipFill>
         <p:spPr>
           <a:xfrm>
-            <a:off x="1014101" y="27118639"/>
-            <a:ext cx="2126922" cy="2126922"/>
+            <a:off x="17480698" y="27761572"/>
+            <a:ext cx="1557449" cy="1557449"/>
           </a:xfrm>
           <a:prstGeom prst="rect">
             <a:avLst/>
@@ -4151,13 +4517,20 @@
           <a:bodyPr numCol="2" rtlCol="0" anchor="ctr"/>
           <a:lstStyle/>
           <a:p>
+            <a:endParaRPr lang="en-GB" sz="2400" b="1" dirty="0">
+              <a:latin typeface="Calibri" panose="020F0502020204030204" pitchFamily="34" charset="0"/>
+              <a:ea typeface="Calibri" panose="020F0502020204030204" pitchFamily="34" charset="0"/>
+              <a:cs typeface="Calibri" panose="020F0502020204030204" pitchFamily="34" charset="0"/>
+            </a:endParaRPr>
+          </a:p>
+          <a:p>
             <a:r>
               <a:rPr lang="en-GB" sz="2400" b="1" dirty="0">
                 <a:latin typeface="Calibri" panose="020F0502020204030204" pitchFamily="34" charset="0"/>
                 <a:ea typeface="Calibri" panose="020F0502020204030204" pitchFamily="34" charset="0"/>
                 <a:cs typeface="Calibri" panose="020F0502020204030204" pitchFamily="34" charset="0"/>
               </a:rPr>
-              <a:t>Model &amp; Advice/Feedback Results:</a:t>
+              <a:t> Model Results:</a:t>
             </a:r>
             <a:br>
               <a:rPr lang="en-GB" sz="2400" b="1" dirty="0">
@@ -4167,6 +4540,14 @@
               </a:rPr>
             </a:br>
             <a:r>
+              <a:rPr lang="en-GB" sz="2400" b="1" dirty="0">
+                <a:latin typeface="Calibri" panose="020F0502020204030204" pitchFamily="34" charset="0"/>
+                <a:ea typeface="Calibri" panose="020F0502020204030204" pitchFamily="34" charset="0"/>
+                <a:cs typeface="Calibri" panose="020F0502020204030204" pitchFamily="34" charset="0"/>
+              </a:rPr>
+              <a:t> </a:t>
+            </a:r>
+            <a:r>
               <a:rPr lang="en-GB" sz="1600" b="1" dirty="0">
                 <a:latin typeface="Calibri" panose="020F0502020204030204" pitchFamily="34" charset="0"/>
                 <a:ea typeface="Calibri" panose="020F0502020204030204" pitchFamily="34" charset="0"/>
@@ -4182,6 +4563,14 @@
               </a:rPr>
             </a:br>
             <a:r>
+              <a:rPr lang="en-GB" sz="1600" b="1" dirty="0">
+                <a:latin typeface="Calibri" panose="020F0502020204030204" pitchFamily="34" charset="0"/>
+                <a:ea typeface="Calibri" panose="020F0502020204030204" pitchFamily="34" charset="0"/>
+                <a:cs typeface="Calibri" panose="020F0502020204030204" pitchFamily="34" charset="0"/>
+              </a:rPr>
+              <a:t> </a:t>
+            </a:r>
+            <a:r>
               <a:rPr lang="en-GB" sz="1600" dirty="0">
                 <a:latin typeface="Calibri" panose="020F0502020204030204" pitchFamily="34" charset="0"/>
                 <a:ea typeface="Calibri" panose="020F0502020204030204" pitchFamily="34" charset="0"/>
@@ -4210,7 +4599,7 @@
                 <a:ea typeface="Calibri" panose="020F0502020204030204" pitchFamily="34" charset="0"/>
                 <a:cs typeface="Calibri" panose="020F0502020204030204" pitchFamily="34" charset="0"/>
               </a:rPr>
-              <a:t>- Average throttle accuracy: </a:t>
+              <a:t> - Average throttle accuracy: </a:t>
             </a:r>
             <a:r>
               <a:rPr lang="en-GB" sz="1600" b="1" dirty="0">
@@ -4233,7 +4622,7 @@
                 <a:ea typeface="Calibri" panose="020F0502020204030204" pitchFamily="34" charset="0"/>
                 <a:cs typeface="Calibri" panose="020F0502020204030204" pitchFamily="34" charset="0"/>
               </a:rPr>
-              <a:t>- Lowest accuracy: </a:t>
+              <a:t> - Lowest accuracy: </a:t>
             </a:r>
             <a:r>
               <a:rPr lang="en-GB" sz="1600" b="1" dirty="0">
@@ -4257,7 +4646,17 @@
                 <a:ea typeface="Calibri" panose="020F0502020204030204" pitchFamily="34" charset="0"/>
                 <a:cs typeface="Calibri" panose="020F0502020204030204" pitchFamily="34" charset="0"/>
               </a:rPr>
-              <a:t>- 0.9761 / Abu Dhabi – 0.9753</a:t>
+              <a:t>- 0.9761 / </a:t>
+            </a:r>
+          </a:p>
+          <a:p>
+            <a:r>
+              <a:rPr lang="en-GB" sz="1600" b="1" dirty="0">
+                <a:latin typeface="Calibri" panose="020F0502020204030204" pitchFamily="34" charset="0"/>
+                <a:ea typeface="Calibri" panose="020F0502020204030204" pitchFamily="34" charset="0"/>
+                <a:cs typeface="Calibri" panose="020F0502020204030204" pitchFamily="34" charset="0"/>
+              </a:rPr>
+              <a:t>                                  Abu Dhabi – 0.9753</a:t>
             </a:r>
             <a:br>
               <a:rPr lang="en-GB" sz="1600" dirty="0">
@@ -4279,7 +4678,7 @@
                 <a:ea typeface="Calibri" panose="020F0502020204030204" pitchFamily="34" charset="0"/>
                 <a:cs typeface="Calibri" panose="020F0502020204030204" pitchFamily="34" charset="0"/>
               </a:rPr>
-              <a:t>Historical Model:</a:t>
+              <a:t> Historical Model:</a:t>
             </a:r>
             <a:br>
               <a:rPr lang="en-GB" sz="1600" b="1" dirty="0">
@@ -4289,6 +4688,14 @@
               </a:rPr>
             </a:br>
             <a:r>
+              <a:rPr lang="en-GB" sz="1600" b="1" dirty="0">
+                <a:latin typeface="Calibri" panose="020F0502020204030204" pitchFamily="34" charset="0"/>
+                <a:ea typeface="Calibri" panose="020F0502020204030204" pitchFamily="34" charset="0"/>
+                <a:cs typeface="Calibri" panose="020F0502020204030204" pitchFamily="34" charset="0"/>
+              </a:rPr>
+              <a:t> </a:t>
+            </a:r>
+            <a:r>
               <a:rPr lang="en-GB" sz="1600" dirty="0">
                 <a:latin typeface="Calibri" panose="020F0502020204030204" pitchFamily="34" charset="0"/>
                 <a:ea typeface="Calibri" panose="020F0502020204030204" pitchFamily="34" charset="0"/>
@@ -4317,7 +4724,7 @@
                 <a:ea typeface="Calibri" panose="020F0502020204030204" pitchFamily="34" charset="0"/>
                 <a:cs typeface="Calibri" panose="020F0502020204030204" pitchFamily="34" charset="0"/>
               </a:rPr>
-              <a:t>- Average throttle accuracy: </a:t>
+              <a:t> - Average throttle accuracy: </a:t>
             </a:r>
             <a:r>
               <a:rPr lang="en-GB" sz="1600" b="1" dirty="0">
@@ -4340,7 +4747,7 @@
                 <a:ea typeface="Calibri" panose="020F0502020204030204" pitchFamily="34" charset="0"/>
                 <a:cs typeface="Calibri" panose="020F0502020204030204" pitchFamily="34" charset="0"/>
               </a:rPr>
-              <a:t>- Lowest accuracy: </a:t>
+              <a:t> - Lowest accuracy: </a:t>
             </a:r>
             <a:r>
               <a:rPr lang="en-GB" sz="1600" b="1" dirty="0">
@@ -4370,7 +4777,7 @@
                 <a:ea typeface="Calibri" panose="020F0502020204030204" pitchFamily="34" charset="0"/>
                 <a:cs typeface="Calibri" panose="020F0502020204030204" pitchFamily="34" charset="0"/>
               </a:rPr>
-              <a:t>Speed Model:</a:t>
+              <a:t> Speed Model:</a:t>
             </a:r>
             <a:br>
               <a:rPr lang="en-GB" sz="1600" b="1" dirty="0">
@@ -4379,6 +4786,14 @@
                 <a:cs typeface="Calibri" panose="020F0502020204030204" pitchFamily="34" charset="0"/>
               </a:rPr>
             </a:br>
+            <a:r>
+              <a:rPr lang="en-GB" sz="1600" b="1" dirty="0">
+                <a:latin typeface="Calibri" panose="020F0502020204030204" pitchFamily="34" charset="0"/>
+                <a:ea typeface="Calibri" panose="020F0502020204030204" pitchFamily="34" charset="0"/>
+                <a:cs typeface="Calibri" panose="020F0502020204030204" pitchFamily="34" charset="0"/>
+              </a:rPr>
+              <a:t> </a:t>
+            </a:r>
             <a:r>
               <a:rPr lang="en-GB" sz="1600" dirty="0">
                 <a:latin typeface="Calibri" panose="020F0502020204030204" pitchFamily="34" charset="0"/>
@@ -4408,7 +4823,7 @@
                 <a:ea typeface="Calibri" panose="020F0502020204030204" pitchFamily="34" charset="0"/>
                 <a:cs typeface="Calibri" panose="020F0502020204030204" pitchFamily="34" charset="0"/>
               </a:rPr>
-              <a:t>- Average R</a:t>
+              <a:t> - Average R</a:t>
             </a:r>
             <a:r>
               <a:rPr lang="en-GB" sz="1600" baseline="30000" dirty="0">
@@ -4447,7 +4862,7 @@
                 <a:ea typeface="Calibri" panose="020F0502020204030204" pitchFamily="34" charset="0"/>
                 <a:cs typeface="Calibri" panose="020F0502020204030204" pitchFamily="34" charset="0"/>
               </a:rPr>
-              <a:t>- Lowest accuracy: </a:t>
+              <a:t> - Lowest accuracy: </a:t>
             </a:r>
             <a:r>
               <a:rPr lang="en-GB" sz="1600" b="1" dirty="0">
@@ -4455,7 +4870,17 @@
                 <a:ea typeface="Calibri" panose="020F0502020204030204" pitchFamily="34" charset="0"/>
                 <a:cs typeface="Calibri" panose="020F0502020204030204" pitchFamily="34" charset="0"/>
               </a:rPr>
-              <a:t>Miami – 1.3621 / Jeddah – 0.9964</a:t>
+              <a:t>Miami – 1.3621 / </a:t>
+            </a:r>
+          </a:p>
+          <a:p>
+            <a:r>
+              <a:rPr lang="en-GB" sz="1600" b="1" dirty="0">
+                <a:latin typeface="Calibri" panose="020F0502020204030204" pitchFamily="34" charset="0"/>
+                <a:ea typeface="Calibri" panose="020F0502020204030204" pitchFamily="34" charset="0"/>
+                <a:cs typeface="Calibri" panose="020F0502020204030204" pitchFamily="34" charset="0"/>
+              </a:rPr>
+              <a:t>                                  Jeddah – 0.9964</a:t>
             </a:r>
           </a:p>
           <a:p>
@@ -4478,121 +4903,6 @@
               <a:ea typeface="Calibri" panose="020F0502020204030204" pitchFamily="34" charset="0"/>
               <a:cs typeface="Calibri" panose="020F0502020204030204" pitchFamily="34" charset="0"/>
             </a:endParaRPr>
-          </a:p>
-          <a:p>
-            <a:endParaRPr lang="en-GB" sz="1600" b="1" dirty="0">
-              <a:latin typeface="Calibri" panose="020F0502020204030204" pitchFamily="34" charset="0"/>
-              <a:ea typeface="Calibri" panose="020F0502020204030204" pitchFamily="34" charset="0"/>
-              <a:cs typeface="Calibri" panose="020F0502020204030204" pitchFamily="34" charset="0"/>
-            </a:endParaRPr>
-          </a:p>
-          <a:p>
-            <a:endParaRPr lang="en-GB" sz="1600" b="1" dirty="0">
-              <a:latin typeface="Calibri" panose="020F0502020204030204" pitchFamily="34" charset="0"/>
-              <a:ea typeface="Calibri" panose="020F0502020204030204" pitchFamily="34" charset="0"/>
-              <a:cs typeface="Calibri" panose="020F0502020204030204" pitchFamily="34" charset="0"/>
-            </a:endParaRPr>
-          </a:p>
-          <a:p>
-            <a:endParaRPr lang="en-GB" sz="1600" b="1" dirty="0">
-              <a:latin typeface="Calibri" panose="020F0502020204030204" pitchFamily="34" charset="0"/>
-              <a:ea typeface="Calibri" panose="020F0502020204030204" pitchFamily="34" charset="0"/>
-              <a:cs typeface="Calibri" panose="020F0502020204030204" pitchFamily="34" charset="0"/>
-            </a:endParaRPr>
-          </a:p>
-          <a:p>
-            <a:endParaRPr lang="en-GB" sz="1600" b="1" dirty="0">
-              <a:latin typeface="Calibri" panose="020F0502020204030204" pitchFamily="34" charset="0"/>
-              <a:ea typeface="Calibri" panose="020F0502020204030204" pitchFamily="34" charset="0"/>
-              <a:cs typeface="Calibri" panose="020F0502020204030204" pitchFamily="34" charset="0"/>
-            </a:endParaRPr>
-          </a:p>
-          <a:p>
-            <a:endParaRPr lang="en-GB" sz="1600" b="1" dirty="0">
-              <a:latin typeface="Calibri" panose="020F0502020204030204" pitchFamily="34" charset="0"/>
-              <a:ea typeface="Calibri" panose="020F0502020204030204" pitchFamily="34" charset="0"/>
-              <a:cs typeface="Calibri" panose="020F0502020204030204" pitchFamily="34" charset="0"/>
-            </a:endParaRPr>
-          </a:p>
-          <a:p>
-            <a:endParaRPr lang="en-GB" sz="1600" b="1" dirty="0">
-              <a:latin typeface="Calibri" panose="020F0502020204030204" pitchFamily="34" charset="0"/>
-              <a:ea typeface="Calibri" panose="020F0502020204030204" pitchFamily="34" charset="0"/>
-              <a:cs typeface="Calibri" panose="020F0502020204030204" pitchFamily="34" charset="0"/>
-            </a:endParaRPr>
-          </a:p>
-          <a:p>
-            <a:endParaRPr lang="en-GB" sz="1600" b="1" dirty="0">
-              <a:latin typeface="Calibri" panose="020F0502020204030204" pitchFamily="34" charset="0"/>
-              <a:ea typeface="Calibri" panose="020F0502020204030204" pitchFamily="34" charset="0"/>
-              <a:cs typeface="Calibri" panose="020F0502020204030204" pitchFamily="34" charset="0"/>
-            </a:endParaRPr>
-          </a:p>
-          <a:p>
-            <a:endParaRPr lang="en-GB" sz="1600" b="1" dirty="0">
-              <a:latin typeface="Calibri" panose="020F0502020204030204" pitchFamily="34" charset="0"/>
-              <a:ea typeface="Calibri" panose="020F0502020204030204" pitchFamily="34" charset="0"/>
-              <a:cs typeface="Calibri" panose="020F0502020204030204" pitchFamily="34" charset="0"/>
-            </a:endParaRPr>
-          </a:p>
-          <a:p>
-            <a:endParaRPr lang="en-GB" sz="1600" b="1" dirty="0">
-              <a:latin typeface="Calibri" panose="020F0502020204030204" pitchFamily="34" charset="0"/>
-              <a:ea typeface="Calibri" panose="020F0502020204030204" pitchFamily="34" charset="0"/>
-              <a:cs typeface="Calibri" panose="020F0502020204030204" pitchFamily="34" charset="0"/>
-            </a:endParaRPr>
-          </a:p>
-          <a:p>
-            <a:endParaRPr lang="en-GB" sz="1600" b="1" dirty="0">
-              <a:latin typeface="Calibri" panose="020F0502020204030204" pitchFamily="34" charset="0"/>
-              <a:ea typeface="Calibri" panose="020F0502020204030204" pitchFamily="34" charset="0"/>
-              <a:cs typeface="Calibri" panose="020F0502020204030204" pitchFamily="34" charset="0"/>
-            </a:endParaRPr>
-          </a:p>
-          <a:p>
-            <a:endParaRPr lang="en-GB" sz="1600" b="1" dirty="0">
-              <a:latin typeface="Calibri" panose="020F0502020204030204" pitchFamily="34" charset="0"/>
-              <a:ea typeface="Calibri" panose="020F0502020204030204" pitchFamily="34" charset="0"/>
-              <a:cs typeface="Calibri" panose="020F0502020204030204" pitchFamily="34" charset="0"/>
-            </a:endParaRPr>
-          </a:p>
-          <a:p>
-            <a:endParaRPr lang="en-GB" sz="1600" b="1" dirty="0">
-              <a:latin typeface="Calibri" panose="020F0502020204030204" pitchFamily="34" charset="0"/>
-              <a:ea typeface="Calibri" panose="020F0502020204030204" pitchFamily="34" charset="0"/>
-              <a:cs typeface="Calibri" panose="020F0502020204030204" pitchFamily="34" charset="0"/>
-            </a:endParaRPr>
-          </a:p>
-          <a:p>
-            <a:endParaRPr lang="en-GB" sz="1600" b="1" dirty="0">
-              <a:latin typeface="Calibri" panose="020F0502020204030204" pitchFamily="34" charset="0"/>
-              <a:ea typeface="Calibri" panose="020F0502020204030204" pitchFamily="34" charset="0"/>
-              <a:cs typeface="Calibri" panose="020F0502020204030204" pitchFamily="34" charset="0"/>
-            </a:endParaRPr>
-          </a:p>
-          <a:p>
-            <a:endParaRPr lang="en-GB" sz="1600" b="1" dirty="0">
-              <a:latin typeface="Calibri" panose="020F0502020204030204" pitchFamily="34" charset="0"/>
-              <a:ea typeface="Calibri" panose="020F0502020204030204" pitchFamily="34" charset="0"/>
-              <a:cs typeface="Calibri" panose="020F0502020204030204" pitchFamily="34" charset="0"/>
-            </a:endParaRPr>
-          </a:p>
-          <a:p>
-            <a:endParaRPr lang="en-GB" sz="1600" b="1" dirty="0">
-              <a:latin typeface="Calibri" panose="020F0502020204030204" pitchFamily="34" charset="0"/>
-              <a:ea typeface="Calibri" panose="020F0502020204030204" pitchFamily="34" charset="0"/>
-              <a:cs typeface="Calibri" panose="020F0502020204030204" pitchFamily="34" charset="0"/>
-            </a:endParaRPr>
-          </a:p>
-          <a:p>
-            <a:r>
-              <a:rPr lang="en-GB" sz="1600" b="1" dirty="0">
-                <a:latin typeface="Calibri" panose="020F0502020204030204" pitchFamily="34" charset="0"/>
-                <a:ea typeface="Calibri" panose="020F0502020204030204" pitchFamily="34" charset="0"/>
-                <a:cs typeface="Calibri" panose="020F0502020204030204" pitchFamily="34" charset="0"/>
-              </a:rPr>
-              <a:t>Something in this column too idk</a:t>
-            </a:r>
           </a:p>
         </p:txBody>
       </p:sp>
@@ -4762,9 +5072,9 @@
         <p:grpSpPr>
           <a:xfrm>
             <a:off x="11455577" y="5470306"/>
-            <a:ext cx="4541593" cy="2005918"/>
+            <a:ext cx="4541593" cy="2353695"/>
             <a:chOff x="10801689" y="4065336"/>
-            <a:chExt cx="6154818" cy="2865483"/>
+            <a:chExt cx="6154818" cy="3362288"/>
           </a:xfrm>
         </p:grpSpPr>
         <p:pic>
@@ -4812,7 +5122,7 @@
           <p:spPr>
             <a:xfrm>
               <a:off x="10801689" y="6592264"/>
-              <a:ext cx="6154818" cy="338555"/>
+              <a:ext cx="6154818" cy="835360"/>
             </a:xfrm>
             <a:prstGeom prst="rect">
               <a:avLst/>
@@ -4825,6 +5135,7 @@
             </a:bodyPr>
             <a:lstStyle/>
             <a:p>
+              <a:pPr algn="ctr"/>
               <a:r>
                 <a:rPr lang="en-GB" sz="1600" b="1" dirty="0"/>
                 <a:t>Figure 1: </a:t>
@@ -4840,10 +5151,10 @@
       </p:grpSp>
       <p:grpSp>
         <p:nvGrpSpPr>
-          <p:cNvPr id="19" name="Group 18">
-            <a:extLst>
-              <a:ext uri="{FF2B5EF4-FFF2-40B4-BE49-F238E27FC236}">
-                <a16:creationId xmlns:a16="http://schemas.microsoft.com/office/drawing/2014/main" id="{F4BC4623-EAD9-CB3F-B5B3-CC881163C38B}"/>
+          <p:cNvPr id="58" name="Group 57">
+            <a:extLst>
+              <a:ext uri="{FF2B5EF4-FFF2-40B4-BE49-F238E27FC236}">
+                <a16:creationId xmlns:a16="http://schemas.microsoft.com/office/drawing/2014/main" id="{1E40D5FE-F233-ABBE-C0EC-35B6F162A1D6}"/>
               </a:ext>
             </a:extLst>
           </p:cNvPr>
@@ -4852,10 +5163,10 @@
         </p:nvGrpSpPr>
         <p:grpSpPr>
           <a:xfrm>
-            <a:off x="11455577" y="7963749"/>
-            <a:ext cx="3272793" cy="2524307"/>
-            <a:chOff x="10845670" y="6707406"/>
-            <a:chExt cx="6336178" cy="3948387"/>
+            <a:off x="11555912" y="7960402"/>
+            <a:ext cx="3272793" cy="2527653"/>
+            <a:chOff x="11555912" y="7960402"/>
+            <a:chExt cx="3272793" cy="2527653"/>
           </a:xfrm>
         </p:grpSpPr>
         <p:grpSp>
@@ -4872,10 +5183,10 @@
           </p:nvGrpSpPr>
           <p:grpSpPr>
             <a:xfrm>
-              <a:off x="11042337" y="6707406"/>
-              <a:ext cx="5076721" cy="2916740"/>
-              <a:chOff x="10915877" y="7365592"/>
-              <a:chExt cx="5076721" cy="2916740"/>
+              <a:off x="11955247" y="7960402"/>
+              <a:ext cx="2145579" cy="1865545"/>
+              <a:chOff x="11696440" y="7367696"/>
+              <a:chExt cx="4153874" cy="2917987"/>
             </a:xfrm>
           </p:grpSpPr>
           <p:pic>
@@ -4900,7 +5211,7 @@
             </p:blipFill>
             <p:spPr>
               <a:xfrm>
-                <a:off x="10915877" y="7365592"/>
+                <a:off x="11696440" y="7367696"/>
                 <a:ext cx="1980337" cy="2916740"/>
               </a:xfrm>
               <a:prstGeom prst="rect">
@@ -4930,7 +5241,7 @@
             </p:blipFill>
             <p:spPr>
               <a:xfrm>
-                <a:off x="14233695" y="7384121"/>
+                <a:off x="14091411" y="7401793"/>
                 <a:ext cx="1758903" cy="2883890"/>
               </a:xfrm>
               <a:prstGeom prst="rect">
@@ -4953,8 +5264,8 @@
           </p:nvSpPr>
           <p:spPr>
             <a:xfrm>
-              <a:off x="10845670" y="9741119"/>
-              <a:ext cx="6336178" cy="914674"/>
+              <a:off x="11555912" y="9903280"/>
+              <a:ext cx="3272793" cy="584775"/>
             </a:xfrm>
             <a:prstGeom prst="rect">
               <a:avLst/>
@@ -4967,6 +5278,7 @@
             </a:bodyPr>
             <a:lstStyle/>
             <a:p>
+              <a:pPr algn="ctr"/>
               <a:r>
                 <a:rPr lang="en-GB" sz="1600" b="1" dirty="0"/>
                 <a:t>Figures 3 &amp; 4: </a:t>
@@ -4980,84 +5292,6 @@
           </p:txBody>
         </p:sp>
       </p:grpSp>
-      <p:sp>
-        <p:nvSpPr>
-          <p:cNvPr id="45" name="Rectangle: Rounded Corners 44">
-            <a:extLst>
-              <a:ext uri="{FF2B5EF4-FFF2-40B4-BE49-F238E27FC236}">
-                <a16:creationId xmlns:a16="http://schemas.microsoft.com/office/drawing/2014/main" id="{4763A920-50C0-2CA3-7F95-83106B143CB1}"/>
-              </a:ext>
-            </a:extLst>
-          </p:cNvPr>
-          <p:cNvSpPr/>
-          <p:nvPr/>
-        </p:nvSpPr>
-        <p:spPr>
-          <a:xfrm>
-            <a:off x="10980981" y="23936248"/>
-            <a:ext cx="9957091" cy="5824704"/>
-          </a:xfrm>
-          <a:prstGeom prst="roundRect">
-            <a:avLst/>
-          </a:prstGeom>
-          <a:solidFill>
-            <a:schemeClr val="bg1"/>
-          </a:solidFill>
-          <a:ln w="254000">
-            <a:solidFill>
-              <a:schemeClr val="tx2"/>
-            </a:solidFill>
-          </a:ln>
-        </p:spPr>
-        <p:style>
-          <a:lnRef idx="1">
-            <a:schemeClr val="accent4"/>
-          </a:lnRef>
-          <a:fillRef idx="2">
-            <a:schemeClr val="accent4"/>
-          </a:fillRef>
-          <a:effectRef idx="1">
-            <a:schemeClr val="accent4"/>
-          </a:effectRef>
-          <a:fontRef idx="minor">
-            <a:schemeClr val="dk1"/>
-          </a:fontRef>
-        </p:style>
-        <p:txBody>
-          <a:bodyPr rtlCol="0" anchor="ctr"/>
-          <a:lstStyle/>
-          <a:p>
-            <a:r>
-              <a:rPr lang="en-GB" sz="2400" b="1" dirty="0">
-                <a:latin typeface="Calibri" panose="020F0502020204030204" pitchFamily="34" charset="0"/>
-                <a:ea typeface="Calibri" panose="020F0502020204030204" pitchFamily="34" charset="0"/>
-                <a:cs typeface="Calibri" panose="020F0502020204030204" pitchFamily="34" charset="0"/>
-              </a:rPr>
-              <a:t>Discussion &amp; Future Work:</a:t>
-            </a:r>
-            <a:br>
-              <a:rPr lang="en-GB" sz="2400" b="1" dirty="0">
-                <a:latin typeface="Calibri" panose="020F0502020204030204" pitchFamily="34" charset="0"/>
-                <a:ea typeface="Calibri" panose="020F0502020204030204" pitchFamily="34" charset="0"/>
-                <a:cs typeface="Calibri" panose="020F0502020204030204" pitchFamily="34" charset="0"/>
-              </a:rPr>
-            </a:br>
-            <a:r>
-              <a:rPr lang="en-GB" sz="1600" dirty="0" err="1">
-                <a:latin typeface="Calibri" panose="020F0502020204030204" pitchFamily="34" charset="0"/>
-                <a:ea typeface="Calibri" panose="020F0502020204030204" pitchFamily="34" charset="0"/>
-                <a:cs typeface="Calibri" panose="020F0502020204030204" pitchFamily="34" charset="0"/>
-              </a:rPr>
-              <a:t>aaaa</a:t>
-            </a:r>
-            <a:endParaRPr lang="en-GB" sz="2400" b="1" dirty="0">
-              <a:latin typeface="Calibri" panose="020F0502020204030204" pitchFamily="34" charset="0"/>
-              <a:ea typeface="Calibri" panose="020F0502020204030204" pitchFamily="34" charset="0"/>
-              <a:cs typeface="Calibri" panose="020F0502020204030204" pitchFamily="34" charset="0"/>
-            </a:endParaRPr>
-          </a:p>
-        </p:txBody>
-      </p:sp>
       <p:sp>
         <p:nvSpPr>
           <p:cNvPr id="47" name="Rectangle: Rounded Corners 46">
@@ -5105,13 +5339,6 @@
           <a:bodyPr numCol="2" rtlCol="0" anchor="ctr"/>
           <a:lstStyle/>
           <a:p>
-            <a:endParaRPr lang="en-GB" sz="2400" b="1" dirty="0">
-              <a:latin typeface="Calibri" panose="020F0502020204030204" pitchFamily="34" charset="0"/>
-              <a:ea typeface="Calibri" panose="020F0502020204030204" pitchFamily="34" charset="0"/>
-              <a:cs typeface="Calibri" panose="020F0502020204030204" pitchFamily="34" charset="0"/>
-            </a:endParaRPr>
-          </a:p>
-          <a:p>
             <a:r>
               <a:rPr lang="en-GB" sz="2400" b="1" dirty="0">
                 <a:latin typeface="Calibri" panose="020F0502020204030204" pitchFamily="34" charset="0"/>
@@ -5187,13 +5414,6 @@
             </a:endParaRPr>
           </a:p>
           <a:p>
-            <a:endParaRPr lang="en-GB" sz="1600" b="1" dirty="0">
-              <a:latin typeface="Calibri" panose="020F0502020204030204" pitchFamily="34" charset="0"/>
-              <a:ea typeface="Calibri" panose="020F0502020204030204" pitchFamily="34" charset="0"/>
-              <a:cs typeface="Calibri" panose="020F0502020204030204" pitchFamily="34" charset="0"/>
-            </a:endParaRPr>
-          </a:p>
-          <a:p>
             <a:r>
               <a:rPr lang="en-GB" sz="1600" b="1" dirty="0">
                 <a:latin typeface="Calibri" panose="020F0502020204030204" pitchFamily="34" charset="0"/>
@@ -5249,77 +5469,13 @@
             </a:r>
           </a:p>
           <a:p>
-            <a:endParaRPr lang="en-GB" sz="1600" dirty="0">
-              <a:latin typeface="Calibri" panose="020F0502020204030204" pitchFamily="34" charset="0"/>
-              <a:ea typeface="Calibri" panose="020F0502020204030204" pitchFamily="34" charset="0"/>
-              <a:cs typeface="Calibri" panose="020F0502020204030204" pitchFamily="34" charset="0"/>
-            </a:endParaRPr>
-          </a:p>
-          <a:p>
-            <a:endParaRPr lang="en-GB" sz="1600" dirty="0">
-              <a:latin typeface="Calibri" panose="020F0502020204030204" pitchFamily="34" charset="0"/>
-              <a:ea typeface="Calibri" panose="020F0502020204030204" pitchFamily="34" charset="0"/>
-              <a:cs typeface="Calibri" panose="020F0502020204030204" pitchFamily="34" charset="0"/>
-            </a:endParaRPr>
-          </a:p>
-          <a:p>
-            <a:endParaRPr lang="en-GB" sz="1600" dirty="0">
-              <a:latin typeface="Calibri" panose="020F0502020204030204" pitchFamily="34" charset="0"/>
-              <a:ea typeface="Calibri" panose="020F0502020204030204" pitchFamily="34" charset="0"/>
-              <a:cs typeface="Calibri" panose="020F0502020204030204" pitchFamily="34" charset="0"/>
-            </a:endParaRPr>
-          </a:p>
-          <a:p>
             <a:r>
               <a:rPr lang="en-GB" sz="1600" dirty="0">
                 <a:latin typeface="Calibri" panose="020F0502020204030204" pitchFamily="34" charset="0"/>
                 <a:ea typeface="Calibri" panose="020F0502020204030204" pitchFamily="34" charset="0"/>
                 <a:cs typeface="Calibri" panose="020F0502020204030204" pitchFamily="34" charset="0"/>
               </a:rPr>
-              <a:t>- Extensively optimised by hyperparameter constraints on the depth and min/max samples, as well as bootstrap limits and using exclusively MAE and R</a:t>
-            </a:r>
-            <a:r>
-              <a:rPr lang="en-GB" sz="1600" baseline="30000" dirty="0">
-                <a:latin typeface="Calibri" panose="020F0502020204030204" pitchFamily="34" charset="0"/>
-                <a:ea typeface="Calibri" panose="020F0502020204030204" pitchFamily="34" charset="0"/>
-                <a:cs typeface="Calibri" panose="020F0502020204030204" pitchFamily="34" charset="0"/>
-              </a:rPr>
-              <a:t>2</a:t>
-            </a:r>
-            <a:r>
-              <a:rPr lang="en-GB" sz="1600" dirty="0">
-                <a:latin typeface="Calibri" panose="020F0502020204030204" pitchFamily="34" charset="0"/>
-                <a:ea typeface="Calibri" panose="020F0502020204030204" pitchFamily="34" charset="0"/>
-                <a:cs typeface="Calibri" panose="020F0502020204030204" pitchFamily="34" charset="0"/>
-              </a:rPr>
-              <a:t> for evaluation.</a:t>
-            </a:r>
-          </a:p>
-          <a:p>
-            <a:endParaRPr lang="en-GB" sz="1600" dirty="0">
-              <a:latin typeface="Calibri" panose="020F0502020204030204" pitchFamily="34" charset="0"/>
-              <a:ea typeface="Calibri" panose="020F0502020204030204" pitchFamily="34" charset="0"/>
-              <a:cs typeface="Calibri" panose="020F0502020204030204" pitchFamily="34" charset="0"/>
-            </a:endParaRPr>
-          </a:p>
-          <a:p>
-            <a:r>
-              <a:rPr lang="en-GB" sz="1600" b="1" dirty="0">
-                <a:latin typeface="Calibri" panose="020F0502020204030204" pitchFamily="34" charset="0"/>
-                <a:ea typeface="Calibri" panose="020F0502020204030204" pitchFamily="34" charset="0"/>
-                <a:cs typeface="Calibri" panose="020F0502020204030204" pitchFamily="34" charset="0"/>
-              </a:rPr>
-              <a:t>Issues with Historical Model:</a:t>
-            </a:r>
-          </a:p>
-          <a:p>
-            <a:r>
-              <a:rPr lang="en-GB" sz="1600" dirty="0">
-                <a:latin typeface="Calibri" panose="020F0502020204030204" pitchFamily="34" charset="0"/>
-                <a:ea typeface="Calibri" panose="020F0502020204030204" pitchFamily="34" charset="0"/>
-                <a:cs typeface="Calibri" panose="020F0502020204030204" pitchFamily="34" charset="0"/>
-              </a:rPr>
-              <a:t>- Historical data, even when interpolated, experiences data inaccuracies.</a:t>
+              <a:t>- Optimised by hyperparameter constraints on the depth and min/max samples and bootstrap limits.</a:t>
             </a:r>
             <a:br>
               <a:rPr lang="en-GB" sz="1600" dirty="0">
@@ -5334,27 +5490,68 @@
                 <a:ea typeface="Calibri" panose="020F0502020204030204" pitchFamily="34" charset="0"/>
                 <a:cs typeface="Calibri" panose="020F0502020204030204" pitchFamily="34" charset="0"/>
               </a:rPr>
-              <a:t>- The original FastF1 dataset, as well as all publicly available Formula One datasets, updates at a rate of only 4hz; interpolating to 20hz means data is highly likely to contain inaccurate braking/throttling zones.</a:t>
-            </a:r>
-          </a:p>
-          <a:p>
+              <a:t>- Uses MAE and R</a:t>
+            </a:r>
+            <a:r>
+              <a:rPr lang="en-GB" sz="1600" baseline="30000" dirty="0">
+                <a:latin typeface="Calibri" panose="020F0502020204030204" pitchFamily="34" charset="0"/>
+                <a:ea typeface="Calibri" panose="020F0502020204030204" pitchFamily="34" charset="0"/>
+                <a:cs typeface="Calibri" panose="020F0502020204030204" pitchFamily="34" charset="0"/>
+              </a:rPr>
+              <a:t>2</a:t>
+            </a:r>
             <a:r>
               <a:rPr lang="en-GB" sz="1600" dirty="0">
                 <a:latin typeface="Calibri" panose="020F0502020204030204" pitchFamily="34" charset="0"/>
                 <a:ea typeface="Calibri" panose="020F0502020204030204" pitchFamily="34" charset="0"/>
                 <a:cs typeface="Calibri" panose="020F0502020204030204" pitchFamily="34" charset="0"/>
               </a:rPr>
+              <a:t> for evaluation.</a:t>
+            </a:r>
+          </a:p>
+          <a:p>
+            <a:r>
+              <a:rPr lang="en-GB" sz="1600" b="1" dirty="0">
+                <a:latin typeface="Calibri" panose="020F0502020204030204" pitchFamily="34" charset="0"/>
+                <a:ea typeface="Calibri" panose="020F0502020204030204" pitchFamily="34" charset="0"/>
+                <a:cs typeface="Calibri" panose="020F0502020204030204" pitchFamily="34" charset="0"/>
+              </a:rPr>
+              <a:t>Drawbacks - Historical Model:</a:t>
+            </a:r>
+          </a:p>
+          <a:p>
+            <a:r>
+              <a:rPr lang="en-GB" sz="1600" dirty="0">
+                <a:latin typeface="Calibri" panose="020F0502020204030204" pitchFamily="34" charset="0"/>
+                <a:ea typeface="Calibri" panose="020F0502020204030204" pitchFamily="34" charset="0"/>
+                <a:cs typeface="Calibri" panose="020F0502020204030204" pitchFamily="34" charset="0"/>
+              </a:rPr>
+              <a:t>- Historical data, even when interpolated, experiences data inaccuracies for braking zone sizes. The original FastF1 dataset, as well as all publicly available Formula One datasets, updates at a rate of only 4hz.</a:t>
+            </a:r>
+            <a:br>
+              <a:rPr lang="en-GB" sz="1600" dirty="0">
+                <a:latin typeface="Calibri" panose="020F0502020204030204" pitchFamily="34" charset="0"/>
+                <a:ea typeface="Calibri" panose="020F0502020204030204" pitchFamily="34" charset="0"/>
+                <a:cs typeface="Calibri" panose="020F0502020204030204" pitchFamily="34" charset="0"/>
+              </a:rPr>
+            </a:br>
+            <a:r>
+              <a:rPr lang="en-GB" sz="1600" dirty="0">
+                <a:latin typeface="Calibri" panose="020F0502020204030204" pitchFamily="34" charset="0"/>
+                <a:ea typeface="Calibri" panose="020F0502020204030204" pitchFamily="34" charset="0"/>
+                <a:cs typeface="Calibri" panose="020F0502020204030204" pitchFamily="34" charset="0"/>
+              </a:rPr>
+              <a:t>- Interpolating to 20hz means data is highly likely to contain inaccurate braking/throttling zones.</a:t>
+            </a:r>
+          </a:p>
+          <a:p>
+            <a:r>
+              <a:rPr lang="en-GB" sz="1600" dirty="0">
+                <a:latin typeface="Calibri" panose="020F0502020204030204" pitchFamily="34" charset="0"/>
+                <a:ea typeface="Calibri" panose="020F0502020204030204" pitchFamily="34" charset="0"/>
+                <a:cs typeface="Calibri" panose="020F0502020204030204" pitchFamily="34" charset="0"/>
+              </a:rPr>
               <a:t>- This is further made difficult to rectify by braking values only being TRUE or FALSE in the original dataset, meaning no decimal values are able to be retrieved.</a:t>
-            </a:r>
-          </a:p>
-          <a:p>
-            <a:r>
-              <a:rPr lang="en-GB" sz="1600" dirty="0">
-                <a:latin typeface="Calibri" panose="020F0502020204030204" pitchFamily="34" charset="0"/>
-                <a:ea typeface="Calibri" panose="020F0502020204030204" pitchFamily="34" charset="0"/>
-                <a:cs typeface="Calibri" panose="020F0502020204030204" pitchFamily="34" charset="0"/>
-              </a:rPr>
-              <a:t>- This is something I am unable to fix – this is a pure limitation in publicly available Formula One data.</a:t>
             </a:r>
             <a:br>
               <a:rPr lang="en-GB" sz="2400" b="1" dirty="0">
@@ -5385,10 +5582,10 @@
         </p:nvGrpSpPr>
         <p:grpSpPr>
           <a:xfrm>
-            <a:off x="15997171" y="5365647"/>
-            <a:ext cx="4524504" cy="2573048"/>
+            <a:off x="15997171" y="5365646"/>
+            <a:ext cx="4524504" cy="2469577"/>
             <a:chOff x="11526900" y="6015640"/>
-            <a:chExt cx="3844294" cy="2186218"/>
+            <a:chExt cx="3844294" cy="2098303"/>
           </a:xfrm>
         </p:grpSpPr>
         <p:pic>
@@ -5436,7 +5633,7 @@
           <p:spPr>
             <a:xfrm>
               <a:off x="11526900" y="7617083"/>
-              <a:ext cx="3844294" cy="584775"/>
+              <a:ext cx="3844294" cy="496860"/>
             </a:xfrm>
             <a:prstGeom prst="rect">
               <a:avLst/>
@@ -5449,6 +5646,7 @@
             </a:bodyPr>
             <a:lstStyle/>
             <a:p>
+              <a:pPr algn="ctr"/>
               <a:r>
                 <a:rPr lang="en-GB" sz="1600" b="1" dirty="0"/>
                 <a:t>Figure 2: </a:t>
@@ -5540,6 +5738,7 @@
             </a:bodyPr>
             <a:lstStyle/>
             <a:p>
+              <a:pPr algn="ctr"/>
               <a:r>
                 <a:rPr lang="en-GB" sz="1600" b="1" dirty="0"/>
                 <a:t>Figure 5: </a:t>
@@ -5587,11 +5786,19 @@
             </a:r>
             <a:r>
               <a:rPr lang="en-GB" sz="1600" dirty="0"/>
-              <a:t>3D scatter plot (constellation) of Speed vs Curvature vs Input (+1 = full throttle, -1 = full brake). Visualises data across top 60% laps of all* tracks in the F1 25 game. Coloured by the gear the car is in at each given speed/curvature level.  </a:t>
+              <a:t>3D scatter plot (constellation) of Speed vs Curvature vs Input (+1 = full throttle, -1 = full brake). Visualises expected inputs across top laps for tracks in the F1 25 game. Coloured by the gear the car is in at each given speed/curvature level.  </a:t>
             </a:r>
             <a:r>
               <a:rPr lang="en-GB" sz="1600" b="1" dirty="0"/>
-              <a:t>634,232 data points.</a:t>
+              <a:t>634,232 data points </a:t>
+            </a:r>
+            <a:r>
+              <a:rPr lang="en-GB" sz="1600" dirty="0"/>
+              <a:t>(not all data)</a:t>
+            </a:r>
+            <a:r>
+              <a:rPr lang="en-GB" sz="1600" b="1" dirty="0"/>
+              <a:t>.</a:t>
             </a:r>
             <a:endParaRPr lang="en-GB" sz="1600" dirty="0"/>
           </a:p>
@@ -5642,6 +5849,668 @@
           </a:prstGeom>
         </p:spPr>
       </p:pic>
+      <p:sp>
+        <p:nvSpPr>
+          <p:cNvPr id="25" name="TextBox 24">
+            <a:extLst>
+              <a:ext uri="{FF2B5EF4-FFF2-40B4-BE49-F238E27FC236}">
+                <a16:creationId xmlns:a16="http://schemas.microsoft.com/office/drawing/2014/main" id="{58516F5F-26F3-31F4-8811-328E234C34A9}"/>
+              </a:ext>
+            </a:extLst>
+          </p:cNvPr>
+          <p:cNvSpPr txBox="1"/>
+          <p:nvPr/>
+        </p:nvSpPr>
+        <p:spPr>
+          <a:xfrm>
+            <a:off x="4972049" y="18252843"/>
+            <a:ext cx="4900675" cy="5262979"/>
+          </a:xfrm>
+          <a:prstGeom prst="rect">
+            <a:avLst/>
+          </a:prstGeom>
+          <a:noFill/>
+        </p:spPr>
+        <p:txBody>
+          <a:bodyPr wrap="square" rtlCol="0">
+            <a:spAutoFit/>
+          </a:bodyPr>
+          <a:lstStyle/>
+          <a:p>
+            <a:r>
+              <a:rPr lang="en-GB" sz="1600" b="1" dirty="0">
+                <a:latin typeface="Calibri" panose="020F0502020204030204" pitchFamily="34" charset="0"/>
+                <a:ea typeface="Calibri" panose="020F0502020204030204" pitchFamily="34" charset="0"/>
+                <a:cs typeface="Calibri" panose="020F0502020204030204" pitchFamily="34" charset="0"/>
+              </a:rPr>
+              <a:t>Comments:</a:t>
+            </a:r>
+          </a:p>
+          <a:p>
+            <a:r>
+              <a:rPr lang="en-GB" sz="1600" dirty="0">
+                <a:latin typeface="Calibri" panose="020F0502020204030204" pitchFamily="34" charset="0"/>
+                <a:ea typeface="Calibri" panose="020F0502020204030204" pitchFamily="34" charset="0"/>
+                <a:cs typeface="Calibri" panose="020F0502020204030204" pitchFamily="34" charset="0"/>
+              </a:rPr>
+              <a:t>The game model had overall more consistent accuracies across all tracks, as well as the brake and throttle accuracies being equal to 2 decimal places.</a:t>
+            </a:r>
+          </a:p>
+          <a:p>
+            <a:r>
+              <a:rPr lang="en-GB" sz="1600" dirty="0">
+                <a:latin typeface="Calibri" panose="020F0502020204030204" pitchFamily="34" charset="0"/>
+                <a:ea typeface="Calibri" panose="020F0502020204030204" pitchFamily="34" charset="0"/>
+                <a:cs typeface="Calibri" panose="020F0502020204030204" pitchFamily="34" charset="0"/>
+              </a:rPr>
+              <a:t>Vegas and Abu Dhabi having the lowest brake and throttle accuracies respectively is likely due to small inconsistencies in the data sample used – this can easily be improved by increasing the number of laps in the dataset.</a:t>
+            </a:r>
+          </a:p>
+          <a:p>
+            <a:r>
+              <a:rPr lang="en-GB" sz="1600" dirty="0">
+                <a:latin typeface="Calibri" panose="020F0502020204030204" pitchFamily="34" charset="0"/>
+                <a:ea typeface="Calibri" panose="020F0502020204030204" pitchFamily="34" charset="0"/>
+                <a:cs typeface="Calibri" panose="020F0502020204030204" pitchFamily="34" charset="0"/>
+              </a:rPr>
+              <a:t>The historical model’s brake accuracy is notably lower than its throttle accuracy and both accuracies from the game model – this is again due to braking values being exclusively TRUE or FALSE in the original datasets, while the games have normalised 0.0-1.0 values for exact input percentages.</a:t>
+            </a:r>
+          </a:p>
+          <a:p>
+            <a:r>
+              <a:rPr lang="en-GB" sz="1600" dirty="0">
+                <a:latin typeface="Calibri" panose="020F0502020204030204" pitchFamily="34" charset="0"/>
+                <a:ea typeface="Calibri" panose="020F0502020204030204" pitchFamily="34" charset="0"/>
+                <a:cs typeface="Calibri" panose="020F0502020204030204" pitchFamily="34" charset="0"/>
+              </a:rPr>
+              <a:t>For the speed model - the lower the MAE, the better: 1.6968 is a high performing score and can be improved further by growing the dataset.</a:t>
+            </a:r>
+            <a:br>
+              <a:rPr lang="en-GB" sz="1600" dirty="0">
+                <a:latin typeface="Calibri" panose="020F0502020204030204" pitchFamily="34" charset="0"/>
+                <a:ea typeface="Calibri" panose="020F0502020204030204" pitchFamily="34" charset="0"/>
+                <a:cs typeface="Calibri" panose="020F0502020204030204" pitchFamily="34" charset="0"/>
+              </a:rPr>
+            </a:br>
+            <a:r>
+              <a:rPr lang="en-GB" sz="1600" dirty="0">
+                <a:latin typeface="Calibri" panose="020F0502020204030204" pitchFamily="34" charset="0"/>
+                <a:ea typeface="Calibri" panose="020F0502020204030204" pitchFamily="34" charset="0"/>
+                <a:cs typeface="Calibri" panose="020F0502020204030204" pitchFamily="34" charset="0"/>
+              </a:rPr>
+              <a:t>The closer R</a:t>
+            </a:r>
+            <a:r>
+              <a:rPr lang="en-GB" sz="1600" baseline="30000" dirty="0">
+                <a:latin typeface="Calibri" panose="020F0502020204030204" pitchFamily="34" charset="0"/>
+                <a:ea typeface="Calibri" panose="020F0502020204030204" pitchFamily="34" charset="0"/>
+                <a:cs typeface="Calibri" panose="020F0502020204030204" pitchFamily="34" charset="0"/>
+              </a:rPr>
+              <a:t>2</a:t>
+            </a:r>
+            <a:r>
+              <a:rPr lang="en-GB" sz="1600" dirty="0">
+                <a:latin typeface="Calibri" panose="020F0502020204030204" pitchFamily="34" charset="0"/>
+                <a:ea typeface="Calibri" panose="020F0502020204030204" pitchFamily="34" charset="0"/>
+                <a:cs typeface="Calibri" panose="020F0502020204030204" pitchFamily="34" charset="0"/>
+              </a:rPr>
+              <a:t> is to 1, the better the model fits: 0.9984 is an extremely high-fitting score.</a:t>
+            </a:r>
+          </a:p>
+          <a:p>
+            <a:endParaRPr lang="en-GB" sz="1600" dirty="0"/>
+          </a:p>
+        </p:txBody>
+      </p:sp>
+      <p:grpSp>
+        <p:nvGrpSpPr>
+          <p:cNvPr id="44" name="Group 43">
+            <a:extLst>
+              <a:ext uri="{FF2B5EF4-FFF2-40B4-BE49-F238E27FC236}">
+                <a16:creationId xmlns:a16="http://schemas.microsoft.com/office/drawing/2014/main" id="{16777ECA-4C52-2728-264C-2BBDECEB341D}"/>
+              </a:ext>
+            </a:extLst>
+          </p:cNvPr>
+          <p:cNvGrpSpPr/>
+          <p:nvPr/>
+        </p:nvGrpSpPr>
+        <p:grpSpPr>
+          <a:xfrm>
+            <a:off x="15893000" y="18444948"/>
+            <a:ext cx="4541593" cy="1680522"/>
+            <a:chOff x="15911237" y="18128030"/>
+            <a:chExt cx="4541593" cy="1680522"/>
+          </a:xfrm>
+        </p:grpSpPr>
+        <p:pic>
+          <p:nvPicPr>
+            <p:cNvPr id="32" name="Picture 31">
+              <a:extLst>
+                <a:ext uri="{FF2B5EF4-FFF2-40B4-BE49-F238E27FC236}">
+                  <a16:creationId xmlns:a16="http://schemas.microsoft.com/office/drawing/2014/main" id="{BC717DAE-C207-8736-2A7B-427895C9F0E3}"/>
+                </a:ext>
+              </a:extLst>
+            </p:cNvPr>
+            <p:cNvPicPr>
+              <a:picLocks noChangeAspect="1"/>
+            </p:cNvPicPr>
+            <p:nvPr/>
+          </p:nvPicPr>
+          <p:blipFill>
+            <a:blip r:embed="rId9">
+              <a:extLst>
+                <a:ext uri="{28A0092B-C50C-407E-A947-70E740481C1C}">
+                  <a14:useLocalDpi xmlns:a14="http://schemas.microsoft.com/office/drawing/2010/main" val="0"/>
+                </a:ext>
+              </a:extLst>
+            </a:blip>
+            <a:stretch>
+              <a:fillRect/>
+            </a:stretch>
+          </p:blipFill>
+          <p:spPr>
+            <a:xfrm>
+              <a:off x="16106775" y="18128030"/>
+              <a:ext cx="4146071" cy="1095747"/>
+            </a:xfrm>
+            <a:prstGeom prst="rect">
+              <a:avLst/>
+            </a:prstGeom>
+          </p:spPr>
+        </p:pic>
+        <p:sp>
+          <p:nvSpPr>
+            <p:cNvPr id="41" name="TextBox 40">
+              <a:extLst>
+                <a:ext uri="{FF2B5EF4-FFF2-40B4-BE49-F238E27FC236}">
+                  <a16:creationId xmlns:a16="http://schemas.microsoft.com/office/drawing/2014/main" id="{D484D10F-3CC3-7263-6CE3-EB79A91E7DDF}"/>
+                </a:ext>
+              </a:extLst>
+            </p:cNvPr>
+            <p:cNvSpPr txBox="1"/>
+            <p:nvPr/>
+          </p:nvSpPr>
+          <p:spPr>
+            <a:xfrm>
+              <a:off x="15911237" y="19223777"/>
+              <a:ext cx="4541593" cy="584775"/>
+            </a:xfrm>
+            <a:prstGeom prst="rect">
+              <a:avLst/>
+            </a:prstGeom>
+            <a:noFill/>
+          </p:spPr>
+          <p:txBody>
+            <a:bodyPr wrap="square" rtlCol="0">
+              <a:spAutoFit/>
+            </a:bodyPr>
+            <a:lstStyle/>
+            <a:p>
+              <a:pPr algn="ctr"/>
+              <a:r>
+                <a:rPr lang="en-GB" sz="1600" b="1" dirty="0"/>
+                <a:t>Figure 9: </a:t>
+              </a:r>
+              <a:r>
+                <a:rPr lang="en-GB" sz="1600" dirty="0"/>
+                <a:t>The top priority from advice generated for a user driven lap of the Red Bull Ring (Austria).</a:t>
+              </a:r>
+              <a:endParaRPr lang="en-GB" sz="1600" b="1" dirty="0"/>
+            </a:p>
+          </p:txBody>
+        </p:sp>
+      </p:grpSp>
+      <p:grpSp>
+        <p:nvGrpSpPr>
+          <p:cNvPr id="49" name="Group 48">
+            <a:extLst>
+              <a:ext uri="{FF2B5EF4-FFF2-40B4-BE49-F238E27FC236}">
+                <a16:creationId xmlns:a16="http://schemas.microsoft.com/office/drawing/2014/main" id="{9AB0AC1C-8708-96A2-A93A-23A57039FB6B}"/>
+              </a:ext>
+            </a:extLst>
+          </p:cNvPr>
+          <p:cNvGrpSpPr/>
+          <p:nvPr/>
+        </p:nvGrpSpPr>
+        <p:grpSpPr>
+          <a:xfrm>
+            <a:off x="15938955" y="20307884"/>
+            <a:ext cx="4541593" cy="2728103"/>
+            <a:chOff x="15997170" y="19808552"/>
+            <a:chExt cx="4541593" cy="2728103"/>
+          </a:xfrm>
+        </p:grpSpPr>
+        <p:grpSp>
+          <p:nvGrpSpPr>
+            <p:cNvPr id="39" name="Group 38">
+              <a:extLst>
+                <a:ext uri="{FF2B5EF4-FFF2-40B4-BE49-F238E27FC236}">
+                  <a16:creationId xmlns:a16="http://schemas.microsoft.com/office/drawing/2014/main" id="{9C2770AA-F465-4C61-E9E8-375598BC3E18}"/>
+                </a:ext>
+              </a:extLst>
+            </p:cNvPr>
+            <p:cNvGrpSpPr/>
+            <p:nvPr/>
+          </p:nvGrpSpPr>
+          <p:grpSpPr>
+            <a:xfrm>
+              <a:off x="16075929" y="19808552"/>
+              <a:ext cx="4207761" cy="1980501"/>
+              <a:chOff x="15947496" y="19727734"/>
+              <a:chExt cx="4355861" cy="2050208"/>
+            </a:xfrm>
+          </p:grpSpPr>
+          <p:pic>
+            <p:nvPicPr>
+              <p:cNvPr id="34" name="Picture 33">
+                <a:extLst>
+                  <a:ext uri="{FF2B5EF4-FFF2-40B4-BE49-F238E27FC236}">
+                    <a16:creationId xmlns:a16="http://schemas.microsoft.com/office/drawing/2014/main" id="{B64E9E19-503C-72DB-49BF-AF77C43B4A85}"/>
+                  </a:ext>
+                </a:extLst>
+              </p:cNvPr>
+              <p:cNvPicPr>
+                <a:picLocks noChangeAspect="1"/>
+              </p:cNvPicPr>
+              <p:nvPr/>
+            </p:nvPicPr>
+            <p:blipFill>
+              <a:blip r:embed="rId10"/>
+              <a:stretch>
+                <a:fillRect/>
+              </a:stretch>
+            </p:blipFill>
+            <p:spPr>
+              <a:xfrm>
+                <a:off x="15947496" y="19730323"/>
+                <a:ext cx="2224215" cy="2047619"/>
+              </a:xfrm>
+              <a:prstGeom prst="rect">
+                <a:avLst/>
+              </a:prstGeom>
+            </p:spPr>
+          </p:pic>
+          <p:pic>
+            <p:nvPicPr>
+              <p:cNvPr id="37" name="Picture 36">
+                <a:extLst>
+                  <a:ext uri="{FF2B5EF4-FFF2-40B4-BE49-F238E27FC236}">
+                    <a16:creationId xmlns:a16="http://schemas.microsoft.com/office/drawing/2014/main" id="{C3E02F4F-BB3B-37A5-AB52-DFB87A043B98}"/>
+                  </a:ext>
+                </a:extLst>
+              </p:cNvPr>
+              <p:cNvPicPr>
+                <a:picLocks noChangeAspect="1"/>
+              </p:cNvPicPr>
+              <p:nvPr/>
+            </p:nvPicPr>
+            <p:blipFill>
+              <a:blip r:embed="rId11"/>
+              <a:stretch>
+                <a:fillRect/>
+              </a:stretch>
+            </p:blipFill>
+            <p:spPr>
+              <a:xfrm>
+                <a:off x="18171710" y="19727734"/>
+                <a:ext cx="2131647" cy="2048973"/>
+              </a:xfrm>
+              <a:prstGeom prst="rect">
+                <a:avLst/>
+              </a:prstGeom>
+            </p:spPr>
+          </p:pic>
+        </p:grpSp>
+        <p:sp>
+          <p:nvSpPr>
+            <p:cNvPr id="43" name="TextBox 42">
+              <a:extLst>
+                <a:ext uri="{FF2B5EF4-FFF2-40B4-BE49-F238E27FC236}">
+                  <a16:creationId xmlns:a16="http://schemas.microsoft.com/office/drawing/2014/main" id="{61C2FEA0-0B57-9EE2-CF8E-65BDA781C8FB}"/>
+                </a:ext>
+              </a:extLst>
+            </p:cNvPr>
+            <p:cNvSpPr txBox="1"/>
+            <p:nvPr/>
+          </p:nvSpPr>
+          <p:spPr>
+            <a:xfrm>
+              <a:off x="15997170" y="21705658"/>
+              <a:ext cx="4541593" cy="830997"/>
+            </a:xfrm>
+            <a:prstGeom prst="rect">
+              <a:avLst/>
+            </a:prstGeom>
+            <a:noFill/>
+          </p:spPr>
+          <p:txBody>
+            <a:bodyPr wrap="square" rtlCol="0">
+              <a:spAutoFit/>
+            </a:bodyPr>
+            <a:lstStyle/>
+            <a:p>
+              <a:pPr algn="ctr"/>
+              <a:r>
+                <a:rPr lang="en-GB" sz="1600" b="1" dirty="0"/>
+                <a:t>Figures 10 &amp; 11: </a:t>
+              </a:r>
+              <a:r>
+                <a:rPr lang="en-GB" sz="1600" dirty="0"/>
+                <a:t>The speed map comparison between the user driven lap and the ground truth lap correlating with the advice above.</a:t>
+              </a:r>
+              <a:endParaRPr lang="en-GB" sz="1600" b="1" dirty="0"/>
+            </a:p>
+          </p:txBody>
+        </p:sp>
+      </p:grpSp>
+      <p:grpSp>
+        <p:nvGrpSpPr>
+          <p:cNvPr id="53" name="Group 52">
+            <a:extLst>
+              <a:ext uri="{FF2B5EF4-FFF2-40B4-BE49-F238E27FC236}">
+                <a16:creationId xmlns:a16="http://schemas.microsoft.com/office/drawing/2014/main" id="{313CDCED-1B2A-D307-1E09-AAD8B374ED6E}"/>
+              </a:ext>
+            </a:extLst>
+          </p:cNvPr>
+          <p:cNvGrpSpPr/>
+          <p:nvPr/>
+        </p:nvGrpSpPr>
+        <p:grpSpPr>
+          <a:xfrm>
+            <a:off x="5442536" y="24286686"/>
+            <a:ext cx="4541593" cy="2561914"/>
+            <a:chOff x="5009622" y="24620561"/>
+            <a:chExt cx="4541593" cy="2561914"/>
+          </a:xfrm>
+        </p:grpSpPr>
+        <p:pic>
+          <p:nvPicPr>
+            <p:cNvPr id="51" name="Picture 50">
+              <a:extLst>
+                <a:ext uri="{FF2B5EF4-FFF2-40B4-BE49-F238E27FC236}">
+                  <a16:creationId xmlns:a16="http://schemas.microsoft.com/office/drawing/2014/main" id="{8818EF8A-BA3A-923C-6EE1-0504F4DA7E30}"/>
+                </a:ext>
+              </a:extLst>
+            </p:cNvPr>
+            <p:cNvPicPr>
+              <a:picLocks noChangeAspect="1"/>
+            </p:cNvPicPr>
+            <p:nvPr/>
+          </p:nvPicPr>
+          <p:blipFill>
+            <a:blip r:embed="rId12"/>
+            <a:srcRect l="13002" t="11153" r="6748"/>
+            <a:stretch>
+              <a:fillRect/>
+            </a:stretch>
+          </p:blipFill>
+          <p:spPr>
+            <a:xfrm>
+              <a:off x="5478548" y="24620561"/>
+              <a:ext cx="3908333" cy="2066635"/>
+            </a:xfrm>
+            <a:prstGeom prst="rect">
+              <a:avLst/>
+            </a:prstGeom>
+          </p:spPr>
+        </p:pic>
+        <p:sp>
+          <p:nvSpPr>
+            <p:cNvPr id="52" name="TextBox 51">
+              <a:extLst>
+                <a:ext uri="{FF2B5EF4-FFF2-40B4-BE49-F238E27FC236}">
+                  <a16:creationId xmlns:a16="http://schemas.microsoft.com/office/drawing/2014/main" id="{66ED0E98-9E33-220E-2819-0F41F6D11C3E}"/>
+                </a:ext>
+              </a:extLst>
+            </p:cNvPr>
+            <p:cNvSpPr txBox="1"/>
+            <p:nvPr/>
+          </p:nvSpPr>
+          <p:spPr>
+            <a:xfrm>
+              <a:off x="5009622" y="26597700"/>
+              <a:ext cx="4541593" cy="584775"/>
+            </a:xfrm>
+            <a:prstGeom prst="rect">
+              <a:avLst/>
+            </a:prstGeom>
+            <a:noFill/>
+          </p:spPr>
+          <p:txBody>
+            <a:bodyPr wrap="square" rtlCol="0">
+              <a:spAutoFit/>
+            </a:bodyPr>
+            <a:lstStyle/>
+            <a:p>
+              <a:pPr algn="ctr"/>
+              <a:r>
+                <a:rPr lang="en-GB" sz="1600" b="1" dirty="0"/>
+                <a:t>Figure 12: </a:t>
+              </a:r>
+              <a:r>
+                <a:rPr lang="en-GB" sz="1600" dirty="0"/>
+                <a:t>3D Car State map for the Red Bull Ring (Austria), with the third braking zone entry details.</a:t>
+              </a:r>
+              <a:endParaRPr lang="en-GB" sz="1600" b="1" dirty="0"/>
+            </a:p>
+          </p:txBody>
+        </p:sp>
+      </p:grpSp>
+      <p:grpSp>
+        <p:nvGrpSpPr>
+          <p:cNvPr id="57" name="Group 56">
+            <a:extLst>
+              <a:ext uri="{FF2B5EF4-FFF2-40B4-BE49-F238E27FC236}">
+                <a16:creationId xmlns:a16="http://schemas.microsoft.com/office/drawing/2014/main" id="{BB472BF5-4137-818E-BFF4-C34A14F35135}"/>
+              </a:ext>
+            </a:extLst>
+          </p:cNvPr>
+          <p:cNvGrpSpPr/>
+          <p:nvPr/>
+        </p:nvGrpSpPr>
+        <p:grpSpPr>
+          <a:xfrm>
+            <a:off x="5440811" y="26858203"/>
+            <a:ext cx="4541593" cy="2753206"/>
+            <a:chOff x="5161917" y="26796290"/>
+            <a:chExt cx="4541593" cy="2753206"/>
+          </a:xfrm>
+        </p:grpSpPr>
+        <p:pic>
+          <p:nvPicPr>
+            <p:cNvPr id="55" name="Picture 54">
+              <a:extLst>
+                <a:ext uri="{FF2B5EF4-FFF2-40B4-BE49-F238E27FC236}">
+                  <a16:creationId xmlns:a16="http://schemas.microsoft.com/office/drawing/2014/main" id="{AC640CD1-2843-5AFE-465A-164A79EF7865}"/>
+                </a:ext>
+              </a:extLst>
+            </p:cNvPr>
+            <p:cNvPicPr>
+              <a:picLocks noChangeAspect="1"/>
+            </p:cNvPicPr>
+            <p:nvPr/>
+          </p:nvPicPr>
+          <p:blipFill>
+            <a:blip r:embed="rId13"/>
+            <a:stretch>
+              <a:fillRect/>
+            </a:stretch>
+          </p:blipFill>
+          <p:spPr>
+            <a:xfrm>
+              <a:off x="5478548" y="26796290"/>
+              <a:ext cx="3887675" cy="2186817"/>
+            </a:xfrm>
+            <a:prstGeom prst="rect">
+              <a:avLst/>
+            </a:prstGeom>
+          </p:spPr>
+        </p:pic>
+        <p:sp>
+          <p:nvSpPr>
+            <p:cNvPr id="56" name="TextBox 55">
+              <a:extLst>
+                <a:ext uri="{FF2B5EF4-FFF2-40B4-BE49-F238E27FC236}">
+                  <a16:creationId xmlns:a16="http://schemas.microsoft.com/office/drawing/2014/main" id="{68508920-49AA-E892-E727-5740F39F0E60}"/>
+                </a:ext>
+              </a:extLst>
+            </p:cNvPr>
+            <p:cNvSpPr txBox="1"/>
+            <p:nvPr/>
+          </p:nvSpPr>
+          <p:spPr>
+            <a:xfrm>
+              <a:off x="5161917" y="28964721"/>
+              <a:ext cx="4541593" cy="584775"/>
+            </a:xfrm>
+            <a:prstGeom prst="rect">
+              <a:avLst/>
+            </a:prstGeom>
+            <a:noFill/>
+          </p:spPr>
+          <p:txBody>
+            <a:bodyPr wrap="square" rtlCol="0">
+              <a:spAutoFit/>
+            </a:bodyPr>
+            <a:lstStyle/>
+            <a:p>
+              <a:pPr algn="ctr"/>
+              <a:r>
+                <a:rPr lang="en-GB" sz="1600" b="1" dirty="0"/>
+                <a:t>Figure 13: </a:t>
+              </a:r>
+              <a:r>
+                <a:rPr lang="en-GB" sz="1600" dirty="0"/>
+                <a:t>The third braking zone, visible in-game in F1 25.</a:t>
+              </a:r>
+              <a:endParaRPr lang="en-GB" sz="1600" b="1" dirty="0"/>
+            </a:p>
+          </p:txBody>
+        </p:sp>
+      </p:grpSp>
+      <p:sp>
+        <p:nvSpPr>
+          <p:cNvPr id="59" name="TextBox 58">
+            <a:extLst>
+              <a:ext uri="{FF2B5EF4-FFF2-40B4-BE49-F238E27FC236}">
+                <a16:creationId xmlns:a16="http://schemas.microsoft.com/office/drawing/2014/main" id="{298FE906-97BD-E55A-AF50-CD6A65EF9C00}"/>
+              </a:ext>
+            </a:extLst>
+          </p:cNvPr>
+          <p:cNvSpPr txBox="1"/>
+          <p:nvPr/>
+        </p:nvSpPr>
+        <p:spPr>
+          <a:xfrm>
+            <a:off x="15830254" y="16309330"/>
+            <a:ext cx="4541593" cy="830997"/>
+          </a:xfrm>
+          <a:prstGeom prst="rect">
+            <a:avLst/>
+          </a:prstGeom>
+          <a:noFill/>
+        </p:spPr>
+        <p:txBody>
+          <a:bodyPr wrap="square" rtlCol="0">
+            <a:spAutoFit/>
+          </a:bodyPr>
+          <a:lstStyle/>
+          <a:p>
+            <a:pPr algn="ctr"/>
+            <a:r>
+              <a:rPr lang="en-GB" sz="1600" b="1" dirty="0"/>
+              <a:t>Figures 7 &amp; 8: </a:t>
+            </a:r>
+            <a:r>
+              <a:rPr lang="en-GB" sz="1600" dirty="0"/>
+              <a:t>The car state map for Baku (Azerbaijan).Historical data (left);F1 25 game data (right). Highlights braking zone differences.</a:t>
+            </a:r>
+            <a:endParaRPr lang="en-GB" sz="1600" b="1" dirty="0"/>
+          </a:p>
+        </p:txBody>
+      </p:sp>
+      <p:grpSp>
+        <p:nvGrpSpPr>
+          <p:cNvPr id="66" name="Group 65">
+            <a:extLst>
+              <a:ext uri="{FF2B5EF4-FFF2-40B4-BE49-F238E27FC236}">
+                <a16:creationId xmlns:a16="http://schemas.microsoft.com/office/drawing/2014/main" id="{A3B2E8DA-65F8-FA5B-6DD3-3D518D916427}"/>
+              </a:ext>
+            </a:extLst>
+          </p:cNvPr>
+          <p:cNvGrpSpPr/>
+          <p:nvPr/>
+        </p:nvGrpSpPr>
+        <p:grpSpPr>
+          <a:xfrm>
+            <a:off x="16667907" y="14300766"/>
+            <a:ext cx="2866285" cy="2042620"/>
+            <a:chOff x="16843371" y="14279536"/>
+            <a:chExt cx="2866285" cy="2042620"/>
+          </a:xfrm>
+        </p:grpSpPr>
+        <p:pic>
+          <p:nvPicPr>
+            <p:cNvPr id="63" name="Picture 62">
+              <a:extLst>
+                <a:ext uri="{FF2B5EF4-FFF2-40B4-BE49-F238E27FC236}">
+                  <a16:creationId xmlns:a16="http://schemas.microsoft.com/office/drawing/2014/main" id="{71DAB6B7-F693-649A-6D45-2C5F762141AF}"/>
+                </a:ext>
+              </a:extLst>
+            </p:cNvPr>
+            <p:cNvPicPr>
+              <a:picLocks noChangeAspect="1"/>
+            </p:cNvPicPr>
+            <p:nvPr/>
+          </p:nvPicPr>
+          <p:blipFill>
+            <a:blip r:embed="rId14"/>
+            <a:stretch>
+              <a:fillRect/>
+            </a:stretch>
+          </p:blipFill>
+          <p:spPr>
+            <a:xfrm>
+              <a:off x="18203240" y="14279536"/>
+              <a:ext cx="1506416" cy="1946622"/>
+            </a:xfrm>
+            <a:prstGeom prst="rect">
+              <a:avLst/>
+            </a:prstGeom>
+          </p:spPr>
+        </p:pic>
+        <p:pic>
+          <p:nvPicPr>
+            <p:cNvPr id="65" name="Picture 64">
+              <a:extLst>
+                <a:ext uri="{FF2B5EF4-FFF2-40B4-BE49-F238E27FC236}">
+                  <a16:creationId xmlns:a16="http://schemas.microsoft.com/office/drawing/2014/main" id="{3A2FD2CD-DFE0-5397-7436-06DB1B2E9FB2}"/>
+                </a:ext>
+              </a:extLst>
+            </p:cNvPr>
+            <p:cNvPicPr>
+              <a:picLocks noChangeAspect="1"/>
+            </p:cNvPicPr>
+            <p:nvPr/>
+          </p:nvPicPr>
+          <p:blipFill>
+            <a:blip r:embed="rId15"/>
+            <a:srcRect l="3243" t="1921" r="3770" b="-1394"/>
+            <a:stretch>
+              <a:fillRect/>
+            </a:stretch>
+          </p:blipFill>
+          <p:spPr>
+            <a:xfrm rot="16200000">
+              <a:off x="16553563" y="14574148"/>
+              <a:ext cx="2037816" cy="1458199"/>
+            </a:xfrm>
+            <a:prstGeom prst="rect">
+              <a:avLst/>
+            </a:prstGeom>
+          </p:spPr>
+        </p:pic>
+      </p:grpSp>
     </p:spTree>
     <p:extLst>
       <p:ext uri="{BB962C8B-B14F-4D97-AF65-F5344CB8AC3E}">

--- a/Presentation1.pptx
+++ b/Presentation1.pptx
@@ -3380,7 +3380,7 @@
         </p:nvSpPr>
         <p:spPr>
           <a:xfrm>
-            <a:off x="10980981" y="23936248"/>
+            <a:off x="10978646" y="23832754"/>
             <a:ext cx="9957091" cy="5824704"/>
           </a:xfrm>
           <a:prstGeom prst="roundRect">
@@ -3717,7 +3717,7 @@
         </p:nvSpPr>
         <p:spPr>
           <a:xfrm>
-            <a:off x="445553" y="23936248"/>
+            <a:off x="443217" y="23832754"/>
             <a:ext cx="9957091" cy="5824704"/>
           </a:xfrm>
           <a:prstGeom prst="roundRect">
@@ -3896,7 +3896,7 @@
         </p:nvSpPr>
         <p:spPr>
           <a:xfrm>
-            <a:off x="10978646" y="17778247"/>
+            <a:off x="10978646" y="17657612"/>
             <a:ext cx="9957091" cy="5824704"/>
           </a:xfrm>
           <a:prstGeom prst="roundRect">
@@ -4085,8 +4085,8 @@
         </p:nvSpPr>
         <p:spPr>
           <a:xfrm>
-            <a:off x="10975632" y="3588017"/>
-            <a:ext cx="9943729" cy="7423380"/>
+            <a:off x="10978646" y="3588017"/>
+            <a:ext cx="9940715" cy="7508224"/>
           </a:xfrm>
           <a:prstGeom prst="roundRect">
             <a:avLst/>
@@ -4390,7 +4390,7 @@
         <p:spPr>
           <a:xfrm>
             <a:off x="427845" y="3588017"/>
-            <a:ext cx="9972463" cy="3300122"/>
+            <a:ext cx="9972463" cy="3337840"/>
           </a:xfrm>
           <a:prstGeom prst="roundRect">
             <a:avLst/>
@@ -4484,7 +4484,7 @@
         </p:nvSpPr>
         <p:spPr>
           <a:xfrm>
-            <a:off x="443218" y="17778247"/>
+            <a:off x="443217" y="17657612"/>
             <a:ext cx="9957091" cy="5824704"/>
           </a:xfrm>
           <a:prstGeom prst="roundRect">
@@ -4920,8 +4920,8 @@
         </p:nvSpPr>
         <p:spPr>
           <a:xfrm>
-            <a:off x="435530" y="7234064"/>
-            <a:ext cx="9972464" cy="3777333"/>
+            <a:off x="427844" y="7275736"/>
+            <a:ext cx="9972464" cy="3820505"/>
           </a:xfrm>
           <a:prstGeom prst="roundRect">
             <a:avLst/>
@@ -5841,7 +5841,7 @@
         </p:blipFill>
         <p:spPr>
           <a:xfrm>
-            <a:off x="1014101" y="12477171"/>
+            <a:off x="1014101" y="12464471"/>
             <a:ext cx="5374776" cy="4620118"/>
           </a:xfrm>
           <a:prstGeom prst="rect">
@@ -6217,7 +6217,7 @@
         </p:nvGrpSpPr>
         <p:grpSpPr>
           <a:xfrm>
-            <a:off x="5442536" y="24286686"/>
+            <a:off x="5442536" y="24161994"/>
             <a:ext cx="4541593" cy="2561914"/>
             <a:chOff x="5009622" y="24620561"/>
             <a:chExt cx="4541593" cy="2561914"/>
@@ -6310,7 +6310,7 @@
         </p:nvGrpSpPr>
         <p:grpSpPr>
           <a:xfrm>
-            <a:off x="5440811" y="26858203"/>
+            <a:off x="5440811" y="26733511"/>
             <a:ext cx="4541593" cy="2753206"/>
             <a:chOff x="5161917" y="26796290"/>
             <a:chExt cx="4541593" cy="2753206"/>
